--- a/talks/src/class01.pptx
+++ b/talks/src/class01.pptx
@@ -6,10 +6,10 @@
     <p:sldMasterId id="2147483660" r:id="rId2"/>
   </p:sldMasterIdLst>
   <p:notesMasterIdLst>
-    <p:notesMasterId r:id="rId30"/>
+    <p:notesMasterId r:id="rId36"/>
   </p:notesMasterIdLst>
   <p:handoutMasterIdLst>
-    <p:handoutMasterId r:id="rId31"/>
+    <p:handoutMasterId r:id="rId37"/>
   </p:handoutMasterIdLst>
   <p:sldIdLst>
     <p:sldId id="342" r:id="rId3"/>
@@ -32,13 +32,19 @@
     <p:sldId id="362" r:id="rId20"/>
     <p:sldId id="361" r:id="rId21"/>
     <p:sldId id="360" r:id="rId22"/>
-    <p:sldId id="359" r:id="rId23"/>
-    <p:sldId id="363" r:id="rId24"/>
-    <p:sldId id="364" r:id="rId25"/>
-    <p:sldId id="365" r:id="rId26"/>
-    <p:sldId id="366" r:id="rId27"/>
-    <p:sldId id="367" r:id="rId28"/>
-    <p:sldId id="368" r:id="rId29"/>
+    <p:sldId id="374" r:id="rId23"/>
+    <p:sldId id="359" r:id="rId24"/>
+    <p:sldId id="375" r:id="rId25"/>
+    <p:sldId id="363" r:id="rId26"/>
+    <p:sldId id="364" r:id="rId27"/>
+    <p:sldId id="365" r:id="rId28"/>
+    <p:sldId id="366" r:id="rId29"/>
+    <p:sldId id="367" r:id="rId30"/>
+    <p:sldId id="368" r:id="rId31"/>
+    <p:sldId id="370" r:id="rId32"/>
+    <p:sldId id="371" r:id="rId33"/>
+    <p:sldId id="372" r:id="rId34"/>
+    <p:sldId id="373" r:id="rId35"/>
   </p:sldIdLst>
   <p:sldSz cx="12192000" cy="6858000"/>
   <p:notesSz cx="6858000" cy="9144000"/>
@@ -230,7 +236,7 @@
           <a:p>
             <a:fld id="{56C6788E-680A-49E5-BB93-D456A9D23A29}" type="datetimeFigureOut">
               <a:rPr lang="ru-RU" smtClean="0"/>
-              <a:t>17.10.2025</a:t>
+              <a:t>13.10.2026</a:t>
             </a:fld>
             <a:endParaRPr lang="ru-RU"/>
           </a:p>
@@ -455,7 +461,7 @@
           <a:p>
             <a:fld id="{C4DF4945-C160-4CD5-B124-49B9BE14C0AB}" type="datetimeFigureOut">
               <a:rPr lang="ru-RU" smtClean="0"/>
-              <a:t>17.10.2025</a:t>
+              <a:t>12.10.2026</a:t>
             </a:fld>
             <a:endParaRPr lang="ru-RU"/>
           </a:p>
@@ -2107,7 +2113,13 @@
   <p:cSld>
     <p:spTree>
       <p:nvGrpSpPr>
-        <p:cNvPr id="1" name=""/>
+        <p:cNvPr id="1" name="">
+          <a:extLst>
+            <a:ext uri="{FF2B5EF4-FFF2-40B4-BE49-F238E27FC236}">
+              <a16:creationId xmlns:a16="http://schemas.microsoft.com/office/drawing/2014/main" id="{8FE00FFA-E287-8CE9-897B-30A89F1D2C19}"/>
+            </a:ext>
+          </a:extLst>
+        </p:cNvPr>
         <p:cNvGrpSpPr/>
         <p:nvPr/>
       </p:nvGrpSpPr>
@@ -2121,7 +2133,13 @@
       </p:grpSpPr>
       <p:sp>
         <p:nvSpPr>
-          <p:cNvPr id="2" name="Slide Image Placeholder 1"/>
+          <p:cNvPr id="2" name="Slide Image Placeholder 1">
+            <a:extLst>
+              <a:ext uri="{FF2B5EF4-FFF2-40B4-BE49-F238E27FC236}">
+                <a16:creationId xmlns:a16="http://schemas.microsoft.com/office/drawing/2014/main" id="{ED04C0B3-5556-18A0-CEBF-23B62B2BC9C5}"/>
+              </a:ext>
+            </a:extLst>
+          </p:cNvPr>
           <p:cNvSpPr>
             <a:spLocks noGrp="1" noRot="1" noChangeAspect="1"/>
           </p:cNvSpPr>
@@ -2133,7 +2151,13 @@
       </p:sp>
       <p:sp>
         <p:nvSpPr>
-          <p:cNvPr id="3" name="Notes Placeholder 2"/>
+          <p:cNvPr id="3" name="Notes Placeholder 2">
+            <a:extLst>
+              <a:ext uri="{FF2B5EF4-FFF2-40B4-BE49-F238E27FC236}">
+                <a16:creationId xmlns:a16="http://schemas.microsoft.com/office/drawing/2014/main" id="{180AECBC-481B-3C8B-56DC-07C998967928}"/>
+              </a:ext>
+            </a:extLst>
+          </p:cNvPr>
           <p:cNvSpPr>
             <a:spLocks noGrp="1"/>
           </p:cNvSpPr>
@@ -2152,7 +2176,13 @@
       </p:sp>
       <p:sp>
         <p:nvSpPr>
-          <p:cNvPr id="4" name="Slide Number Placeholder 3"/>
+          <p:cNvPr id="4" name="Slide Number Placeholder 3">
+            <a:extLst>
+              <a:ext uri="{FF2B5EF4-FFF2-40B4-BE49-F238E27FC236}">
+                <a16:creationId xmlns:a16="http://schemas.microsoft.com/office/drawing/2014/main" id="{B810E4DC-F5D3-6BE5-15E7-DDBFEAE7F937}"/>
+              </a:ext>
+            </a:extLst>
+          </p:cNvPr>
           <p:cNvSpPr>
             <a:spLocks noGrp="1"/>
           </p:cNvSpPr>
@@ -2175,7 +2205,13 @@
       </p:sp>
       <p:sp>
         <p:nvSpPr>
-          <p:cNvPr id="5" name="Header Placeholder 4"/>
+          <p:cNvPr id="5" name="Header Placeholder 4">
+            <a:extLst>
+              <a:ext uri="{FF2B5EF4-FFF2-40B4-BE49-F238E27FC236}">
+                <a16:creationId xmlns:a16="http://schemas.microsoft.com/office/drawing/2014/main" id="{33EABC1C-BA21-6005-C5C8-1DA54A0C36C5}"/>
+              </a:ext>
+            </a:extLst>
+          </p:cNvPr>
           <p:cNvSpPr>
             <a:spLocks noGrp="1"/>
           </p:cNvSpPr>
@@ -2198,7 +2234,7 @@
     </p:spTree>
     <p:extLst>
       <p:ext uri="{BB962C8B-B14F-4D97-AF65-F5344CB8AC3E}">
-        <p14:creationId xmlns:p14="http://schemas.microsoft.com/office/powerpoint/2010/main" val="2382645491"/>
+        <p14:creationId xmlns:p14="http://schemas.microsoft.com/office/powerpoint/2010/main" val="877345046"/>
       </p:ext>
     </p:extLst>
   </p:cSld>
@@ -2304,7 +2340,7 @@
     </p:spTree>
     <p:extLst>
       <p:ext uri="{BB962C8B-B14F-4D97-AF65-F5344CB8AC3E}">
-        <p14:creationId xmlns:p14="http://schemas.microsoft.com/office/powerpoint/2010/main" val="3544946593"/>
+        <p14:creationId xmlns:p14="http://schemas.microsoft.com/office/powerpoint/2010/main" val="2382645491"/>
       </p:ext>
     </p:extLst>
   </p:cSld>
@@ -2319,7 +2355,13 @@
   <p:cSld>
     <p:spTree>
       <p:nvGrpSpPr>
-        <p:cNvPr id="1" name=""/>
+        <p:cNvPr id="1" name="">
+          <a:extLst>
+            <a:ext uri="{FF2B5EF4-FFF2-40B4-BE49-F238E27FC236}">
+              <a16:creationId xmlns:a16="http://schemas.microsoft.com/office/drawing/2014/main" id="{4895437F-6B3B-1814-34E1-A76373C25227}"/>
+            </a:ext>
+          </a:extLst>
+        </p:cNvPr>
         <p:cNvGrpSpPr/>
         <p:nvPr/>
       </p:nvGrpSpPr>
@@ -2333,7 +2375,13 @@
       </p:grpSpPr>
       <p:sp>
         <p:nvSpPr>
-          <p:cNvPr id="2" name="Slide Image Placeholder 1"/>
+          <p:cNvPr id="2" name="Slide Image Placeholder 1">
+            <a:extLst>
+              <a:ext uri="{FF2B5EF4-FFF2-40B4-BE49-F238E27FC236}">
+                <a16:creationId xmlns:a16="http://schemas.microsoft.com/office/drawing/2014/main" id="{4AB55334-48CB-4C61-C566-005EFDF6F0E7}"/>
+              </a:ext>
+            </a:extLst>
+          </p:cNvPr>
           <p:cNvSpPr>
             <a:spLocks noGrp="1" noRot="1" noChangeAspect="1"/>
           </p:cNvSpPr>
@@ -2345,7 +2393,13 @@
       </p:sp>
       <p:sp>
         <p:nvSpPr>
-          <p:cNvPr id="3" name="Notes Placeholder 2"/>
+          <p:cNvPr id="3" name="Notes Placeholder 2">
+            <a:extLst>
+              <a:ext uri="{FF2B5EF4-FFF2-40B4-BE49-F238E27FC236}">
+                <a16:creationId xmlns:a16="http://schemas.microsoft.com/office/drawing/2014/main" id="{DA38BA59-2E48-B586-C366-EC6AEEDED753}"/>
+              </a:ext>
+            </a:extLst>
+          </p:cNvPr>
           <p:cNvSpPr>
             <a:spLocks noGrp="1"/>
           </p:cNvSpPr>
@@ -2364,7 +2418,13 @@
       </p:sp>
       <p:sp>
         <p:nvSpPr>
-          <p:cNvPr id="4" name="Slide Number Placeholder 3"/>
+          <p:cNvPr id="4" name="Slide Number Placeholder 3">
+            <a:extLst>
+              <a:ext uri="{FF2B5EF4-FFF2-40B4-BE49-F238E27FC236}">
+                <a16:creationId xmlns:a16="http://schemas.microsoft.com/office/drawing/2014/main" id="{FC8C0377-777E-BD5B-2556-5988BB22C1A0}"/>
+              </a:ext>
+            </a:extLst>
+          </p:cNvPr>
           <p:cNvSpPr>
             <a:spLocks noGrp="1"/>
           </p:cNvSpPr>
@@ -2387,7 +2447,13 @@
       </p:sp>
       <p:sp>
         <p:nvSpPr>
-          <p:cNvPr id="5" name="Header Placeholder 4"/>
+          <p:cNvPr id="5" name="Header Placeholder 4">
+            <a:extLst>
+              <a:ext uri="{FF2B5EF4-FFF2-40B4-BE49-F238E27FC236}">
+                <a16:creationId xmlns:a16="http://schemas.microsoft.com/office/drawing/2014/main" id="{7B7C2913-5B2D-48A8-A60A-FB6E6A681350}"/>
+              </a:ext>
+            </a:extLst>
+          </p:cNvPr>
           <p:cNvSpPr>
             <a:spLocks noGrp="1"/>
           </p:cNvSpPr>
@@ -2410,7 +2476,7 @@
     </p:spTree>
     <p:extLst>
       <p:ext uri="{BB962C8B-B14F-4D97-AF65-F5344CB8AC3E}">
-        <p14:creationId xmlns:p14="http://schemas.microsoft.com/office/powerpoint/2010/main" val="1797341577"/>
+        <p14:creationId xmlns:p14="http://schemas.microsoft.com/office/powerpoint/2010/main" val="521899069"/>
       </p:ext>
     </p:extLst>
   </p:cSld>
@@ -2516,7 +2582,7 @@
     </p:spTree>
     <p:extLst>
       <p:ext uri="{BB962C8B-B14F-4D97-AF65-F5344CB8AC3E}">
-        <p14:creationId xmlns:p14="http://schemas.microsoft.com/office/powerpoint/2010/main" val="661924588"/>
+        <p14:creationId xmlns:p14="http://schemas.microsoft.com/office/powerpoint/2010/main" val="3544946593"/>
       </p:ext>
     </p:extLst>
   </p:cSld>
@@ -2622,7 +2688,7 @@
     </p:spTree>
     <p:extLst>
       <p:ext uri="{BB962C8B-B14F-4D97-AF65-F5344CB8AC3E}">
-        <p14:creationId xmlns:p14="http://schemas.microsoft.com/office/powerpoint/2010/main" val="2382938030"/>
+        <p14:creationId xmlns:p14="http://schemas.microsoft.com/office/powerpoint/2010/main" val="1797341577"/>
       </p:ext>
     </p:extLst>
   </p:cSld>
@@ -2728,7 +2794,7 @@
     </p:spTree>
     <p:extLst>
       <p:ext uri="{BB962C8B-B14F-4D97-AF65-F5344CB8AC3E}">
-        <p14:creationId xmlns:p14="http://schemas.microsoft.com/office/powerpoint/2010/main" val="626644971"/>
+        <p14:creationId xmlns:p14="http://schemas.microsoft.com/office/powerpoint/2010/main" val="661924588"/>
       </p:ext>
     </p:extLst>
   </p:cSld>
@@ -2804,6 +2870,218 @@
             <a:fld id="{7F33120B-582B-4354-977D-A474A534F6B9}" type="slidenum">
               <a:rPr lang="ru-RU" smtClean="0"/>
               <a:t>27</a:t>
+            </a:fld>
+            <a:endParaRPr lang="ru-RU"/>
+          </a:p>
+        </p:txBody>
+      </p:sp>
+      <p:sp>
+        <p:nvSpPr>
+          <p:cNvPr id="5" name="Header Placeholder 4"/>
+          <p:cNvSpPr>
+            <a:spLocks noGrp="1"/>
+          </p:cNvSpPr>
+          <p:nvPr>
+            <p:ph type="hdr" sz="quarter" idx="11"/>
+          </p:nvPr>
+        </p:nvSpPr>
+        <p:spPr/>
+        <p:txBody>
+          <a:bodyPr/>
+          <a:lstStyle/>
+          <a:p>
+            <a:r>
+              <a:rPr lang="ru-RU"/>
+              <a:t>Основы построения файловых систем</a:t>
+            </a:r>
+          </a:p>
+        </p:txBody>
+      </p:sp>
+    </p:spTree>
+    <p:extLst>
+      <p:ext uri="{BB962C8B-B14F-4D97-AF65-F5344CB8AC3E}">
+        <p14:creationId xmlns:p14="http://schemas.microsoft.com/office/powerpoint/2010/main" val="2382938030"/>
+      </p:ext>
+    </p:extLst>
+  </p:cSld>
+  <p:clrMapOvr>
+    <a:masterClrMapping/>
+  </p:clrMapOvr>
+</p:notes>
+</file>
+
+<file path=ppt/notesSlides/notesSlide28.xml><?xml version="1.0" encoding="utf-8"?>
+<p:notes xmlns:a="http://schemas.openxmlformats.org/drawingml/2006/main" xmlns:r="http://schemas.openxmlformats.org/officeDocument/2006/relationships" xmlns:p="http://schemas.openxmlformats.org/presentationml/2006/main">
+  <p:cSld>
+    <p:spTree>
+      <p:nvGrpSpPr>
+        <p:cNvPr id="1" name=""/>
+        <p:cNvGrpSpPr/>
+        <p:nvPr/>
+      </p:nvGrpSpPr>
+      <p:grpSpPr>
+        <a:xfrm>
+          <a:off x="0" y="0"/>
+          <a:ext cx="0" cy="0"/>
+          <a:chOff x="0" y="0"/>
+          <a:chExt cx="0" cy="0"/>
+        </a:xfrm>
+      </p:grpSpPr>
+      <p:sp>
+        <p:nvSpPr>
+          <p:cNvPr id="2" name="Slide Image Placeholder 1"/>
+          <p:cNvSpPr>
+            <a:spLocks noGrp="1" noRot="1" noChangeAspect="1"/>
+          </p:cNvSpPr>
+          <p:nvPr>
+            <p:ph type="sldImg"/>
+          </p:nvPr>
+        </p:nvSpPr>
+        <p:spPr/>
+      </p:sp>
+      <p:sp>
+        <p:nvSpPr>
+          <p:cNvPr id="3" name="Notes Placeholder 2"/>
+          <p:cNvSpPr>
+            <a:spLocks noGrp="1"/>
+          </p:cNvSpPr>
+          <p:nvPr>
+            <p:ph type="body" idx="1"/>
+          </p:nvPr>
+        </p:nvSpPr>
+        <p:spPr/>
+        <p:txBody>
+          <a:bodyPr/>
+          <a:lstStyle/>
+          <a:p>
+            <a:endParaRPr lang="ru-RU"/>
+          </a:p>
+        </p:txBody>
+      </p:sp>
+      <p:sp>
+        <p:nvSpPr>
+          <p:cNvPr id="4" name="Slide Number Placeholder 3"/>
+          <p:cNvSpPr>
+            <a:spLocks noGrp="1"/>
+          </p:cNvSpPr>
+          <p:nvPr>
+            <p:ph type="sldNum" sz="quarter" idx="10"/>
+          </p:nvPr>
+        </p:nvSpPr>
+        <p:spPr/>
+        <p:txBody>
+          <a:bodyPr/>
+          <a:lstStyle/>
+          <a:p>
+            <a:fld id="{7F33120B-582B-4354-977D-A474A534F6B9}" type="slidenum">
+              <a:rPr lang="ru-RU" smtClean="0"/>
+              <a:t>28</a:t>
+            </a:fld>
+            <a:endParaRPr lang="ru-RU"/>
+          </a:p>
+        </p:txBody>
+      </p:sp>
+      <p:sp>
+        <p:nvSpPr>
+          <p:cNvPr id="5" name="Header Placeholder 4"/>
+          <p:cNvSpPr>
+            <a:spLocks noGrp="1"/>
+          </p:cNvSpPr>
+          <p:nvPr>
+            <p:ph type="hdr" sz="quarter" idx="11"/>
+          </p:nvPr>
+        </p:nvSpPr>
+        <p:spPr/>
+        <p:txBody>
+          <a:bodyPr/>
+          <a:lstStyle/>
+          <a:p>
+            <a:r>
+              <a:rPr lang="ru-RU"/>
+              <a:t>Основы построения файловых систем</a:t>
+            </a:r>
+          </a:p>
+        </p:txBody>
+      </p:sp>
+    </p:spTree>
+    <p:extLst>
+      <p:ext uri="{BB962C8B-B14F-4D97-AF65-F5344CB8AC3E}">
+        <p14:creationId xmlns:p14="http://schemas.microsoft.com/office/powerpoint/2010/main" val="626644971"/>
+      </p:ext>
+    </p:extLst>
+  </p:cSld>
+  <p:clrMapOvr>
+    <a:masterClrMapping/>
+  </p:clrMapOvr>
+</p:notes>
+</file>
+
+<file path=ppt/notesSlides/notesSlide29.xml><?xml version="1.0" encoding="utf-8"?>
+<p:notes xmlns:a="http://schemas.openxmlformats.org/drawingml/2006/main" xmlns:r="http://schemas.openxmlformats.org/officeDocument/2006/relationships" xmlns:p="http://schemas.openxmlformats.org/presentationml/2006/main">
+  <p:cSld>
+    <p:spTree>
+      <p:nvGrpSpPr>
+        <p:cNvPr id="1" name=""/>
+        <p:cNvGrpSpPr/>
+        <p:nvPr/>
+      </p:nvGrpSpPr>
+      <p:grpSpPr>
+        <a:xfrm>
+          <a:off x="0" y="0"/>
+          <a:ext cx="0" cy="0"/>
+          <a:chOff x="0" y="0"/>
+          <a:chExt cx="0" cy="0"/>
+        </a:xfrm>
+      </p:grpSpPr>
+      <p:sp>
+        <p:nvSpPr>
+          <p:cNvPr id="2" name="Slide Image Placeholder 1"/>
+          <p:cNvSpPr>
+            <a:spLocks noGrp="1" noRot="1" noChangeAspect="1"/>
+          </p:cNvSpPr>
+          <p:nvPr>
+            <p:ph type="sldImg"/>
+          </p:nvPr>
+        </p:nvSpPr>
+        <p:spPr/>
+      </p:sp>
+      <p:sp>
+        <p:nvSpPr>
+          <p:cNvPr id="3" name="Notes Placeholder 2"/>
+          <p:cNvSpPr>
+            <a:spLocks noGrp="1"/>
+          </p:cNvSpPr>
+          <p:nvPr>
+            <p:ph type="body" idx="1"/>
+          </p:nvPr>
+        </p:nvSpPr>
+        <p:spPr/>
+        <p:txBody>
+          <a:bodyPr/>
+          <a:lstStyle/>
+          <a:p>
+            <a:endParaRPr lang="ru-RU"/>
+          </a:p>
+        </p:txBody>
+      </p:sp>
+      <p:sp>
+        <p:nvSpPr>
+          <p:cNvPr id="4" name="Slide Number Placeholder 3"/>
+          <p:cNvSpPr>
+            <a:spLocks noGrp="1"/>
+          </p:cNvSpPr>
+          <p:nvPr>
+            <p:ph type="sldNum" sz="quarter" idx="10"/>
+          </p:nvPr>
+        </p:nvSpPr>
+        <p:spPr/>
+        <p:txBody>
+          <a:bodyPr/>
+          <a:lstStyle/>
+          <a:p>
+            <a:fld id="{7F33120B-582B-4354-977D-A474A534F6B9}" type="slidenum">
+              <a:rPr lang="ru-RU" smtClean="0"/>
+              <a:t>29</a:t>
             </a:fld>
             <a:endParaRPr lang="ru-RU"/>
           </a:p>
@@ -2950,6 +3228,550 @@
 </p:notes>
 </file>
 
+<file path=ppt/notesSlides/notesSlide30.xml><?xml version="1.0" encoding="utf-8"?>
+<p:notes xmlns:a="http://schemas.openxmlformats.org/drawingml/2006/main" xmlns:r="http://schemas.openxmlformats.org/officeDocument/2006/relationships" xmlns:p="http://schemas.openxmlformats.org/presentationml/2006/main">
+  <p:cSld>
+    <p:spTree>
+      <p:nvGrpSpPr>
+        <p:cNvPr id="1" name="">
+          <a:extLst>
+            <a:ext uri="{FF2B5EF4-FFF2-40B4-BE49-F238E27FC236}">
+              <a16:creationId xmlns:a16="http://schemas.microsoft.com/office/drawing/2014/main" id="{A46B1278-021C-DB18-A61C-B459780A3B53}"/>
+            </a:ext>
+          </a:extLst>
+        </p:cNvPr>
+        <p:cNvGrpSpPr/>
+        <p:nvPr/>
+      </p:nvGrpSpPr>
+      <p:grpSpPr>
+        <a:xfrm>
+          <a:off x="0" y="0"/>
+          <a:ext cx="0" cy="0"/>
+          <a:chOff x="0" y="0"/>
+          <a:chExt cx="0" cy="0"/>
+        </a:xfrm>
+      </p:grpSpPr>
+      <p:sp>
+        <p:nvSpPr>
+          <p:cNvPr id="2" name="Slide Image Placeholder 1">
+            <a:extLst>
+              <a:ext uri="{FF2B5EF4-FFF2-40B4-BE49-F238E27FC236}">
+                <a16:creationId xmlns:a16="http://schemas.microsoft.com/office/drawing/2014/main" id="{07038120-92E0-245D-D6CE-C12D1692DB64}"/>
+              </a:ext>
+            </a:extLst>
+          </p:cNvPr>
+          <p:cNvSpPr>
+            <a:spLocks noGrp="1" noRot="1" noChangeAspect="1"/>
+          </p:cNvSpPr>
+          <p:nvPr>
+            <p:ph type="sldImg"/>
+          </p:nvPr>
+        </p:nvSpPr>
+        <p:spPr/>
+      </p:sp>
+      <p:sp>
+        <p:nvSpPr>
+          <p:cNvPr id="3" name="Notes Placeholder 2">
+            <a:extLst>
+              <a:ext uri="{FF2B5EF4-FFF2-40B4-BE49-F238E27FC236}">
+                <a16:creationId xmlns:a16="http://schemas.microsoft.com/office/drawing/2014/main" id="{15923BB4-8BE0-C6A6-352A-794BB5C912BF}"/>
+              </a:ext>
+            </a:extLst>
+          </p:cNvPr>
+          <p:cNvSpPr>
+            <a:spLocks noGrp="1"/>
+          </p:cNvSpPr>
+          <p:nvPr>
+            <p:ph type="body" idx="1"/>
+          </p:nvPr>
+        </p:nvSpPr>
+        <p:spPr/>
+        <p:txBody>
+          <a:bodyPr/>
+          <a:lstStyle/>
+          <a:p>
+            <a:endParaRPr lang="ru-RU"/>
+          </a:p>
+        </p:txBody>
+      </p:sp>
+      <p:sp>
+        <p:nvSpPr>
+          <p:cNvPr id="4" name="Slide Number Placeholder 3">
+            <a:extLst>
+              <a:ext uri="{FF2B5EF4-FFF2-40B4-BE49-F238E27FC236}">
+                <a16:creationId xmlns:a16="http://schemas.microsoft.com/office/drawing/2014/main" id="{FD779FA5-8A3B-1DCF-D2CF-A9018B61F2A2}"/>
+              </a:ext>
+            </a:extLst>
+          </p:cNvPr>
+          <p:cNvSpPr>
+            <a:spLocks noGrp="1"/>
+          </p:cNvSpPr>
+          <p:nvPr>
+            <p:ph type="sldNum" sz="quarter" idx="10"/>
+          </p:nvPr>
+        </p:nvSpPr>
+        <p:spPr/>
+        <p:txBody>
+          <a:bodyPr/>
+          <a:lstStyle/>
+          <a:p>
+            <a:fld id="{7F33120B-582B-4354-977D-A474A534F6B9}" type="slidenum">
+              <a:rPr lang="ru-RU" smtClean="0"/>
+              <a:t>30</a:t>
+            </a:fld>
+            <a:endParaRPr lang="ru-RU"/>
+          </a:p>
+        </p:txBody>
+      </p:sp>
+      <p:sp>
+        <p:nvSpPr>
+          <p:cNvPr id="5" name="Header Placeholder 4">
+            <a:extLst>
+              <a:ext uri="{FF2B5EF4-FFF2-40B4-BE49-F238E27FC236}">
+                <a16:creationId xmlns:a16="http://schemas.microsoft.com/office/drawing/2014/main" id="{6658159C-ECF9-6237-B1C1-EBD7265E4F0A}"/>
+              </a:ext>
+            </a:extLst>
+          </p:cNvPr>
+          <p:cNvSpPr>
+            <a:spLocks noGrp="1"/>
+          </p:cNvSpPr>
+          <p:nvPr>
+            <p:ph type="hdr" sz="quarter" idx="11"/>
+          </p:nvPr>
+        </p:nvSpPr>
+        <p:spPr/>
+        <p:txBody>
+          <a:bodyPr/>
+          <a:lstStyle/>
+          <a:p>
+            <a:r>
+              <a:rPr lang="ru-RU"/>
+              <a:t>Основы построения файловых систем</a:t>
+            </a:r>
+          </a:p>
+        </p:txBody>
+      </p:sp>
+    </p:spTree>
+    <p:extLst>
+      <p:ext uri="{BB962C8B-B14F-4D97-AF65-F5344CB8AC3E}">
+        <p14:creationId xmlns:p14="http://schemas.microsoft.com/office/powerpoint/2010/main" val="1175698953"/>
+      </p:ext>
+    </p:extLst>
+  </p:cSld>
+  <p:clrMapOvr>
+    <a:masterClrMapping/>
+  </p:clrMapOvr>
+</p:notes>
+</file>
+
+<file path=ppt/notesSlides/notesSlide31.xml><?xml version="1.0" encoding="utf-8"?>
+<p:notes xmlns:a="http://schemas.openxmlformats.org/drawingml/2006/main" xmlns:r="http://schemas.openxmlformats.org/officeDocument/2006/relationships" xmlns:p="http://schemas.openxmlformats.org/presentationml/2006/main">
+  <p:cSld>
+    <p:spTree>
+      <p:nvGrpSpPr>
+        <p:cNvPr id="1" name="">
+          <a:extLst>
+            <a:ext uri="{FF2B5EF4-FFF2-40B4-BE49-F238E27FC236}">
+              <a16:creationId xmlns:a16="http://schemas.microsoft.com/office/drawing/2014/main" id="{6E6D8AF2-E43B-05CE-FB4F-C4D167DB231A}"/>
+            </a:ext>
+          </a:extLst>
+        </p:cNvPr>
+        <p:cNvGrpSpPr/>
+        <p:nvPr/>
+      </p:nvGrpSpPr>
+      <p:grpSpPr>
+        <a:xfrm>
+          <a:off x="0" y="0"/>
+          <a:ext cx="0" cy="0"/>
+          <a:chOff x="0" y="0"/>
+          <a:chExt cx="0" cy="0"/>
+        </a:xfrm>
+      </p:grpSpPr>
+      <p:sp>
+        <p:nvSpPr>
+          <p:cNvPr id="2" name="Slide Image Placeholder 1">
+            <a:extLst>
+              <a:ext uri="{FF2B5EF4-FFF2-40B4-BE49-F238E27FC236}">
+                <a16:creationId xmlns:a16="http://schemas.microsoft.com/office/drawing/2014/main" id="{59CE0A17-AE73-78A2-1140-981CC1644694}"/>
+              </a:ext>
+            </a:extLst>
+          </p:cNvPr>
+          <p:cNvSpPr>
+            <a:spLocks noGrp="1" noRot="1" noChangeAspect="1"/>
+          </p:cNvSpPr>
+          <p:nvPr>
+            <p:ph type="sldImg"/>
+          </p:nvPr>
+        </p:nvSpPr>
+        <p:spPr/>
+      </p:sp>
+      <p:sp>
+        <p:nvSpPr>
+          <p:cNvPr id="3" name="Notes Placeholder 2">
+            <a:extLst>
+              <a:ext uri="{FF2B5EF4-FFF2-40B4-BE49-F238E27FC236}">
+                <a16:creationId xmlns:a16="http://schemas.microsoft.com/office/drawing/2014/main" id="{3025EDA1-288F-76FD-9F5A-77CD572D20FE}"/>
+              </a:ext>
+            </a:extLst>
+          </p:cNvPr>
+          <p:cNvSpPr>
+            <a:spLocks noGrp="1"/>
+          </p:cNvSpPr>
+          <p:nvPr>
+            <p:ph type="body" idx="1"/>
+          </p:nvPr>
+        </p:nvSpPr>
+        <p:spPr/>
+        <p:txBody>
+          <a:bodyPr/>
+          <a:lstStyle/>
+          <a:p>
+            <a:endParaRPr lang="ru-RU"/>
+          </a:p>
+        </p:txBody>
+      </p:sp>
+      <p:sp>
+        <p:nvSpPr>
+          <p:cNvPr id="4" name="Slide Number Placeholder 3">
+            <a:extLst>
+              <a:ext uri="{FF2B5EF4-FFF2-40B4-BE49-F238E27FC236}">
+                <a16:creationId xmlns:a16="http://schemas.microsoft.com/office/drawing/2014/main" id="{4BB3F104-B310-D17B-141F-95870C80D4BB}"/>
+              </a:ext>
+            </a:extLst>
+          </p:cNvPr>
+          <p:cNvSpPr>
+            <a:spLocks noGrp="1"/>
+          </p:cNvSpPr>
+          <p:nvPr>
+            <p:ph type="sldNum" sz="quarter" idx="10"/>
+          </p:nvPr>
+        </p:nvSpPr>
+        <p:spPr/>
+        <p:txBody>
+          <a:bodyPr/>
+          <a:lstStyle/>
+          <a:p>
+            <a:fld id="{7F33120B-582B-4354-977D-A474A534F6B9}" type="slidenum">
+              <a:rPr lang="ru-RU" smtClean="0"/>
+              <a:t>31</a:t>
+            </a:fld>
+            <a:endParaRPr lang="ru-RU"/>
+          </a:p>
+        </p:txBody>
+      </p:sp>
+      <p:sp>
+        <p:nvSpPr>
+          <p:cNvPr id="5" name="Header Placeholder 4">
+            <a:extLst>
+              <a:ext uri="{FF2B5EF4-FFF2-40B4-BE49-F238E27FC236}">
+                <a16:creationId xmlns:a16="http://schemas.microsoft.com/office/drawing/2014/main" id="{0E0092A8-7882-EA4B-B069-A0CCF0098A88}"/>
+              </a:ext>
+            </a:extLst>
+          </p:cNvPr>
+          <p:cNvSpPr>
+            <a:spLocks noGrp="1"/>
+          </p:cNvSpPr>
+          <p:nvPr>
+            <p:ph type="hdr" sz="quarter" idx="11"/>
+          </p:nvPr>
+        </p:nvSpPr>
+        <p:spPr/>
+        <p:txBody>
+          <a:bodyPr/>
+          <a:lstStyle/>
+          <a:p>
+            <a:r>
+              <a:rPr lang="ru-RU"/>
+              <a:t>Основы построения файловых систем</a:t>
+            </a:r>
+          </a:p>
+        </p:txBody>
+      </p:sp>
+    </p:spTree>
+    <p:extLst>
+      <p:ext uri="{BB962C8B-B14F-4D97-AF65-F5344CB8AC3E}">
+        <p14:creationId xmlns:p14="http://schemas.microsoft.com/office/powerpoint/2010/main" val="3692217843"/>
+      </p:ext>
+    </p:extLst>
+  </p:cSld>
+  <p:clrMapOvr>
+    <a:masterClrMapping/>
+  </p:clrMapOvr>
+</p:notes>
+</file>
+
+<file path=ppt/notesSlides/notesSlide32.xml><?xml version="1.0" encoding="utf-8"?>
+<p:notes xmlns:a="http://schemas.openxmlformats.org/drawingml/2006/main" xmlns:r="http://schemas.openxmlformats.org/officeDocument/2006/relationships" xmlns:p="http://schemas.openxmlformats.org/presentationml/2006/main">
+  <p:cSld>
+    <p:spTree>
+      <p:nvGrpSpPr>
+        <p:cNvPr id="1" name="">
+          <a:extLst>
+            <a:ext uri="{FF2B5EF4-FFF2-40B4-BE49-F238E27FC236}">
+              <a16:creationId xmlns:a16="http://schemas.microsoft.com/office/drawing/2014/main" id="{BF888F5B-43CC-9796-15D9-4ABA96EA3323}"/>
+            </a:ext>
+          </a:extLst>
+        </p:cNvPr>
+        <p:cNvGrpSpPr/>
+        <p:nvPr/>
+      </p:nvGrpSpPr>
+      <p:grpSpPr>
+        <a:xfrm>
+          <a:off x="0" y="0"/>
+          <a:ext cx="0" cy="0"/>
+          <a:chOff x="0" y="0"/>
+          <a:chExt cx="0" cy="0"/>
+        </a:xfrm>
+      </p:grpSpPr>
+      <p:sp>
+        <p:nvSpPr>
+          <p:cNvPr id="2" name="Slide Image Placeholder 1">
+            <a:extLst>
+              <a:ext uri="{FF2B5EF4-FFF2-40B4-BE49-F238E27FC236}">
+                <a16:creationId xmlns:a16="http://schemas.microsoft.com/office/drawing/2014/main" id="{172DA8F5-9E80-EF7E-1114-871CB515932F}"/>
+              </a:ext>
+            </a:extLst>
+          </p:cNvPr>
+          <p:cNvSpPr>
+            <a:spLocks noGrp="1" noRot="1" noChangeAspect="1"/>
+          </p:cNvSpPr>
+          <p:nvPr>
+            <p:ph type="sldImg"/>
+          </p:nvPr>
+        </p:nvSpPr>
+        <p:spPr/>
+      </p:sp>
+      <p:sp>
+        <p:nvSpPr>
+          <p:cNvPr id="3" name="Notes Placeholder 2">
+            <a:extLst>
+              <a:ext uri="{FF2B5EF4-FFF2-40B4-BE49-F238E27FC236}">
+                <a16:creationId xmlns:a16="http://schemas.microsoft.com/office/drawing/2014/main" id="{653D2C15-CFE0-D183-7BFE-57C702420A02}"/>
+              </a:ext>
+            </a:extLst>
+          </p:cNvPr>
+          <p:cNvSpPr>
+            <a:spLocks noGrp="1"/>
+          </p:cNvSpPr>
+          <p:nvPr>
+            <p:ph type="body" idx="1"/>
+          </p:nvPr>
+        </p:nvSpPr>
+        <p:spPr/>
+        <p:txBody>
+          <a:bodyPr/>
+          <a:lstStyle/>
+          <a:p>
+            <a:endParaRPr lang="ru-RU"/>
+          </a:p>
+        </p:txBody>
+      </p:sp>
+      <p:sp>
+        <p:nvSpPr>
+          <p:cNvPr id="4" name="Slide Number Placeholder 3">
+            <a:extLst>
+              <a:ext uri="{FF2B5EF4-FFF2-40B4-BE49-F238E27FC236}">
+                <a16:creationId xmlns:a16="http://schemas.microsoft.com/office/drawing/2014/main" id="{34478427-4267-F38E-9D13-10CEED1DE6CD}"/>
+              </a:ext>
+            </a:extLst>
+          </p:cNvPr>
+          <p:cNvSpPr>
+            <a:spLocks noGrp="1"/>
+          </p:cNvSpPr>
+          <p:nvPr>
+            <p:ph type="sldNum" sz="quarter" idx="10"/>
+          </p:nvPr>
+        </p:nvSpPr>
+        <p:spPr/>
+        <p:txBody>
+          <a:bodyPr/>
+          <a:lstStyle/>
+          <a:p>
+            <a:fld id="{7F33120B-582B-4354-977D-A474A534F6B9}" type="slidenum">
+              <a:rPr lang="ru-RU" smtClean="0"/>
+              <a:t>32</a:t>
+            </a:fld>
+            <a:endParaRPr lang="ru-RU"/>
+          </a:p>
+        </p:txBody>
+      </p:sp>
+      <p:sp>
+        <p:nvSpPr>
+          <p:cNvPr id="5" name="Header Placeholder 4">
+            <a:extLst>
+              <a:ext uri="{FF2B5EF4-FFF2-40B4-BE49-F238E27FC236}">
+                <a16:creationId xmlns:a16="http://schemas.microsoft.com/office/drawing/2014/main" id="{DD2FB68A-FADF-F7AB-0157-9A2F79E22BF1}"/>
+              </a:ext>
+            </a:extLst>
+          </p:cNvPr>
+          <p:cNvSpPr>
+            <a:spLocks noGrp="1"/>
+          </p:cNvSpPr>
+          <p:nvPr>
+            <p:ph type="hdr" sz="quarter" idx="11"/>
+          </p:nvPr>
+        </p:nvSpPr>
+        <p:spPr/>
+        <p:txBody>
+          <a:bodyPr/>
+          <a:lstStyle/>
+          <a:p>
+            <a:r>
+              <a:rPr lang="ru-RU"/>
+              <a:t>Основы построения файловых систем</a:t>
+            </a:r>
+          </a:p>
+        </p:txBody>
+      </p:sp>
+    </p:spTree>
+    <p:extLst>
+      <p:ext uri="{BB962C8B-B14F-4D97-AF65-F5344CB8AC3E}">
+        <p14:creationId xmlns:p14="http://schemas.microsoft.com/office/powerpoint/2010/main" val="3997220760"/>
+      </p:ext>
+    </p:extLst>
+  </p:cSld>
+  <p:clrMapOvr>
+    <a:masterClrMapping/>
+  </p:clrMapOvr>
+</p:notes>
+</file>
+
+<file path=ppt/notesSlides/notesSlide33.xml><?xml version="1.0" encoding="utf-8"?>
+<p:notes xmlns:a="http://schemas.openxmlformats.org/drawingml/2006/main" xmlns:r="http://schemas.openxmlformats.org/officeDocument/2006/relationships" xmlns:p="http://schemas.openxmlformats.org/presentationml/2006/main">
+  <p:cSld>
+    <p:spTree>
+      <p:nvGrpSpPr>
+        <p:cNvPr id="1" name="">
+          <a:extLst>
+            <a:ext uri="{FF2B5EF4-FFF2-40B4-BE49-F238E27FC236}">
+              <a16:creationId xmlns:a16="http://schemas.microsoft.com/office/drawing/2014/main" id="{CD74C154-A7A1-7B50-0A2C-C5B1CC9F3AA3}"/>
+            </a:ext>
+          </a:extLst>
+        </p:cNvPr>
+        <p:cNvGrpSpPr/>
+        <p:nvPr/>
+      </p:nvGrpSpPr>
+      <p:grpSpPr>
+        <a:xfrm>
+          <a:off x="0" y="0"/>
+          <a:ext cx="0" cy="0"/>
+          <a:chOff x="0" y="0"/>
+          <a:chExt cx="0" cy="0"/>
+        </a:xfrm>
+      </p:grpSpPr>
+      <p:sp>
+        <p:nvSpPr>
+          <p:cNvPr id="2" name="Slide Image Placeholder 1">
+            <a:extLst>
+              <a:ext uri="{FF2B5EF4-FFF2-40B4-BE49-F238E27FC236}">
+                <a16:creationId xmlns:a16="http://schemas.microsoft.com/office/drawing/2014/main" id="{0A021763-DA37-D237-EC93-DE25564B2BA5}"/>
+              </a:ext>
+            </a:extLst>
+          </p:cNvPr>
+          <p:cNvSpPr>
+            <a:spLocks noGrp="1" noRot="1" noChangeAspect="1"/>
+          </p:cNvSpPr>
+          <p:nvPr>
+            <p:ph type="sldImg"/>
+          </p:nvPr>
+        </p:nvSpPr>
+        <p:spPr/>
+      </p:sp>
+      <p:sp>
+        <p:nvSpPr>
+          <p:cNvPr id="3" name="Notes Placeholder 2">
+            <a:extLst>
+              <a:ext uri="{FF2B5EF4-FFF2-40B4-BE49-F238E27FC236}">
+                <a16:creationId xmlns:a16="http://schemas.microsoft.com/office/drawing/2014/main" id="{C372EE23-B86A-8BFD-A091-CE96E16522F5}"/>
+              </a:ext>
+            </a:extLst>
+          </p:cNvPr>
+          <p:cNvSpPr>
+            <a:spLocks noGrp="1"/>
+          </p:cNvSpPr>
+          <p:nvPr>
+            <p:ph type="body" idx="1"/>
+          </p:nvPr>
+        </p:nvSpPr>
+        <p:spPr/>
+        <p:txBody>
+          <a:bodyPr/>
+          <a:lstStyle/>
+          <a:p>
+            <a:endParaRPr lang="ru-RU"/>
+          </a:p>
+        </p:txBody>
+      </p:sp>
+      <p:sp>
+        <p:nvSpPr>
+          <p:cNvPr id="4" name="Slide Number Placeholder 3">
+            <a:extLst>
+              <a:ext uri="{FF2B5EF4-FFF2-40B4-BE49-F238E27FC236}">
+                <a16:creationId xmlns:a16="http://schemas.microsoft.com/office/drawing/2014/main" id="{5A2302C8-189A-684B-1216-B4AD6CCC1FFE}"/>
+              </a:ext>
+            </a:extLst>
+          </p:cNvPr>
+          <p:cNvSpPr>
+            <a:spLocks noGrp="1"/>
+          </p:cNvSpPr>
+          <p:nvPr>
+            <p:ph type="sldNum" sz="quarter" idx="10"/>
+          </p:nvPr>
+        </p:nvSpPr>
+        <p:spPr/>
+        <p:txBody>
+          <a:bodyPr/>
+          <a:lstStyle/>
+          <a:p>
+            <a:fld id="{7F33120B-582B-4354-977D-A474A534F6B9}" type="slidenum">
+              <a:rPr lang="ru-RU" smtClean="0"/>
+              <a:t>33</a:t>
+            </a:fld>
+            <a:endParaRPr lang="ru-RU"/>
+          </a:p>
+        </p:txBody>
+      </p:sp>
+      <p:sp>
+        <p:nvSpPr>
+          <p:cNvPr id="5" name="Header Placeholder 4">
+            <a:extLst>
+              <a:ext uri="{FF2B5EF4-FFF2-40B4-BE49-F238E27FC236}">
+                <a16:creationId xmlns:a16="http://schemas.microsoft.com/office/drawing/2014/main" id="{BD1BAD21-B314-C838-0E54-9138C4B943FA}"/>
+              </a:ext>
+            </a:extLst>
+          </p:cNvPr>
+          <p:cNvSpPr>
+            <a:spLocks noGrp="1"/>
+          </p:cNvSpPr>
+          <p:nvPr>
+            <p:ph type="hdr" sz="quarter" idx="11"/>
+          </p:nvPr>
+        </p:nvSpPr>
+        <p:spPr/>
+        <p:txBody>
+          <a:bodyPr/>
+          <a:lstStyle/>
+          <a:p>
+            <a:r>
+              <a:rPr lang="ru-RU"/>
+              <a:t>Основы построения файловых систем</a:t>
+            </a:r>
+          </a:p>
+        </p:txBody>
+      </p:sp>
+    </p:spTree>
+    <p:extLst>
+      <p:ext uri="{BB962C8B-B14F-4D97-AF65-F5344CB8AC3E}">
+        <p14:creationId xmlns:p14="http://schemas.microsoft.com/office/powerpoint/2010/main" val="2619823213"/>
+      </p:ext>
+    </p:extLst>
+  </p:cSld>
+  <p:clrMapOvr>
+    <a:masterClrMapping/>
+  </p:clrMapOvr>
+</p:notes>
+</file>
+
 <file path=ppt/notesSlides/notesSlide4.xml><?xml version="1.0" encoding="utf-8"?>
 <p:notes xmlns:a="http://schemas.openxmlformats.org/drawingml/2006/main" xmlns:r="http://schemas.openxmlformats.org/officeDocument/2006/relationships" xmlns:p="http://schemas.openxmlformats.org/presentationml/2006/main">
   <p:cSld>
@@ -3717,7 +4539,7 @@
           <a:p>
             <a:fld id="{12C63722-5D9F-4E99-9720-9B6A0C7BB1C9}" type="datetimeFigureOut">
               <a:rPr lang="ru-RU" smtClean="0"/>
-              <a:t>17.10.2025</a:t>
+              <a:t>12.10.2026</a:t>
             </a:fld>
             <a:endParaRPr lang="ru-RU"/>
           </a:p>
@@ -3887,7 +4709,7 @@
           <a:p>
             <a:fld id="{12C63722-5D9F-4E99-9720-9B6A0C7BB1C9}" type="datetimeFigureOut">
               <a:rPr lang="ru-RU" smtClean="0"/>
-              <a:t>17.10.2025</a:t>
+              <a:t>12.10.2026</a:t>
             </a:fld>
             <a:endParaRPr lang="ru-RU"/>
           </a:p>
@@ -4067,7 +4889,7 @@
           <a:p>
             <a:fld id="{12C63722-5D9F-4E99-9720-9B6A0C7BB1C9}" type="datetimeFigureOut">
               <a:rPr lang="ru-RU" smtClean="0"/>
-              <a:t>17.10.2025</a:t>
+              <a:t>12.10.2026</a:t>
             </a:fld>
             <a:endParaRPr lang="ru-RU"/>
           </a:p>
@@ -4259,7 +5081,7 @@
           <a:p>
             <a:fld id="{8C218C88-2408-4CFC-B25C-07450930B282}" type="datetimeFigureOut">
               <a:rPr lang="ru-RU" smtClean="0"/>
-              <a:t>17.10.2025</a:t>
+              <a:t>12.10.2026</a:t>
             </a:fld>
             <a:endParaRPr lang="ru-RU"/>
           </a:p>
@@ -4429,7 +5251,7 @@
           <a:p>
             <a:fld id="{8C218C88-2408-4CFC-B25C-07450930B282}" type="datetimeFigureOut">
               <a:rPr lang="ru-RU" smtClean="0"/>
-              <a:t>17.10.2025</a:t>
+              <a:t>12.10.2026</a:t>
             </a:fld>
             <a:endParaRPr lang="ru-RU"/>
           </a:p>
@@ -4675,7 +5497,7 @@
           <a:p>
             <a:fld id="{8C218C88-2408-4CFC-B25C-07450930B282}" type="datetimeFigureOut">
               <a:rPr lang="ru-RU" smtClean="0"/>
-              <a:t>17.10.2025</a:t>
+              <a:t>12.10.2026</a:t>
             </a:fld>
             <a:endParaRPr lang="ru-RU"/>
           </a:p>
@@ -4907,7 +5729,7 @@
           <a:p>
             <a:fld id="{8C218C88-2408-4CFC-B25C-07450930B282}" type="datetimeFigureOut">
               <a:rPr lang="ru-RU" smtClean="0"/>
-              <a:t>17.10.2025</a:t>
+              <a:t>12.10.2026</a:t>
             </a:fld>
             <a:endParaRPr lang="ru-RU"/>
           </a:p>
@@ -5274,7 +6096,7 @@
           <a:p>
             <a:fld id="{8C218C88-2408-4CFC-B25C-07450930B282}" type="datetimeFigureOut">
               <a:rPr lang="ru-RU" smtClean="0"/>
-              <a:t>17.10.2025</a:t>
+              <a:t>12.10.2026</a:t>
             </a:fld>
             <a:endParaRPr lang="ru-RU"/>
           </a:p>
@@ -5392,7 +6214,7 @@
           <a:p>
             <a:fld id="{8C218C88-2408-4CFC-B25C-07450930B282}" type="datetimeFigureOut">
               <a:rPr lang="ru-RU" smtClean="0"/>
-              <a:t>17.10.2025</a:t>
+              <a:t>12.10.2026</a:t>
             </a:fld>
             <a:endParaRPr lang="ru-RU"/>
           </a:p>
@@ -5487,7 +6309,7 @@
           <a:p>
             <a:fld id="{8C218C88-2408-4CFC-B25C-07450930B282}" type="datetimeFigureOut">
               <a:rPr lang="ru-RU" smtClean="0"/>
-              <a:t>17.10.2025</a:t>
+              <a:t>12.10.2026</a:t>
             </a:fld>
             <a:endParaRPr lang="ru-RU"/>
           </a:p>
@@ -5764,7 +6586,7 @@
           <a:p>
             <a:fld id="{8C218C88-2408-4CFC-B25C-07450930B282}" type="datetimeFigureOut">
               <a:rPr lang="ru-RU" smtClean="0"/>
-              <a:t>17.10.2025</a:t>
+              <a:t>12.10.2026</a:t>
             </a:fld>
             <a:endParaRPr lang="ru-RU"/>
           </a:p>
@@ -5934,7 +6756,7 @@
           <a:p>
             <a:fld id="{12C63722-5D9F-4E99-9720-9B6A0C7BB1C9}" type="datetimeFigureOut">
               <a:rPr lang="ru-RU" smtClean="0"/>
-              <a:t>17.10.2025</a:t>
+              <a:t>12.10.2026</a:t>
             </a:fld>
             <a:endParaRPr lang="ru-RU"/>
           </a:p>
@@ -6187,7 +7009,7 @@
           <a:p>
             <a:fld id="{8C218C88-2408-4CFC-B25C-07450930B282}" type="datetimeFigureOut">
               <a:rPr lang="ru-RU" smtClean="0"/>
-              <a:t>17.10.2025</a:t>
+              <a:t>12.10.2026</a:t>
             </a:fld>
             <a:endParaRPr lang="ru-RU"/>
           </a:p>
@@ -6357,7 +7179,7 @@
           <a:p>
             <a:fld id="{8C218C88-2408-4CFC-B25C-07450930B282}" type="datetimeFigureOut">
               <a:rPr lang="ru-RU" smtClean="0"/>
-              <a:t>17.10.2025</a:t>
+              <a:t>12.10.2026</a:t>
             </a:fld>
             <a:endParaRPr lang="ru-RU"/>
           </a:p>
@@ -6537,7 +7359,7 @@
           <a:p>
             <a:fld id="{8C218C88-2408-4CFC-B25C-07450930B282}" type="datetimeFigureOut">
               <a:rPr lang="ru-RU" smtClean="0"/>
-              <a:t>17.10.2025</a:t>
+              <a:t>12.10.2026</a:t>
             </a:fld>
             <a:endParaRPr lang="ru-RU"/>
           </a:p>
@@ -6783,7 +7605,7 @@
           <a:p>
             <a:fld id="{12C63722-5D9F-4E99-9720-9B6A0C7BB1C9}" type="datetimeFigureOut">
               <a:rPr lang="ru-RU" smtClean="0"/>
-              <a:t>17.10.2025</a:t>
+              <a:t>12.10.2026</a:t>
             </a:fld>
             <a:endParaRPr lang="ru-RU"/>
           </a:p>
@@ -7023,7 +7845,7 @@
           <a:p>
             <a:fld id="{12C63722-5D9F-4E99-9720-9B6A0C7BB1C9}" type="datetimeFigureOut">
               <a:rPr lang="ru-RU" smtClean="0"/>
-              <a:t>17.10.2025</a:t>
+              <a:t>12.10.2026</a:t>
             </a:fld>
             <a:endParaRPr lang="ru-RU"/>
           </a:p>
@@ -7390,7 +8212,7 @@
           <a:p>
             <a:fld id="{12C63722-5D9F-4E99-9720-9B6A0C7BB1C9}" type="datetimeFigureOut">
               <a:rPr lang="ru-RU" smtClean="0"/>
-              <a:t>17.10.2025</a:t>
+              <a:t>12.10.2026</a:t>
             </a:fld>
             <a:endParaRPr lang="ru-RU"/>
           </a:p>
@@ -7508,7 +8330,7 @@
           <a:p>
             <a:fld id="{12C63722-5D9F-4E99-9720-9B6A0C7BB1C9}" type="datetimeFigureOut">
               <a:rPr lang="ru-RU" smtClean="0"/>
-              <a:t>17.10.2025</a:t>
+              <a:t>12.10.2026</a:t>
             </a:fld>
             <a:endParaRPr lang="ru-RU"/>
           </a:p>
@@ -7603,7 +8425,7 @@
           <a:p>
             <a:fld id="{12C63722-5D9F-4E99-9720-9B6A0C7BB1C9}" type="datetimeFigureOut">
               <a:rPr lang="ru-RU" smtClean="0"/>
-              <a:t>17.10.2025</a:t>
+              <a:t>12.10.2026</a:t>
             </a:fld>
             <a:endParaRPr lang="ru-RU"/>
           </a:p>
@@ -7880,7 +8702,7 @@
           <a:p>
             <a:fld id="{12C63722-5D9F-4E99-9720-9B6A0C7BB1C9}" type="datetimeFigureOut">
               <a:rPr lang="ru-RU" smtClean="0"/>
-              <a:t>17.10.2025</a:t>
+              <a:t>12.10.2026</a:t>
             </a:fld>
             <a:endParaRPr lang="ru-RU"/>
           </a:p>
@@ -8133,7 +8955,7 @@
           <a:p>
             <a:fld id="{12C63722-5D9F-4E99-9720-9B6A0C7BB1C9}" type="datetimeFigureOut">
               <a:rPr lang="ru-RU" smtClean="0"/>
-              <a:t>17.10.2025</a:t>
+              <a:t>12.10.2026</a:t>
             </a:fld>
             <a:endParaRPr lang="ru-RU"/>
           </a:p>
@@ -8346,7 +9168,7 @@
           <a:p>
             <a:fld id="{12C63722-5D9F-4E99-9720-9B6A0C7BB1C9}" type="datetimeFigureOut">
               <a:rPr lang="ru-RU" smtClean="0"/>
-              <a:t>17.10.2025</a:t>
+              <a:t>12.10.2026</a:t>
             </a:fld>
             <a:endParaRPr lang="ru-RU"/>
           </a:p>
@@ -8886,7 +9708,7 @@
           <a:p>
             <a:fld id="{8C218C88-2408-4CFC-B25C-07450930B282}" type="datetimeFigureOut">
               <a:rPr lang="ru-RU" smtClean="0"/>
-              <a:t>17.10.2025</a:t>
+              <a:t>12.10.2026</a:t>
             </a:fld>
             <a:endParaRPr lang="ru-RU"/>
           </a:p>
@@ -11632,7 +12454,7 @@
           <p:nvPr>
             <p:extLst>
               <p:ext uri="{D42A27DB-BD31-4B8C-83A1-F6EECF244321}">
-                <p14:modId xmlns:p14="http://schemas.microsoft.com/office/powerpoint/2010/main" val="1430819102"/>
+                <p14:modId xmlns:p14="http://schemas.microsoft.com/office/powerpoint/2010/main" val="1065205230"/>
               </p:ext>
             </p:extLst>
           </p:nvPr>
@@ -11747,12 +12569,20 @@
                         <a:t> binary is </a:t>
                       </a:r>
                       <a:r>
+                        <a:rPr lang="en-US" dirty="0" err="1">
+                          <a:latin typeface="Consolas" panose="020B0609020204030204" pitchFamily="49" charset="0"/>
+                          <a:ea typeface="Menlo" panose="020B0609030804020204" pitchFamily="49" charset="0"/>
+                          <a:cs typeface="Consolas" panose="020B0609020204030204" pitchFamily="49" charset="0"/>
+                        </a:rPr>
+                        <a:t>execve</a:t>
+                      </a:r>
+                      <a:r>
                         <a:rPr lang="en-US" dirty="0">
                           <a:latin typeface="Consolas" panose="020B0609020204030204" pitchFamily="49" charset="0"/>
                           <a:ea typeface="Menlo" panose="020B0609030804020204" pitchFamily="49" charset="0"/>
                           <a:cs typeface="Consolas" panose="020B0609020204030204" pitchFamily="49" charset="0"/>
                         </a:rPr>
-                        <a:t>exec()</a:t>
+                        <a:t>()</a:t>
                       </a:r>
                       <a:r>
                         <a:rPr lang="en-US" dirty="0"/>
@@ -12485,11 +13315,17 @@
           <p:cNvGraphicFramePr>
             <a:graphicFrameLocks noGrp="1"/>
           </p:cNvGraphicFramePr>
-          <p:nvPr/>
+          <p:nvPr>
+            <p:extLst>
+              <p:ext uri="{D42A27DB-BD31-4B8C-83A1-F6EECF244321}">
+                <p14:modId xmlns:p14="http://schemas.microsoft.com/office/powerpoint/2010/main" val="3456841038"/>
+              </p:ext>
+            </p:extLst>
+          </p:nvPr>
         </p:nvGraphicFramePr>
         <p:xfrm>
           <a:off x="0" y="342613"/>
-          <a:ext cx="12192000" cy="3794430"/>
+          <a:ext cx="12192000" cy="3520110"/>
         </p:xfrm>
         <a:graphic>
           <a:graphicData uri="http://schemas.openxmlformats.org/drawingml/2006/table">
@@ -12697,11 +13533,8 @@
                       </a:r>
                       <a:r>
                         <a:rPr lang="en-US" dirty="0"/>
-                        <a:t>--x--x--x:</a:t>
-                      </a:r>
-                      <a:br>
-                        <a:rPr lang="en-US" dirty="0"/>
-                      </a:br>
+                        <a:t>--x--x--x: </a:t>
+                      </a:r>
                       <a:r>
                         <a:rPr lang="en-US" dirty="0">
                           <a:hlinkClick r:id="rId3"/>
@@ -12733,16 +13566,24 @@
                       </a:r>
                       <a:r>
                         <a:rPr lang="en-US" dirty="0"/>
-                        <a:t>seccomp filters:</a:t>
-                      </a:r>
-                      <a:br>
-                        <a:rPr lang="en-US" dirty="0"/>
-                      </a:br>
+                        <a:t>seccomp filters: </a:t>
+                      </a:r>
                       <a:r>
                         <a:rPr lang="en-US" dirty="0">
                           <a:hlinkClick r:id="rId4"/>
                         </a:rPr>
                         <a:t>https://www.kernel.org/doc/Documentation/prctl/seccomp_filter.txt</a:t>
+                      </a:r>
+                      <a:endParaRPr lang="en-US" dirty="0"/>
+                    </a:p>
+                    <a:p>
+                      <a:pPr marL="285750" indent="-285750">
+                        <a:buFont typeface="Arial" panose="020B0604020202020204" pitchFamily="34" charset="0"/>
+                        <a:buChar char="•"/>
+                      </a:pPr>
+                      <a:r>
+                        <a:rPr lang="en-US" dirty="0"/>
+                        <a:t>See also: how does one pass file descriptors over an AF_UNIX socket?</a:t>
                       </a:r>
                       <a:endParaRPr lang="ru-RU" dirty="0"/>
                     </a:p>
@@ -15373,7 +16214,13 @@
   <p:cSld>
     <p:spTree>
       <p:nvGrpSpPr>
-        <p:cNvPr id="1" name=""/>
+        <p:cNvPr id="1" name="">
+          <a:extLst>
+            <a:ext uri="{FF2B5EF4-FFF2-40B4-BE49-F238E27FC236}">
+              <a16:creationId xmlns:a16="http://schemas.microsoft.com/office/drawing/2014/main" id="{F1B862AC-C1ED-D88D-F797-42635292CDFF}"/>
+            </a:ext>
+          </a:extLst>
+        </p:cNvPr>
         <p:cNvGrpSpPr/>
         <p:nvPr/>
       </p:nvGrpSpPr>
@@ -15387,7 +16234,13 @@
       </p:grpSpPr>
       <p:graphicFrame>
         <p:nvGraphicFramePr>
-          <p:cNvPr id="5" name="Table 4"/>
+          <p:cNvPr id="5" name="Table 4">
+            <a:extLst>
+              <a:ext uri="{FF2B5EF4-FFF2-40B4-BE49-F238E27FC236}">
+                <a16:creationId xmlns:a16="http://schemas.microsoft.com/office/drawing/2014/main" id="{41D20840-C444-CC99-2611-2B0CBAAAA627}"/>
+              </a:ext>
+            </a:extLst>
+          </p:cNvPr>
           <p:cNvGraphicFramePr>
             <a:graphicFrameLocks noGrp="1"/>
           </p:cNvGraphicFramePr>
@@ -15439,7 +16292,13 @@
       </p:graphicFrame>
       <p:graphicFrame>
         <p:nvGraphicFramePr>
-          <p:cNvPr id="6" name="Table 5"/>
+          <p:cNvPr id="6" name="Table 5">
+            <a:extLst>
+              <a:ext uri="{FF2B5EF4-FFF2-40B4-BE49-F238E27FC236}">
+                <a16:creationId xmlns:a16="http://schemas.microsoft.com/office/drawing/2014/main" id="{E2F0FA77-B88B-E63C-84A2-AEF0BEF75BE4}"/>
+              </a:ext>
+            </a:extLst>
+          </p:cNvPr>
           <p:cNvGraphicFramePr>
             <a:graphicFrameLocks noGrp="1"/>
           </p:cNvGraphicFramePr>
@@ -15487,21 +16346,27 @@
       </p:graphicFrame>
       <p:graphicFrame>
         <p:nvGraphicFramePr>
-          <p:cNvPr id="2" name="Table 1"/>
+          <p:cNvPr id="2" name="Table 1">
+            <a:extLst>
+              <a:ext uri="{FF2B5EF4-FFF2-40B4-BE49-F238E27FC236}">
+                <a16:creationId xmlns:a16="http://schemas.microsoft.com/office/drawing/2014/main" id="{A07098F2-7D23-4AAF-1FE9-26675513645D}"/>
+              </a:ext>
+            </a:extLst>
+          </p:cNvPr>
           <p:cNvGraphicFramePr>
             <a:graphicFrameLocks noGrp="1"/>
           </p:cNvGraphicFramePr>
           <p:nvPr>
             <p:extLst>
               <p:ext uri="{D42A27DB-BD31-4B8C-83A1-F6EECF244321}">
-                <p14:modId xmlns:p14="http://schemas.microsoft.com/office/powerpoint/2010/main" val="1810819876"/>
+                <p14:modId xmlns:p14="http://schemas.microsoft.com/office/powerpoint/2010/main" val="2140114635"/>
               </p:ext>
             </p:extLst>
           </p:nvPr>
         </p:nvGraphicFramePr>
         <p:xfrm>
           <a:off x="0" y="342613"/>
-          <a:ext cx="12192000" cy="5006175"/>
+          <a:ext cx="12192000" cy="4914735"/>
         </p:xfrm>
         <a:graphic>
           <a:graphicData uri="http://schemas.openxmlformats.org/drawingml/2006/table">
@@ -16063,129 +16928,6 @@
                       </a:r>
                       <a:endParaRPr lang="en-US" dirty="0"/>
                     </a:p>
-                    <a:p>
-                      <a:pPr marL="342900" indent="-342900">
-                        <a:buAutoNum type="arabicPeriod"/>
-                      </a:pPr>
-                      <a:endParaRPr lang="en-US" dirty="0"/>
-                    </a:p>
-                    <a:p>
-                      <a:pPr marL="342900" indent="-342900">
-                        <a:buAutoNum type="arabicPeriod"/>
-                      </a:pPr>
-                      <a:r>
-                        <a:rPr lang="en-US" dirty="0"/>
-                        <a:t>Another process can change the </a:t>
-                      </a:r>
-                      <a:r>
-                        <a:rPr lang="en-US" dirty="0" err="1"/>
-                        <a:t>symlink</a:t>
-                      </a:r>
-                      <a:r>
-                        <a:rPr lang="en-US" dirty="0"/>
-                        <a:t> value between the calls to </a:t>
-                      </a:r>
-                      <a:r>
-                        <a:rPr lang="en-US" dirty="0" err="1">
-                          <a:latin typeface="Consolas" panose="020B0609020204030204" pitchFamily="49" charset="0"/>
-                          <a:cs typeface="Consolas" panose="020B0609020204030204" pitchFamily="49" charset="0"/>
-                        </a:rPr>
-                        <a:t>lstat</a:t>
-                      </a:r>
-                      <a:r>
-                        <a:rPr lang="en-US" dirty="0">
-                          <a:latin typeface="Consolas" panose="020B0609020204030204" pitchFamily="49" charset="0"/>
-                          <a:cs typeface="Consolas" panose="020B0609020204030204" pitchFamily="49" charset="0"/>
-                        </a:rPr>
-                        <a:t>()</a:t>
-                      </a:r>
-                      <a:r>
-                        <a:rPr lang="ru-RU" dirty="0"/>
-                        <a:t> </a:t>
-                      </a:r>
-                      <a:r>
-                        <a:rPr lang="en-US" dirty="0"/>
-                        <a:t>and</a:t>
-                      </a:r>
-                      <a:r>
-                        <a:rPr lang="ru-RU" dirty="0"/>
-                        <a:t> </a:t>
-                      </a:r>
-                      <a:r>
-                        <a:rPr lang="en-US" dirty="0" err="1">
-                          <a:latin typeface="Consolas" panose="020B0609020204030204" pitchFamily="49" charset="0"/>
-                          <a:cs typeface="Consolas" panose="020B0609020204030204" pitchFamily="49" charset="0"/>
-                        </a:rPr>
-                        <a:t>readlink</a:t>
-                      </a:r>
-                      <a:r>
-                        <a:rPr lang="en-US" dirty="0">
-                          <a:latin typeface="Consolas" panose="020B0609020204030204" pitchFamily="49" charset="0"/>
-                          <a:cs typeface="Consolas" panose="020B0609020204030204" pitchFamily="49" charset="0"/>
-                        </a:rPr>
-                        <a:t>()</a:t>
-                      </a:r>
-                      <a:r>
-                        <a:rPr lang="en-US" dirty="0"/>
-                        <a:t>. See TOCTTOU (time of check to time of use).</a:t>
-                      </a:r>
-                    </a:p>
-                    <a:p>
-                      <a:pPr marL="342900" indent="-342900">
-                        <a:buAutoNum type="arabicPeriod"/>
-                      </a:pPr>
-                      <a:endParaRPr lang="en-US" dirty="0"/>
-                    </a:p>
-                    <a:p>
-                      <a:pPr marL="342900" indent="-342900">
-                        <a:buAutoNum type="arabicPeriod"/>
-                      </a:pPr>
-                      <a:endParaRPr lang="en-US" dirty="0"/>
-                    </a:p>
-                    <a:p>
-                      <a:pPr marL="342900" indent="-342900">
-                        <a:buAutoNum type="arabicPeriod"/>
-                      </a:pPr>
-                      <a:endParaRPr lang="en-US" dirty="0"/>
-                    </a:p>
-                    <a:p>
-                      <a:pPr marL="342900" indent="-342900">
-                        <a:buAutoNum type="arabicPeriod"/>
-                      </a:pPr>
-                      <a:r>
-                        <a:rPr lang="en-US" dirty="0"/>
-                        <a:t>In the time frame between two </a:t>
-                      </a:r>
-                      <a:r>
-                        <a:rPr lang="en-US" dirty="0">
-                          <a:latin typeface="Consolas" panose="020B0609020204030204" pitchFamily="49" charset="0"/>
-                          <a:cs typeface="Consolas" panose="020B0609020204030204" pitchFamily="49" charset="0"/>
-                        </a:rPr>
-                        <a:t>open()</a:t>
-                      </a:r>
-                      <a:r>
-                        <a:rPr lang="en-US" dirty="0"/>
-                        <a:t>s another process can rename </a:t>
-                      </a:r>
-                      <a:r>
-                        <a:rPr lang="en-US" dirty="0">
-                          <a:latin typeface="Consolas" panose="020B0609020204030204" pitchFamily="49" charset="0"/>
-                          <a:cs typeface="Consolas" panose="020B0609020204030204" pitchFamily="49" charset="0"/>
-                        </a:rPr>
-                        <a:t>/</a:t>
-                      </a:r>
-                      <a:r>
-                        <a:rPr lang="en-US" dirty="0" err="1">
-                          <a:latin typeface="Consolas" panose="020B0609020204030204" pitchFamily="49" charset="0"/>
-                          <a:cs typeface="Consolas" panose="020B0609020204030204" pitchFamily="49" charset="0"/>
-                        </a:rPr>
-                        <a:t>dir</a:t>
-                      </a:r>
-                      <a:r>
-                        <a:rPr lang="en-US" dirty="0"/>
-                        <a:t> and then create a different directory with the same name.</a:t>
-                      </a:r>
-                    </a:p>
                   </a:txBody>
                   <a:tcPr/>
                 </a:tc>
@@ -16202,7 +16944,7 @@
     </p:spTree>
     <p:extLst>
       <p:ext uri="{BB962C8B-B14F-4D97-AF65-F5344CB8AC3E}">
-        <p14:creationId xmlns:p14="http://schemas.microsoft.com/office/powerpoint/2010/main" val="1434024803"/>
+        <p14:creationId xmlns:p14="http://schemas.microsoft.com/office/powerpoint/2010/main" val="3065415071"/>
       </p:ext>
     </p:extLst>
   </p:cSld>
@@ -16338,6 +17080,1656 @@
           <p:nvPr>
             <p:extLst>
               <p:ext uri="{D42A27DB-BD31-4B8C-83A1-F6EECF244321}">
+                <p14:modId xmlns:p14="http://schemas.microsoft.com/office/powerpoint/2010/main" val="1823910051"/>
+              </p:ext>
+            </p:extLst>
+          </p:nvPr>
+        </p:nvGraphicFramePr>
+        <p:xfrm>
+          <a:off x="0" y="342613"/>
+          <a:ext cx="12192000" cy="4914735"/>
+        </p:xfrm>
+        <a:graphic>
+          <a:graphicData uri="http://schemas.openxmlformats.org/drawingml/2006/table">
+            <a:tbl>
+              <a:tblPr firstRow="1" bandRow="1">
+                <a:tableStyleId>{3B4B98B0-60AC-42C2-AFA5-B58CD77FA1E5}</a:tableStyleId>
+              </a:tblPr>
+              <a:tblGrid>
+                <a:gridCol w="6096000">
+                  <a:extLst>
+                    <a:ext uri="{9D8B030D-6E8A-4147-A177-3AD203B41FA5}">
+                      <a16:colId xmlns:a16="http://schemas.microsoft.com/office/drawing/2014/main" val="20000"/>
+                    </a:ext>
+                  </a:extLst>
+                </a:gridCol>
+                <a:gridCol w="6096000">
+                  <a:extLst>
+                    <a:ext uri="{9D8B030D-6E8A-4147-A177-3AD203B41FA5}">
+                      <a16:colId xmlns:a16="http://schemas.microsoft.com/office/drawing/2014/main" val="3688292786"/>
+                    </a:ext>
+                  </a:extLst>
+                </a:gridCol>
+              </a:tblGrid>
+              <a:tr h="434175">
+                <a:tc>
+                  <a:txBody>
+                    <a:bodyPr/>
+                    <a:lstStyle/>
+                    <a:p>
+                      <a:r>
+                        <a:rPr lang="en-US" dirty="0"/>
+                        <a:t>A file system is a shared resource: concurrent access and races</a:t>
+                      </a:r>
+                      <a:endParaRPr lang="ru-RU" dirty="0"/>
+                    </a:p>
+                  </a:txBody>
+                  <a:tcPr/>
+                </a:tc>
+                <a:tc>
+                  <a:txBody>
+                    <a:bodyPr/>
+                    <a:lstStyle/>
+                    <a:p>
+                      <a:endParaRPr lang="ru-RU" dirty="0"/>
+                    </a:p>
+                  </a:txBody>
+                  <a:tcPr/>
+                </a:tc>
+                <a:extLst>
+                  <a:ext uri="{0D108BD9-81ED-4DB2-BD59-A6C34878D82A}">
+                    <a16:rowId xmlns:a16="http://schemas.microsoft.com/office/drawing/2014/main" val="10000"/>
+                  </a:ext>
+                </a:extLst>
+              </a:tr>
+              <a:tr h="434175">
+                <a:tc gridSpan="2">
+                  <a:txBody>
+                    <a:bodyPr/>
+                    <a:lstStyle/>
+                    <a:p>
+                      <a:r>
+                        <a:rPr lang="en-US" dirty="0"/>
+                        <a:t>When multiple threads access the same memory region, they need to </a:t>
+                      </a:r>
+                      <a:r>
+                        <a:rPr lang="en-US" dirty="0" err="1"/>
+                        <a:t>synchronise</a:t>
+                      </a:r>
+                      <a:r>
+                        <a:rPr lang="en-US" dirty="0"/>
+                        <a:t> their access to avoid races.</a:t>
+                      </a:r>
+                      <a:endParaRPr lang="ru-RU" dirty="0"/>
+                    </a:p>
+                    <a:p>
+                      <a:endParaRPr lang="ru-RU" dirty="0"/>
+                    </a:p>
+                    <a:p>
+                      <a:r>
+                        <a:rPr lang="en-US" dirty="0"/>
+                        <a:t>What happens when multiple process access the same directory?</a:t>
+                      </a:r>
+                      <a:endParaRPr lang="ru-RU" dirty="0"/>
+                    </a:p>
+                  </a:txBody>
+                  <a:tcPr/>
+                </a:tc>
+                <a:tc hMerge="1">
+                  <a:txBody>
+                    <a:bodyPr/>
+                    <a:lstStyle/>
+                    <a:p>
+                      <a:endParaRPr lang="ru-RU" dirty="0"/>
+                    </a:p>
+                  </a:txBody>
+                  <a:tcPr/>
+                </a:tc>
+                <a:extLst>
+                  <a:ext uri="{0D108BD9-81ED-4DB2-BD59-A6C34878D82A}">
+                    <a16:rowId xmlns:a16="http://schemas.microsoft.com/office/drawing/2014/main" val="3908480295"/>
+                  </a:ext>
+                </a:extLst>
+              </a:tr>
+              <a:tr h="434175">
+                <a:tc>
+                  <a:txBody>
+                    <a:bodyPr/>
+                    <a:lstStyle/>
+                    <a:p>
+                      <a:pPr marL="342900" indent="-342900">
+                        <a:buAutoNum type="arabicPeriod"/>
+                      </a:pPr>
+                      <a:r>
+                        <a:rPr lang="en-US" dirty="0"/>
+                        <a:t>Creating a temporary file</a:t>
+                      </a:r>
+                      <a:r>
+                        <a:rPr lang="ru-RU" dirty="0"/>
+                        <a:t>:</a:t>
+                      </a:r>
+                      <a:br>
+                        <a:rPr lang="en-US" dirty="0"/>
+                      </a:br>
+                      <a:r>
+                        <a:rPr lang="en-US" sz="1400" dirty="0">
+                          <a:latin typeface="Consolas" panose="020B0609020204030204" pitchFamily="49" charset="0"/>
+                          <a:cs typeface="Consolas" panose="020B0609020204030204" pitchFamily="49" charset="0"/>
+                        </a:rPr>
+                        <a:t>int </a:t>
+                      </a:r>
+                      <a:r>
+                        <a:rPr lang="en-US" sz="1400" dirty="0" err="1">
+                          <a:latin typeface="Consolas" panose="020B0609020204030204" pitchFamily="49" charset="0"/>
+                          <a:cs typeface="Consolas" panose="020B0609020204030204" pitchFamily="49" charset="0"/>
+                        </a:rPr>
+                        <a:t>fd</a:t>
+                      </a:r>
+                      <a:r>
+                        <a:rPr lang="en-US" sz="1400" dirty="0">
+                          <a:latin typeface="Consolas" panose="020B0609020204030204" pitchFamily="49" charset="0"/>
+                          <a:cs typeface="Consolas" panose="020B0609020204030204" pitchFamily="49" charset="0"/>
+                        </a:rPr>
+                        <a:t> = open(“/</a:t>
+                      </a:r>
+                      <a:r>
+                        <a:rPr lang="en-US" sz="1400" dirty="0" err="1">
+                          <a:latin typeface="Consolas" panose="020B0609020204030204" pitchFamily="49" charset="0"/>
+                          <a:cs typeface="Consolas" panose="020B0609020204030204" pitchFamily="49" charset="0"/>
+                        </a:rPr>
+                        <a:t>tmp</a:t>
+                      </a:r>
+                      <a:r>
+                        <a:rPr lang="en-US" sz="1400" dirty="0">
+                          <a:latin typeface="Consolas" panose="020B0609020204030204" pitchFamily="49" charset="0"/>
+                          <a:cs typeface="Consolas" panose="020B0609020204030204" pitchFamily="49" charset="0"/>
+                        </a:rPr>
+                        <a:t>/tmp.1b42ac00de”, O_RDWR|O_CREAT, 0);</a:t>
+                      </a:r>
+                      <a:br>
+                        <a:rPr lang="en-US" sz="1400" dirty="0">
+                          <a:latin typeface="Consolas" panose="020B0609020204030204" pitchFamily="49" charset="0"/>
+                          <a:cs typeface="Consolas" panose="020B0609020204030204" pitchFamily="49" charset="0"/>
+                        </a:rPr>
+                      </a:br>
+                      <a:r>
+                        <a:rPr lang="en-US" sz="1400" dirty="0">
+                          <a:latin typeface="Consolas" panose="020B0609020204030204" pitchFamily="49" charset="0"/>
+                          <a:cs typeface="Consolas" panose="020B0609020204030204" pitchFamily="49" charset="0"/>
+                        </a:rPr>
+                        <a:t>unlink(“/</a:t>
+                      </a:r>
+                      <a:r>
+                        <a:rPr lang="en-US" sz="1400" dirty="0" err="1">
+                          <a:latin typeface="Consolas" panose="020B0609020204030204" pitchFamily="49" charset="0"/>
+                          <a:cs typeface="Consolas" panose="020B0609020204030204" pitchFamily="49" charset="0"/>
+                        </a:rPr>
+                        <a:t>tmp</a:t>
+                      </a:r>
+                      <a:r>
+                        <a:rPr lang="en-US" sz="1400" dirty="0">
+                          <a:latin typeface="Consolas" panose="020B0609020204030204" pitchFamily="49" charset="0"/>
+                          <a:cs typeface="Consolas" panose="020B0609020204030204" pitchFamily="49" charset="0"/>
+                        </a:rPr>
+                        <a:t>/tmp.1b42ac00de”);</a:t>
+                      </a:r>
+                      <a:br>
+                        <a:rPr lang="en-US" sz="1400" dirty="0">
+                          <a:latin typeface="Consolas" panose="020B0609020204030204" pitchFamily="49" charset="0"/>
+                          <a:cs typeface="Consolas" panose="020B0609020204030204" pitchFamily="49" charset="0"/>
+                        </a:rPr>
+                      </a:br>
+                      <a:r>
+                        <a:rPr lang="en-US" sz="1400" dirty="0">
+                          <a:latin typeface="Consolas" panose="020B0609020204030204" pitchFamily="49" charset="0"/>
+                          <a:cs typeface="Consolas" panose="020B0609020204030204" pitchFamily="49" charset="0"/>
+                        </a:rPr>
+                        <a:t>... use </a:t>
+                      </a:r>
+                      <a:r>
+                        <a:rPr lang="en-US" sz="1400" dirty="0" err="1">
+                          <a:latin typeface="Consolas" panose="020B0609020204030204" pitchFamily="49" charset="0"/>
+                          <a:cs typeface="Consolas" panose="020B0609020204030204" pitchFamily="49" charset="0"/>
+                        </a:rPr>
+                        <a:t>fd</a:t>
+                      </a:r>
+                      <a:r>
+                        <a:rPr lang="en-US" sz="1400" dirty="0">
+                          <a:latin typeface="Consolas" panose="020B0609020204030204" pitchFamily="49" charset="0"/>
+                          <a:cs typeface="Consolas" panose="020B0609020204030204" pitchFamily="49" charset="0"/>
+                        </a:rPr>
+                        <a:t> to keep temp data ...</a:t>
+                      </a:r>
+                      <a:br>
+                        <a:rPr lang="en-US" sz="1600" dirty="0"/>
+                      </a:br>
+                      <a:endParaRPr lang="en-US" sz="1600" dirty="0"/>
+                    </a:p>
+                    <a:p>
+                      <a:pPr marL="342900" indent="-342900">
+                        <a:buAutoNum type="arabicPeriod"/>
+                      </a:pPr>
+                      <a:r>
+                        <a:rPr lang="en-US" dirty="0"/>
+                        <a:t>Reading a symbolic link:</a:t>
+                      </a:r>
+                      <a:br>
+                        <a:rPr lang="en-US" dirty="0"/>
+                      </a:br>
+                      <a:r>
+                        <a:rPr lang="en-US" sz="1400" dirty="0">
+                          <a:latin typeface="Consolas" panose="020B0609020204030204" pitchFamily="49" charset="0"/>
+                          <a:cs typeface="Consolas" panose="020B0609020204030204" pitchFamily="49" charset="0"/>
+                        </a:rPr>
+                        <a:t>struct stat </a:t>
+                      </a:r>
+                      <a:r>
+                        <a:rPr lang="en-US" sz="1400" dirty="0" err="1">
+                          <a:latin typeface="Consolas" panose="020B0609020204030204" pitchFamily="49" charset="0"/>
+                          <a:cs typeface="Consolas" panose="020B0609020204030204" pitchFamily="49" charset="0"/>
+                        </a:rPr>
+                        <a:t>st</a:t>
+                      </a:r>
+                      <a:r>
+                        <a:rPr lang="en-US" sz="1400" dirty="0">
+                          <a:latin typeface="Consolas" panose="020B0609020204030204" pitchFamily="49" charset="0"/>
+                          <a:cs typeface="Consolas" panose="020B0609020204030204" pitchFamily="49" charset="0"/>
+                        </a:rPr>
+                        <a:t>;</a:t>
+                      </a:r>
+                      <a:br>
+                        <a:rPr lang="en-US" sz="1400" dirty="0">
+                          <a:latin typeface="Consolas" panose="020B0609020204030204" pitchFamily="49" charset="0"/>
+                          <a:cs typeface="Consolas" panose="020B0609020204030204" pitchFamily="49" charset="0"/>
+                        </a:rPr>
+                      </a:br>
+                      <a:r>
+                        <a:rPr lang="en-US" sz="1400" dirty="0" err="1">
+                          <a:latin typeface="Consolas" panose="020B0609020204030204" pitchFamily="49" charset="0"/>
+                          <a:cs typeface="Consolas" panose="020B0609020204030204" pitchFamily="49" charset="0"/>
+                        </a:rPr>
+                        <a:t>lstat</a:t>
+                      </a:r>
+                      <a:r>
+                        <a:rPr lang="en-US" sz="1400" dirty="0">
+                          <a:latin typeface="Consolas" panose="020B0609020204030204" pitchFamily="49" charset="0"/>
+                          <a:cs typeface="Consolas" panose="020B0609020204030204" pitchFamily="49" charset="0"/>
+                        </a:rPr>
+                        <a:t>(“/path/to/</a:t>
+                      </a:r>
+                      <a:r>
+                        <a:rPr lang="en-US" sz="1400" dirty="0" err="1">
+                          <a:latin typeface="Consolas" panose="020B0609020204030204" pitchFamily="49" charset="0"/>
+                          <a:cs typeface="Consolas" panose="020B0609020204030204" pitchFamily="49" charset="0"/>
+                        </a:rPr>
+                        <a:t>symlink</a:t>
+                      </a:r>
+                      <a:r>
+                        <a:rPr lang="en-US" sz="1400" dirty="0">
+                          <a:latin typeface="Consolas" panose="020B0609020204030204" pitchFamily="49" charset="0"/>
+                          <a:cs typeface="Consolas" panose="020B0609020204030204" pitchFamily="49" charset="0"/>
+                        </a:rPr>
+                        <a:t>”, &amp;</a:t>
+                      </a:r>
+                      <a:r>
+                        <a:rPr lang="en-US" sz="1400" dirty="0" err="1">
+                          <a:latin typeface="Consolas" panose="020B0609020204030204" pitchFamily="49" charset="0"/>
+                          <a:cs typeface="Consolas" panose="020B0609020204030204" pitchFamily="49" charset="0"/>
+                        </a:rPr>
+                        <a:t>st</a:t>
+                      </a:r>
+                      <a:r>
+                        <a:rPr lang="en-US" sz="1400" dirty="0">
+                          <a:latin typeface="Consolas" panose="020B0609020204030204" pitchFamily="49" charset="0"/>
+                          <a:cs typeface="Consolas" panose="020B0609020204030204" pitchFamily="49" charset="0"/>
+                        </a:rPr>
+                        <a:t>);</a:t>
+                      </a:r>
+                      <a:br>
+                        <a:rPr lang="en-US" sz="1400" dirty="0">
+                          <a:latin typeface="Consolas" panose="020B0609020204030204" pitchFamily="49" charset="0"/>
+                          <a:cs typeface="Consolas" panose="020B0609020204030204" pitchFamily="49" charset="0"/>
+                        </a:rPr>
+                      </a:br>
+                      <a:r>
+                        <a:rPr lang="en-US" sz="1400" dirty="0">
+                          <a:latin typeface="Consolas" panose="020B0609020204030204" pitchFamily="49" charset="0"/>
+                          <a:cs typeface="Consolas" panose="020B0609020204030204" pitchFamily="49" charset="0"/>
+                        </a:rPr>
+                        <a:t>char *</a:t>
+                      </a:r>
+                      <a:r>
+                        <a:rPr lang="en-US" sz="1400" dirty="0" err="1">
+                          <a:latin typeface="Consolas" panose="020B0609020204030204" pitchFamily="49" charset="0"/>
+                          <a:cs typeface="Consolas" panose="020B0609020204030204" pitchFamily="49" charset="0"/>
+                        </a:rPr>
+                        <a:t>buf</a:t>
+                      </a:r>
+                      <a:r>
+                        <a:rPr lang="en-US" sz="1400" dirty="0">
+                          <a:latin typeface="Consolas" panose="020B0609020204030204" pitchFamily="49" charset="0"/>
+                          <a:cs typeface="Consolas" panose="020B0609020204030204" pitchFamily="49" charset="0"/>
+                        </a:rPr>
+                        <a:t> = malloc(</a:t>
+                      </a:r>
+                      <a:r>
+                        <a:rPr lang="en-US" sz="1400" dirty="0" err="1">
+                          <a:latin typeface="Consolas" panose="020B0609020204030204" pitchFamily="49" charset="0"/>
+                          <a:cs typeface="Consolas" panose="020B0609020204030204" pitchFamily="49" charset="0"/>
+                        </a:rPr>
+                        <a:t>st.st_size</a:t>
+                      </a:r>
+                      <a:r>
+                        <a:rPr lang="en-US" sz="1400" dirty="0">
+                          <a:latin typeface="Consolas" panose="020B0609020204030204" pitchFamily="49" charset="0"/>
+                          <a:cs typeface="Consolas" panose="020B0609020204030204" pitchFamily="49" charset="0"/>
+                        </a:rPr>
+                        <a:t> + 1);</a:t>
+                      </a:r>
+                      <a:br>
+                        <a:rPr lang="en-US" sz="1400" dirty="0">
+                          <a:latin typeface="Consolas" panose="020B0609020204030204" pitchFamily="49" charset="0"/>
+                          <a:cs typeface="Consolas" panose="020B0609020204030204" pitchFamily="49" charset="0"/>
+                        </a:rPr>
+                      </a:br>
+                      <a:r>
+                        <a:rPr lang="en-US" sz="1400" dirty="0" err="1">
+                          <a:latin typeface="Consolas" panose="020B0609020204030204" pitchFamily="49" charset="0"/>
+                          <a:cs typeface="Consolas" panose="020B0609020204030204" pitchFamily="49" charset="0"/>
+                        </a:rPr>
+                        <a:t>readlink</a:t>
+                      </a:r>
+                      <a:r>
+                        <a:rPr lang="en-US" sz="1400" dirty="0">
+                          <a:latin typeface="Consolas" panose="020B0609020204030204" pitchFamily="49" charset="0"/>
+                          <a:cs typeface="Consolas" panose="020B0609020204030204" pitchFamily="49" charset="0"/>
+                        </a:rPr>
+                        <a:t>(“/path/to/</a:t>
+                      </a:r>
+                      <a:r>
+                        <a:rPr lang="en-US" sz="1400" dirty="0" err="1">
+                          <a:latin typeface="Consolas" panose="020B0609020204030204" pitchFamily="49" charset="0"/>
+                          <a:cs typeface="Consolas" panose="020B0609020204030204" pitchFamily="49" charset="0"/>
+                        </a:rPr>
+                        <a:t>symlink</a:t>
+                      </a:r>
+                      <a:r>
+                        <a:rPr lang="en-US" sz="1400" dirty="0">
+                          <a:latin typeface="Consolas" panose="020B0609020204030204" pitchFamily="49" charset="0"/>
+                          <a:cs typeface="Consolas" panose="020B0609020204030204" pitchFamily="49" charset="0"/>
+                        </a:rPr>
+                        <a:t>”, </a:t>
+                      </a:r>
+                      <a:r>
+                        <a:rPr lang="en-US" sz="1400" dirty="0" err="1">
+                          <a:latin typeface="Consolas" panose="020B0609020204030204" pitchFamily="49" charset="0"/>
+                          <a:cs typeface="Consolas" panose="020B0609020204030204" pitchFamily="49" charset="0"/>
+                        </a:rPr>
+                        <a:t>buf</a:t>
+                      </a:r>
+                      <a:r>
+                        <a:rPr lang="en-US" sz="1400" dirty="0">
+                          <a:latin typeface="Consolas" panose="020B0609020204030204" pitchFamily="49" charset="0"/>
+                          <a:cs typeface="Consolas" panose="020B0609020204030204" pitchFamily="49" charset="0"/>
+                        </a:rPr>
+                        <a:t>, </a:t>
+                      </a:r>
+                      <a:r>
+                        <a:rPr lang="en-US" sz="1400" dirty="0" err="1">
+                          <a:latin typeface="Consolas" panose="020B0609020204030204" pitchFamily="49" charset="0"/>
+                          <a:cs typeface="Consolas" panose="020B0609020204030204" pitchFamily="49" charset="0"/>
+                        </a:rPr>
+                        <a:t>st.st_size</a:t>
+                      </a:r>
+                      <a:r>
+                        <a:rPr lang="en-US" sz="1400" dirty="0">
+                          <a:latin typeface="Consolas" panose="020B0609020204030204" pitchFamily="49" charset="0"/>
+                          <a:cs typeface="Consolas" panose="020B0609020204030204" pitchFamily="49" charset="0"/>
+                        </a:rPr>
+                        <a:t>);</a:t>
+                      </a:r>
+                      <a:br>
+                        <a:rPr lang="en-US" sz="1400" dirty="0">
+                          <a:latin typeface="Consolas" panose="020B0609020204030204" pitchFamily="49" charset="0"/>
+                          <a:cs typeface="Consolas" panose="020B0609020204030204" pitchFamily="49" charset="0"/>
+                        </a:rPr>
+                      </a:br>
+                      <a:r>
+                        <a:rPr lang="en-US" sz="1400" dirty="0" err="1">
+                          <a:latin typeface="Consolas" panose="020B0609020204030204" pitchFamily="49" charset="0"/>
+                          <a:cs typeface="Consolas" panose="020B0609020204030204" pitchFamily="49" charset="0"/>
+                        </a:rPr>
+                        <a:t>buf</a:t>
+                      </a:r>
+                      <a:r>
+                        <a:rPr lang="en-US" sz="1400" dirty="0">
+                          <a:latin typeface="Consolas" panose="020B0609020204030204" pitchFamily="49" charset="0"/>
+                          <a:cs typeface="Consolas" panose="020B0609020204030204" pitchFamily="49" charset="0"/>
+                        </a:rPr>
+                        <a:t>[</a:t>
+                      </a:r>
+                      <a:r>
+                        <a:rPr lang="en-US" sz="1400" dirty="0" err="1">
+                          <a:latin typeface="Consolas" panose="020B0609020204030204" pitchFamily="49" charset="0"/>
+                          <a:cs typeface="Consolas" panose="020B0609020204030204" pitchFamily="49" charset="0"/>
+                        </a:rPr>
+                        <a:t>st.st_size</a:t>
+                      </a:r>
+                      <a:r>
+                        <a:rPr lang="en-US" sz="1400" dirty="0">
+                          <a:latin typeface="Consolas" panose="020B0609020204030204" pitchFamily="49" charset="0"/>
+                          <a:cs typeface="Consolas" panose="020B0609020204030204" pitchFamily="49" charset="0"/>
+                        </a:rPr>
+                        <a:t>] = ‘\0’;</a:t>
+                      </a:r>
+                      <a:br>
+                        <a:rPr lang="en-US" dirty="0"/>
+                      </a:br>
+                      <a:endParaRPr lang="en-US" dirty="0"/>
+                    </a:p>
+                    <a:p>
+                      <a:pPr marL="342900" indent="-342900">
+                        <a:buAutoNum type="arabicPeriod"/>
+                      </a:pPr>
+                      <a:r>
+                        <a:rPr lang="en-US" dirty="0"/>
+                        <a:t>Creating two files in a directory</a:t>
+                      </a:r>
+                      <a:r>
+                        <a:rPr lang="ru-RU" dirty="0"/>
+                        <a:t>:</a:t>
+                      </a:r>
+                      <a:br>
+                        <a:rPr lang="en-US" dirty="0"/>
+                      </a:br>
+                      <a:r>
+                        <a:rPr lang="en-US" sz="1400" dirty="0">
+                          <a:latin typeface="Consolas" panose="020B0609020204030204" pitchFamily="49" charset="0"/>
+                          <a:cs typeface="Consolas" panose="020B0609020204030204" pitchFamily="49" charset="0"/>
+                        </a:rPr>
+                        <a:t>int fd0 = open(“/</a:t>
+                      </a:r>
+                      <a:r>
+                        <a:rPr lang="en-US" sz="1400" dirty="0" err="1">
+                          <a:latin typeface="Consolas" panose="020B0609020204030204" pitchFamily="49" charset="0"/>
+                          <a:cs typeface="Consolas" panose="020B0609020204030204" pitchFamily="49" charset="0"/>
+                        </a:rPr>
+                        <a:t>dir</a:t>
+                      </a:r>
+                      <a:r>
+                        <a:rPr lang="en-US" sz="1400" dirty="0">
+                          <a:latin typeface="Consolas" panose="020B0609020204030204" pitchFamily="49" charset="0"/>
+                          <a:cs typeface="Consolas" panose="020B0609020204030204" pitchFamily="49" charset="0"/>
+                        </a:rPr>
+                        <a:t>/a”, O_RDWR|O_CREAT, S_IRUSR);</a:t>
+                      </a:r>
+                      <a:br>
+                        <a:rPr lang="en-US" sz="1400" dirty="0">
+                          <a:latin typeface="Consolas" panose="020B0609020204030204" pitchFamily="49" charset="0"/>
+                          <a:cs typeface="Consolas" panose="020B0609020204030204" pitchFamily="49" charset="0"/>
+                        </a:rPr>
+                      </a:br>
+                      <a:r>
+                        <a:rPr lang="en-US" sz="1400" dirty="0">
+                          <a:latin typeface="Consolas" panose="020B0609020204030204" pitchFamily="49" charset="0"/>
+                          <a:cs typeface="Consolas" panose="020B0609020204030204" pitchFamily="49" charset="0"/>
+                        </a:rPr>
+                        <a:t>int fd1 = open(“/</a:t>
+                      </a:r>
+                      <a:r>
+                        <a:rPr lang="en-US" sz="1400" dirty="0" err="1">
+                          <a:latin typeface="Consolas" panose="020B0609020204030204" pitchFamily="49" charset="0"/>
+                          <a:cs typeface="Consolas" panose="020B0609020204030204" pitchFamily="49" charset="0"/>
+                        </a:rPr>
+                        <a:t>dir</a:t>
+                      </a:r>
+                      <a:r>
+                        <a:rPr lang="en-US" sz="1400" dirty="0">
+                          <a:latin typeface="Consolas" panose="020B0609020204030204" pitchFamily="49" charset="0"/>
+                          <a:cs typeface="Consolas" panose="020B0609020204030204" pitchFamily="49" charset="0"/>
+                        </a:rPr>
+                        <a:t>/b”, O_RDWR|O_CREAT, S_IRUSR);</a:t>
+                      </a:r>
+                      <a:endParaRPr lang="ru-RU" sz="1400" dirty="0">
+                        <a:latin typeface="Consolas" panose="020B0609020204030204" pitchFamily="49" charset="0"/>
+                        <a:cs typeface="Consolas" panose="020B0609020204030204" pitchFamily="49" charset="0"/>
+                      </a:endParaRPr>
+                    </a:p>
+                  </a:txBody>
+                  <a:tcPr/>
+                </a:tc>
+                <a:tc>
+                  <a:txBody>
+                    <a:bodyPr/>
+                    <a:lstStyle/>
+                    <a:p>
+                      <a:pPr marL="342900" indent="-342900">
+                        <a:buAutoNum type="arabicPeriod"/>
+                      </a:pPr>
+                      <a:r>
+                        <a:rPr lang="en-US" dirty="0"/>
+                        <a:t>There is a time frame when another process can open</a:t>
+                      </a:r>
+                      <a:r>
+                        <a:rPr lang="ru-RU" dirty="0"/>
+                        <a:t> </a:t>
+                      </a:r>
+                      <a:r>
+                        <a:rPr lang="en-US" dirty="0">
+                          <a:latin typeface="Consolas" panose="020B0609020204030204" pitchFamily="49" charset="0"/>
+                          <a:cs typeface="Consolas" panose="020B0609020204030204" pitchFamily="49" charset="0"/>
+                        </a:rPr>
+                        <a:t>/</a:t>
+                      </a:r>
+                      <a:r>
+                        <a:rPr lang="en-US" dirty="0" err="1">
+                          <a:latin typeface="Consolas" panose="020B0609020204030204" pitchFamily="49" charset="0"/>
+                          <a:cs typeface="Consolas" panose="020B0609020204030204" pitchFamily="49" charset="0"/>
+                        </a:rPr>
+                        <a:t>tmp</a:t>
+                      </a:r>
+                      <a:r>
+                        <a:rPr lang="en-US" dirty="0">
+                          <a:latin typeface="Consolas" panose="020B0609020204030204" pitchFamily="49" charset="0"/>
+                          <a:cs typeface="Consolas" panose="020B0609020204030204" pitchFamily="49" charset="0"/>
+                        </a:rPr>
+                        <a:t>/tmp.1b42ac00de</a:t>
+                      </a:r>
+                      <a:r>
+                        <a:rPr lang="ru-RU" dirty="0"/>
+                        <a:t> </a:t>
+                      </a:r>
+                      <a:r>
+                        <a:rPr lang="en-US" dirty="0"/>
+                        <a:t>by name. Such process will be able steal the data from the temp file</a:t>
+                      </a:r>
+                      <a:r>
+                        <a:rPr lang="ru-RU" dirty="0"/>
+                        <a:t>.</a:t>
+                      </a:r>
+                      <a:endParaRPr lang="en-US" dirty="0"/>
+                    </a:p>
+                    <a:p>
+                      <a:pPr marL="342900" indent="-342900">
+                        <a:buAutoNum type="arabicPeriod"/>
+                      </a:pPr>
+                      <a:endParaRPr lang="en-US" dirty="0"/>
+                    </a:p>
+                    <a:p>
+                      <a:pPr marL="342900" indent="-342900">
+                        <a:buAutoNum type="arabicPeriod"/>
+                      </a:pPr>
+                      <a:r>
+                        <a:rPr lang="en-US" dirty="0"/>
+                        <a:t>Another process can change the </a:t>
+                      </a:r>
+                      <a:r>
+                        <a:rPr lang="en-US" dirty="0" err="1"/>
+                        <a:t>symlink</a:t>
+                      </a:r>
+                      <a:r>
+                        <a:rPr lang="en-US" dirty="0"/>
+                        <a:t> value between the calls to </a:t>
+                      </a:r>
+                      <a:r>
+                        <a:rPr lang="en-US" dirty="0" err="1">
+                          <a:latin typeface="Consolas" panose="020B0609020204030204" pitchFamily="49" charset="0"/>
+                          <a:cs typeface="Consolas" panose="020B0609020204030204" pitchFamily="49" charset="0"/>
+                        </a:rPr>
+                        <a:t>lstat</a:t>
+                      </a:r>
+                      <a:r>
+                        <a:rPr lang="en-US" dirty="0">
+                          <a:latin typeface="Consolas" panose="020B0609020204030204" pitchFamily="49" charset="0"/>
+                          <a:cs typeface="Consolas" panose="020B0609020204030204" pitchFamily="49" charset="0"/>
+                        </a:rPr>
+                        <a:t>()</a:t>
+                      </a:r>
+                      <a:r>
+                        <a:rPr lang="ru-RU" dirty="0"/>
+                        <a:t> </a:t>
+                      </a:r>
+                      <a:r>
+                        <a:rPr lang="en-US" dirty="0"/>
+                        <a:t>and</a:t>
+                      </a:r>
+                      <a:r>
+                        <a:rPr lang="ru-RU" dirty="0"/>
+                        <a:t> </a:t>
+                      </a:r>
+                      <a:r>
+                        <a:rPr lang="en-US" dirty="0" err="1">
+                          <a:latin typeface="Consolas" panose="020B0609020204030204" pitchFamily="49" charset="0"/>
+                          <a:cs typeface="Consolas" panose="020B0609020204030204" pitchFamily="49" charset="0"/>
+                        </a:rPr>
+                        <a:t>readlink</a:t>
+                      </a:r>
+                      <a:r>
+                        <a:rPr lang="en-US" dirty="0">
+                          <a:latin typeface="Consolas" panose="020B0609020204030204" pitchFamily="49" charset="0"/>
+                          <a:cs typeface="Consolas" panose="020B0609020204030204" pitchFamily="49" charset="0"/>
+                        </a:rPr>
+                        <a:t>()</a:t>
+                      </a:r>
+                      <a:r>
+                        <a:rPr lang="en-US" dirty="0"/>
+                        <a:t>. See TOCTTOU (time of check to time of use).</a:t>
+                      </a:r>
+                    </a:p>
+                  </a:txBody>
+                  <a:tcPr/>
+                </a:tc>
+                <a:extLst>
+                  <a:ext uri="{0D108BD9-81ED-4DB2-BD59-A6C34878D82A}">
+                    <a16:rowId xmlns:a16="http://schemas.microsoft.com/office/drawing/2014/main" val="1501800952"/>
+                  </a:ext>
+                </a:extLst>
+              </a:tr>
+            </a:tbl>
+          </a:graphicData>
+        </a:graphic>
+      </p:graphicFrame>
+    </p:spTree>
+    <p:extLst>
+      <p:ext uri="{BB962C8B-B14F-4D97-AF65-F5344CB8AC3E}">
+        <p14:creationId xmlns:p14="http://schemas.microsoft.com/office/powerpoint/2010/main" val="1434024803"/>
+      </p:ext>
+    </p:extLst>
+  </p:cSld>
+  <p:clrMapOvr>
+    <a:masterClrMapping/>
+  </p:clrMapOvr>
+</p:sld>
+</file>
+
+<file path=ppt/slides/slide23.xml><?xml version="1.0" encoding="utf-8"?>
+<p:sld xmlns:a="http://schemas.openxmlformats.org/drawingml/2006/main" xmlns:r="http://schemas.openxmlformats.org/officeDocument/2006/relationships" xmlns:p="http://schemas.openxmlformats.org/presentationml/2006/main">
+  <p:cSld>
+    <p:spTree>
+      <p:nvGrpSpPr>
+        <p:cNvPr id="1" name="">
+          <a:extLst>
+            <a:ext uri="{FF2B5EF4-FFF2-40B4-BE49-F238E27FC236}">
+              <a16:creationId xmlns:a16="http://schemas.microsoft.com/office/drawing/2014/main" id="{D95198C4-020E-35B3-C734-5E33E4B85C7D}"/>
+            </a:ext>
+          </a:extLst>
+        </p:cNvPr>
+        <p:cNvGrpSpPr/>
+        <p:nvPr/>
+      </p:nvGrpSpPr>
+      <p:grpSpPr>
+        <a:xfrm>
+          <a:off x="0" y="0"/>
+          <a:ext cx="0" cy="0"/>
+          <a:chOff x="0" y="0"/>
+          <a:chExt cx="0" cy="0"/>
+        </a:xfrm>
+      </p:grpSpPr>
+      <p:graphicFrame>
+        <p:nvGraphicFramePr>
+          <p:cNvPr id="5" name="Table 4">
+            <a:extLst>
+              <a:ext uri="{FF2B5EF4-FFF2-40B4-BE49-F238E27FC236}">
+                <a16:creationId xmlns:a16="http://schemas.microsoft.com/office/drawing/2014/main" id="{A1D274CD-FD88-3B1A-3FC6-E3487413C641}"/>
+              </a:ext>
+            </a:extLst>
+          </p:cNvPr>
+          <p:cNvGraphicFramePr>
+            <a:graphicFrameLocks noGrp="1"/>
+          </p:cNvGraphicFramePr>
+          <p:nvPr/>
+        </p:nvGraphicFramePr>
+        <p:xfrm>
+          <a:off x="0" y="1"/>
+          <a:ext cx="12192000" cy="365760"/>
+        </p:xfrm>
+        <a:graphic>
+          <a:graphicData uri="http://schemas.openxmlformats.org/drawingml/2006/table">
+            <a:tbl>
+              <a:tblPr firstRow="1" bandRow="1">
+                <a:tableStyleId>{5C22544A-7EE6-4342-B048-85BDC9FD1C3A}</a:tableStyleId>
+              </a:tblPr>
+              <a:tblGrid>
+                <a:gridCol w="12192000">
+                  <a:extLst>
+                    <a:ext uri="{9D8B030D-6E8A-4147-A177-3AD203B41FA5}">
+                      <a16:colId xmlns:a16="http://schemas.microsoft.com/office/drawing/2014/main" val="20000"/>
+                    </a:ext>
+                  </a:extLst>
+                </a:gridCol>
+              </a:tblGrid>
+              <a:tr h="321276">
+                <a:tc>
+                  <a:txBody>
+                    <a:bodyPr/>
+                    <a:lstStyle/>
+                    <a:p>
+                      <a:r>
+                        <a:rPr lang="en-US" sz="1800" dirty="0"/>
+                        <a:t>The POSIX file system semantics</a:t>
+                      </a:r>
+                      <a:endParaRPr lang="ru-RU" sz="1800" dirty="0"/>
+                    </a:p>
+                  </a:txBody>
+                  <a:tcPr/>
+                </a:tc>
+                <a:extLst>
+                  <a:ext uri="{0D108BD9-81ED-4DB2-BD59-A6C34878D82A}">
+                    <a16:rowId xmlns:a16="http://schemas.microsoft.com/office/drawing/2014/main" val="10000"/>
+                  </a:ext>
+                </a:extLst>
+              </a:tr>
+            </a:tbl>
+          </a:graphicData>
+        </a:graphic>
+      </p:graphicFrame>
+      <p:graphicFrame>
+        <p:nvGraphicFramePr>
+          <p:cNvPr id="6" name="Table 5">
+            <a:extLst>
+              <a:ext uri="{FF2B5EF4-FFF2-40B4-BE49-F238E27FC236}">
+                <a16:creationId xmlns:a16="http://schemas.microsoft.com/office/drawing/2014/main" id="{121A8942-F694-5475-6DB6-8A167C6215D8}"/>
+              </a:ext>
+            </a:extLst>
+          </p:cNvPr>
+          <p:cNvGraphicFramePr>
+            <a:graphicFrameLocks noGrp="1"/>
+          </p:cNvGraphicFramePr>
+          <p:nvPr/>
+        </p:nvGraphicFramePr>
+        <p:xfrm>
+          <a:off x="0" y="6532604"/>
+          <a:ext cx="12192000" cy="365760"/>
+        </p:xfrm>
+        <a:graphic>
+          <a:graphicData uri="http://schemas.openxmlformats.org/drawingml/2006/table">
+            <a:tbl>
+              <a:tblPr firstRow="1" bandRow="1">
+                <a:tableStyleId>{5C22544A-7EE6-4342-B048-85BDC9FD1C3A}</a:tableStyleId>
+              </a:tblPr>
+              <a:tblGrid>
+                <a:gridCol w="12192000">
+                  <a:extLst>
+                    <a:ext uri="{9D8B030D-6E8A-4147-A177-3AD203B41FA5}">
+                      <a16:colId xmlns:a16="http://schemas.microsoft.com/office/drawing/2014/main" val="20000"/>
+                    </a:ext>
+                  </a:extLst>
+                </a:gridCol>
+              </a:tblGrid>
+              <a:tr h="308094">
+                <a:tc>
+                  <a:txBody>
+                    <a:bodyPr/>
+                    <a:lstStyle/>
+                    <a:p>
+                      <a:endParaRPr lang="ru-RU" dirty="0"/>
+                    </a:p>
+                  </a:txBody>
+                  <a:tcPr/>
+                </a:tc>
+                <a:extLst>
+                  <a:ext uri="{0D108BD9-81ED-4DB2-BD59-A6C34878D82A}">
+                    <a16:rowId xmlns:a16="http://schemas.microsoft.com/office/drawing/2014/main" val="10000"/>
+                  </a:ext>
+                </a:extLst>
+              </a:tr>
+            </a:tbl>
+          </a:graphicData>
+        </a:graphic>
+      </p:graphicFrame>
+      <p:graphicFrame>
+        <p:nvGraphicFramePr>
+          <p:cNvPr id="2" name="Table 1">
+            <a:extLst>
+              <a:ext uri="{FF2B5EF4-FFF2-40B4-BE49-F238E27FC236}">
+                <a16:creationId xmlns:a16="http://schemas.microsoft.com/office/drawing/2014/main" id="{FB5AA5A6-6F9D-8A49-3EE5-45ED162BF202}"/>
+              </a:ext>
+            </a:extLst>
+          </p:cNvPr>
+          <p:cNvGraphicFramePr>
+            <a:graphicFrameLocks noGrp="1"/>
+          </p:cNvGraphicFramePr>
+          <p:nvPr/>
+        </p:nvGraphicFramePr>
+        <p:xfrm>
+          <a:off x="0" y="342613"/>
+          <a:ext cx="12192000" cy="5006175"/>
+        </p:xfrm>
+        <a:graphic>
+          <a:graphicData uri="http://schemas.openxmlformats.org/drawingml/2006/table">
+            <a:tbl>
+              <a:tblPr firstRow="1" bandRow="1">
+                <a:tableStyleId>{3B4B98B0-60AC-42C2-AFA5-B58CD77FA1E5}</a:tableStyleId>
+              </a:tblPr>
+              <a:tblGrid>
+                <a:gridCol w="6096000">
+                  <a:extLst>
+                    <a:ext uri="{9D8B030D-6E8A-4147-A177-3AD203B41FA5}">
+                      <a16:colId xmlns:a16="http://schemas.microsoft.com/office/drawing/2014/main" val="20000"/>
+                    </a:ext>
+                  </a:extLst>
+                </a:gridCol>
+                <a:gridCol w="6096000">
+                  <a:extLst>
+                    <a:ext uri="{9D8B030D-6E8A-4147-A177-3AD203B41FA5}">
+                      <a16:colId xmlns:a16="http://schemas.microsoft.com/office/drawing/2014/main" val="3688292786"/>
+                    </a:ext>
+                  </a:extLst>
+                </a:gridCol>
+              </a:tblGrid>
+              <a:tr h="434175">
+                <a:tc>
+                  <a:txBody>
+                    <a:bodyPr/>
+                    <a:lstStyle/>
+                    <a:p>
+                      <a:r>
+                        <a:rPr lang="en-US" dirty="0"/>
+                        <a:t>A file system is a shared resource: concurrent access and races</a:t>
+                      </a:r>
+                      <a:endParaRPr lang="ru-RU" dirty="0"/>
+                    </a:p>
+                  </a:txBody>
+                  <a:tcPr/>
+                </a:tc>
+                <a:tc>
+                  <a:txBody>
+                    <a:bodyPr/>
+                    <a:lstStyle/>
+                    <a:p>
+                      <a:endParaRPr lang="ru-RU" dirty="0"/>
+                    </a:p>
+                  </a:txBody>
+                  <a:tcPr/>
+                </a:tc>
+                <a:extLst>
+                  <a:ext uri="{0D108BD9-81ED-4DB2-BD59-A6C34878D82A}">
+                    <a16:rowId xmlns:a16="http://schemas.microsoft.com/office/drawing/2014/main" val="10000"/>
+                  </a:ext>
+                </a:extLst>
+              </a:tr>
+              <a:tr h="434175">
+                <a:tc gridSpan="2">
+                  <a:txBody>
+                    <a:bodyPr/>
+                    <a:lstStyle/>
+                    <a:p>
+                      <a:r>
+                        <a:rPr lang="en-US" dirty="0"/>
+                        <a:t>When multiple threads access the same memory region, they need to </a:t>
+                      </a:r>
+                      <a:r>
+                        <a:rPr lang="en-US" dirty="0" err="1"/>
+                        <a:t>synchronise</a:t>
+                      </a:r>
+                      <a:r>
+                        <a:rPr lang="en-US" dirty="0"/>
+                        <a:t> their access to avoid races.</a:t>
+                      </a:r>
+                      <a:endParaRPr lang="ru-RU" dirty="0"/>
+                    </a:p>
+                    <a:p>
+                      <a:endParaRPr lang="ru-RU" dirty="0"/>
+                    </a:p>
+                    <a:p>
+                      <a:r>
+                        <a:rPr lang="en-US" dirty="0"/>
+                        <a:t>What happens when multiple process access the same directory?</a:t>
+                      </a:r>
+                      <a:endParaRPr lang="ru-RU" dirty="0"/>
+                    </a:p>
+                  </a:txBody>
+                  <a:tcPr/>
+                </a:tc>
+                <a:tc hMerge="1">
+                  <a:txBody>
+                    <a:bodyPr/>
+                    <a:lstStyle/>
+                    <a:p>
+                      <a:endParaRPr lang="ru-RU" dirty="0"/>
+                    </a:p>
+                  </a:txBody>
+                  <a:tcPr/>
+                </a:tc>
+                <a:extLst>
+                  <a:ext uri="{0D108BD9-81ED-4DB2-BD59-A6C34878D82A}">
+                    <a16:rowId xmlns:a16="http://schemas.microsoft.com/office/drawing/2014/main" val="3908480295"/>
+                  </a:ext>
+                </a:extLst>
+              </a:tr>
+              <a:tr h="434175">
+                <a:tc>
+                  <a:txBody>
+                    <a:bodyPr/>
+                    <a:lstStyle/>
+                    <a:p>
+                      <a:pPr marL="342900" indent="-342900">
+                        <a:buAutoNum type="arabicPeriod"/>
+                      </a:pPr>
+                      <a:r>
+                        <a:rPr lang="en-US" dirty="0"/>
+                        <a:t>Creating a temporary file</a:t>
+                      </a:r>
+                      <a:r>
+                        <a:rPr lang="ru-RU" dirty="0"/>
+                        <a:t>:</a:t>
+                      </a:r>
+                      <a:br>
+                        <a:rPr lang="en-US" dirty="0"/>
+                      </a:br>
+                      <a:r>
+                        <a:rPr lang="en-US" sz="1400" dirty="0">
+                          <a:latin typeface="Consolas" panose="020B0609020204030204" pitchFamily="49" charset="0"/>
+                          <a:cs typeface="Consolas" panose="020B0609020204030204" pitchFamily="49" charset="0"/>
+                        </a:rPr>
+                        <a:t>int </a:t>
+                      </a:r>
+                      <a:r>
+                        <a:rPr lang="en-US" sz="1400" dirty="0" err="1">
+                          <a:latin typeface="Consolas" panose="020B0609020204030204" pitchFamily="49" charset="0"/>
+                          <a:cs typeface="Consolas" panose="020B0609020204030204" pitchFamily="49" charset="0"/>
+                        </a:rPr>
+                        <a:t>fd</a:t>
+                      </a:r>
+                      <a:r>
+                        <a:rPr lang="en-US" sz="1400" dirty="0">
+                          <a:latin typeface="Consolas" panose="020B0609020204030204" pitchFamily="49" charset="0"/>
+                          <a:cs typeface="Consolas" panose="020B0609020204030204" pitchFamily="49" charset="0"/>
+                        </a:rPr>
+                        <a:t> = open(“/</a:t>
+                      </a:r>
+                      <a:r>
+                        <a:rPr lang="en-US" sz="1400" dirty="0" err="1">
+                          <a:latin typeface="Consolas" panose="020B0609020204030204" pitchFamily="49" charset="0"/>
+                          <a:cs typeface="Consolas" panose="020B0609020204030204" pitchFamily="49" charset="0"/>
+                        </a:rPr>
+                        <a:t>tmp</a:t>
+                      </a:r>
+                      <a:r>
+                        <a:rPr lang="en-US" sz="1400" dirty="0">
+                          <a:latin typeface="Consolas" panose="020B0609020204030204" pitchFamily="49" charset="0"/>
+                          <a:cs typeface="Consolas" panose="020B0609020204030204" pitchFamily="49" charset="0"/>
+                        </a:rPr>
+                        <a:t>/tmp.1b42ac00de”, O_RDWR|O_CREAT, 0);</a:t>
+                      </a:r>
+                      <a:br>
+                        <a:rPr lang="en-US" sz="1400" dirty="0">
+                          <a:latin typeface="Consolas" panose="020B0609020204030204" pitchFamily="49" charset="0"/>
+                          <a:cs typeface="Consolas" panose="020B0609020204030204" pitchFamily="49" charset="0"/>
+                        </a:rPr>
+                      </a:br>
+                      <a:r>
+                        <a:rPr lang="en-US" sz="1400" dirty="0">
+                          <a:latin typeface="Consolas" panose="020B0609020204030204" pitchFamily="49" charset="0"/>
+                          <a:cs typeface="Consolas" panose="020B0609020204030204" pitchFamily="49" charset="0"/>
+                        </a:rPr>
+                        <a:t>unlink(“/</a:t>
+                      </a:r>
+                      <a:r>
+                        <a:rPr lang="en-US" sz="1400" dirty="0" err="1">
+                          <a:latin typeface="Consolas" panose="020B0609020204030204" pitchFamily="49" charset="0"/>
+                          <a:cs typeface="Consolas" panose="020B0609020204030204" pitchFamily="49" charset="0"/>
+                        </a:rPr>
+                        <a:t>tmp</a:t>
+                      </a:r>
+                      <a:r>
+                        <a:rPr lang="en-US" sz="1400" dirty="0">
+                          <a:latin typeface="Consolas" panose="020B0609020204030204" pitchFamily="49" charset="0"/>
+                          <a:cs typeface="Consolas" panose="020B0609020204030204" pitchFamily="49" charset="0"/>
+                        </a:rPr>
+                        <a:t>/tmp.1b42ac00de”);</a:t>
+                      </a:r>
+                      <a:br>
+                        <a:rPr lang="en-US" sz="1400" dirty="0">
+                          <a:latin typeface="Consolas" panose="020B0609020204030204" pitchFamily="49" charset="0"/>
+                          <a:cs typeface="Consolas" panose="020B0609020204030204" pitchFamily="49" charset="0"/>
+                        </a:rPr>
+                      </a:br>
+                      <a:r>
+                        <a:rPr lang="en-US" sz="1400" dirty="0">
+                          <a:latin typeface="Consolas" panose="020B0609020204030204" pitchFamily="49" charset="0"/>
+                          <a:cs typeface="Consolas" panose="020B0609020204030204" pitchFamily="49" charset="0"/>
+                        </a:rPr>
+                        <a:t>... use </a:t>
+                      </a:r>
+                      <a:r>
+                        <a:rPr lang="en-US" sz="1400" dirty="0" err="1">
+                          <a:latin typeface="Consolas" panose="020B0609020204030204" pitchFamily="49" charset="0"/>
+                          <a:cs typeface="Consolas" panose="020B0609020204030204" pitchFamily="49" charset="0"/>
+                        </a:rPr>
+                        <a:t>fd</a:t>
+                      </a:r>
+                      <a:r>
+                        <a:rPr lang="en-US" sz="1400" dirty="0">
+                          <a:latin typeface="Consolas" panose="020B0609020204030204" pitchFamily="49" charset="0"/>
+                          <a:cs typeface="Consolas" panose="020B0609020204030204" pitchFamily="49" charset="0"/>
+                        </a:rPr>
+                        <a:t> to keep temp data ...</a:t>
+                      </a:r>
+                      <a:br>
+                        <a:rPr lang="en-US" sz="1600" dirty="0"/>
+                      </a:br>
+                      <a:endParaRPr lang="en-US" sz="1600" dirty="0"/>
+                    </a:p>
+                    <a:p>
+                      <a:pPr marL="342900" indent="-342900">
+                        <a:buAutoNum type="arabicPeriod"/>
+                      </a:pPr>
+                      <a:r>
+                        <a:rPr lang="en-US" dirty="0"/>
+                        <a:t>Reading a symbolic link:</a:t>
+                      </a:r>
+                      <a:br>
+                        <a:rPr lang="en-US" dirty="0"/>
+                      </a:br>
+                      <a:r>
+                        <a:rPr lang="en-US" sz="1400" dirty="0">
+                          <a:latin typeface="Consolas" panose="020B0609020204030204" pitchFamily="49" charset="0"/>
+                          <a:cs typeface="Consolas" panose="020B0609020204030204" pitchFamily="49" charset="0"/>
+                        </a:rPr>
+                        <a:t>struct stat </a:t>
+                      </a:r>
+                      <a:r>
+                        <a:rPr lang="en-US" sz="1400" dirty="0" err="1">
+                          <a:latin typeface="Consolas" panose="020B0609020204030204" pitchFamily="49" charset="0"/>
+                          <a:cs typeface="Consolas" panose="020B0609020204030204" pitchFamily="49" charset="0"/>
+                        </a:rPr>
+                        <a:t>st</a:t>
+                      </a:r>
+                      <a:r>
+                        <a:rPr lang="en-US" sz="1400" dirty="0">
+                          <a:latin typeface="Consolas" panose="020B0609020204030204" pitchFamily="49" charset="0"/>
+                          <a:cs typeface="Consolas" panose="020B0609020204030204" pitchFamily="49" charset="0"/>
+                        </a:rPr>
+                        <a:t>;</a:t>
+                      </a:r>
+                      <a:br>
+                        <a:rPr lang="en-US" sz="1400" dirty="0">
+                          <a:latin typeface="Consolas" panose="020B0609020204030204" pitchFamily="49" charset="0"/>
+                          <a:cs typeface="Consolas" panose="020B0609020204030204" pitchFamily="49" charset="0"/>
+                        </a:rPr>
+                      </a:br>
+                      <a:r>
+                        <a:rPr lang="en-US" sz="1400" dirty="0" err="1">
+                          <a:latin typeface="Consolas" panose="020B0609020204030204" pitchFamily="49" charset="0"/>
+                          <a:cs typeface="Consolas" panose="020B0609020204030204" pitchFamily="49" charset="0"/>
+                        </a:rPr>
+                        <a:t>lstat</a:t>
+                      </a:r>
+                      <a:r>
+                        <a:rPr lang="en-US" sz="1400" dirty="0">
+                          <a:latin typeface="Consolas" panose="020B0609020204030204" pitchFamily="49" charset="0"/>
+                          <a:cs typeface="Consolas" panose="020B0609020204030204" pitchFamily="49" charset="0"/>
+                        </a:rPr>
+                        <a:t>(“/path/to/</a:t>
+                      </a:r>
+                      <a:r>
+                        <a:rPr lang="en-US" sz="1400" dirty="0" err="1">
+                          <a:latin typeface="Consolas" panose="020B0609020204030204" pitchFamily="49" charset="0"/>
+                          <a:cs typeface="Consolas" panose="020B0609020204030204" pitchFamily="49" charset="0"/>
+                        </a:rPr>
+                        <a:t>symlink</a:t>
+                      </a:r>
+                      <a:r>
+                        <a:rPr lang="en-US" sz="1400" dirty="0">
+                          <a:latin typeface="Consolas" panose="020B0609020204030204" pitchFamily="49" charset="0"/>
+                          <a:cs typeface="Consolas" panose="020B0609020204030204" pitchFamily="49" charset="0"/>
+                        </a:rPr>
+                        <a:t>”, &amp;</a:t>
+                      </a:r>
+                      <a:r>
+                        <a:rPr lang="en-US" sz="1400" dirty="0" err="1">
+                          <a:latin typeface="Consolas" panose="020B0609020204030204" pitchFamily="49" charset="0"/>
+                          <a:cs typeface="Consolas" panose="020B0609020204030204" pitchFamily="49" charset="0"/>
+                        </a:rPr>
+                        <a:t>st</a:t>
+                      </a:r>
+                      <a:r>
+                        <a:rPr lang="en-US" sz="1400" dirty="0">
+                          <a:latin typeface="Consolas" panose="020B0609020204030204" pitchFamily="49" charset="0"/>
+                          <a:cs typeface="Consolas" panose="020B0609020204030204" pitchFamily="49" charset="0"/>
+                        </a:rPr>
+                        <a:t>);</a:t>
+                      </a:r>
+                      <a:br>
+                        <a:rPr lang="en-US" sz="1400" dirty="0">
+                          <a:latin typeface="Consolas" panose="020B0609020204030204" pitchFamily="49" charset="0"/>
+                          <a:cs typeface="Consolas" panose="020B0609020204030204" pitchFamily="49" charset="0"/>
+                        </a:rPr>
+                      </a:br>
+                      <a:r>
+                        <a:rPr lang="en-US" sz="1400" dirty="0">
+                          <a:latin typeface="Consolas" panose="020B0609020204030204" pitchFamily="49" charset="0"/>
+                          <a:cs typeface="Consolas" panose="020B0609020204030204" pitchFamily="49" charset="0"/>
+                        </a:rPr>
+                        <a:t>char *</a:t>
+                      </a:r>
+                      <a:r>
+                        <a:rPr lang="en-US" sz="1400" dirty="0" err="1">
+                          <a:latin typeface="Consolas" panose="020B0609020204030204" pitchFamily="49" charset="0"/>
+                          <a:cs typeface="Consolas" panose="020B0609020204030204" pitchFamily="49" charset="0"/>
+                        </a:rPr>
+                        <a:t>buf</a:t>
+                      </a:r>
+                      <a:r>
+                        <a:rPr lang="en-US" sz="1400" dirty="0">
+                          <a:latin typeface="Consolas" panose="020B0609020204030204" pitchFamily="49" charset="0"/>
+                          <a:cs typeface="Consolas" panose="020B0609020204030204" pitchFamily="49" charset="0"/>
+                        </a:rPr>
+                        <a:t> = malloc(</a:t>
+                      </a:r>
+                      <a:r>
+                        <a:rPr lang="en-US" sz="1400" dirty="0" err="1">
+                          <a:latin typeface="Consolas" panose="020B0609020204030204" pitchFamily="49" charset="0"/>
+                          <a:cs typeface="Consolas" panose="020B0609020204030204" pitchFamily="49" charset="0"/>
+                        </a:rPr>
+                        <a:t>st.st_size</a:t>
+                      </a:r>
+                      <a:r>
+                        <a:rPr lang="en-US" sz="1400" dirty="0">
+                          <a:latin typeface="Consolas" panose="020B0609020204030204" pitchFamily="49" charset="0"/>
+                          <a:cs typeface="Consolas" panose="020B0609020204030204" pitchFamily="49" charset="0"/>
+                        </a:rPr>
+                        <a:t> + 1);</a:t>
+                      </a:r>
+                      <a:br>
+                        <a:rPr lang="en-US" sz="1400" dirty="0">
+                          <a:latin typeface="Consolas" panose="020B0609020204030204" pitchFamily="49" charset="0"/>
+                          <a:cs typeface="Consolas" panose="020B0609020204030204" pitchFamily="49" charset="0"/>
+                        </a:rPr>
+                      </a:br>
+                      <a:r>
+                        <a:rPr lang="en-US" sz="1400" dirty="0" err="1">
+                          <a:latin typeface="Consolas" panose="020B0609020204030204" pitchFamily="49" charset="0"/>
+                          <a:cs typeface="Consolas" panose="020B0609020204030204" pitchFamily="49" charset="0"/>
+                        </a:rPr>
+                        <a:t>readlink</a:t>
+                      </a:r>
+                      <a:r>
+                        <a:rPr lang="en-US" sz="1400" dirty="0">
+                          <a:latin typeface="Consolas" panose="020B0609020204030204" pitchFamily="49" charset="0"/>
+                          <a:cs typeface="Consolas" panose="020B0609020204030204" pitchFamily="49" charset="0"/>
+                        </a:rPr>
+                        <a:t>(“/path/to/</a:t>
+                      </a:r>
+                      <a:r>
+                        <a:rPr lang="en-US" sz="1400" dirty="0" err="1">
+                          <a:latin typeface="Consolas" panose="020B0609020204030204" pitchFamily="49" charset="0"/>
+                          <a:cs typeface="Consolas" panose="020B0609020204030204" pitchFamily="49" charset="0"/>
+                        </a:rPr>
+                        <a:t>symlink</a:t>
+                      </a:r>
+                      <a:r>
+                        <a:rPr lang="en-US" sz="1400" dirty="0">
+                          <a:latin typeface="Consolas" panose="020B0609020204030204" pitchFamily="49" charset="0"/>
+                          <a:cs typeface="Consolas" panose="020B0609020204030204" pitchFamily="49" charset="0"/>
+                        </a:rPr>
+                        <a:t>”, </a:t>
+                      </a:r>
+                      <a:r>
+                        <a:rPr lang="en-US" sz="1400" dirty="0" err="1">
+                          <a:latin typeface="Consolas" panose="020B0609020204030204" pitchFamily="49" charset="0"/>
+                          <a:cs typeface="Consolas" panose="020B0609020204030204" pitchFamily="49" charset="0"/>
+                        </a:rPr>
+                        <a:t>buf</a:t>
+                      </a:r>
+                      <a:r>
+                        <a:rPr lang="en-US" sz="1400" dirty="0">
+                          <a:latin typeface="Consolas" panose="020B0609020204030204" pitchFamily="49" charset="0"/>
+                          <a:cs typeface="Consolas" panose="020B0609020204030204" pitchFamily="49" charset="0"/>
+                        </a:rPr>
+                        <a:t>, </a:t>
+                      </a:r>
+                      <a:r>
+                        <a:rPr lang="en-US" sz="1400" dirty="0" err="1">
+                          <a:latin typeface="Consolas" panose="020B0609020204030204" pitchFamily="49" charset="0"/>
+                          <a:cs typeface="Consolas" panose="020B0609020204030204" pitchFamily="49" charset="0"/>
+                        </a:rPr>
+                        <a:t>st.st_size</a:t>
+                      </a:r>
+                      <a:r>
+                        <a:rPr lang="en-US" sz="1400" dirty="0">
+                          <a:latin typeface="Consolas" panose="020B0609020204030204" pitchFamily="49" charset="0"/>
+                          <a:cs typeface="Consolas" panose="020B0609020204030204" pitchFamily="49" charset="0"/>
+                        </a:rPr>
+                        <a:t>);</a:t>
+                      </a:r>
+                      <a:br>
+                        <a:rPr lang="en-US" sz="1400" dirty="0">
+                          <a:latin typeface="Consolas" panose="020B0609020204030204" pitchFamily="49" charset="0"/>
+                          <a:cs typeface="Consolas" panose="020B0609020204030204" pitchFamily="49" charset="0"/>
+                        </a:rPr>
+                      </a:br>
+                      <a:r>
+                        <a:rPr lang="en-US" sz="1400" dirty="0" err="1">
+                          <a:latin typeface="Consolas" panose="020B0609020204030204" pitchFamily="49" charset="0"/>
+                          <a:cs typeface="Consolas" panose="020B0609020204030204" pitchFamily="49" charset="0"/>
+                        </a:rPr>
+                        <a:t>buf</a:t>
+                      </a:r>
+                      <a:r>
+                        <a:rPr lang="en-US" sz="1400" dirty="0">
+                          <a:latin typeface="Consolas" panose="020B0609020204030204" pitchFamily="49" charset="0"/>
+                          <a:cs typeface="Consolas" panose="020B0609020204030204" pitchFamily="49" charset="0"/>
+                        </a:rPr>
+                        <a:t>[</a:t>
+                      </a:r>
+                      <a:r>
+                        <a:rPr lang="en-US" sz="1400" dirty="0" err="1">
+                          <a:latin typeface="Consolas" panose="020B0609020204030204" pitchFamily="49" charset="0"/>
+                          <a:cs typeface="Consolas" panose="020B0609020204030204" pitchFamily="49" charset="0"/>
+                        </a:rPr>
+                        <a:t>st.st_size</a:t>
+                      </a:r>
+                      <a:r>
+                        <a:rPr lang="en-US" sz="1400" dirty="0">
+                          <a:latin typeface="Consolas" panose="020B0609020204030204" pitchFamily="49" charset="0"/>
+                          <a:cs typeface="Consolas" panose="020B0609020204030204" pitchFamily="49" charset="0"/>
+                        </a:rPr>
+                        <a:t>] = ‘\0’;</a:t>
+                      </a:r>
+                      <a:br>
+                        <a:rPr lang="en-US" dirty="0"/>
+                      </a:br>
+                      <a:endParaRPr lang="en-US" dirty="0"/>
+                    </a:p>
+                    <a:p>
+                      <a:pPr marL="342900" indent="-342900">
+                        <a:buAutoNum type="arabicPeriod"/>
+                      </a:pPr>
+                      <a:r>
+                        <a:rPr lang="en-US" dirty="0"/>
+                        <a:t>Creating two files in a directory</a:t>
+                      </a:r>
+                      <a:r>
+                        <a:rPr lang="ru-RU" dirty="0"/>
+                        <a:t>:</a:t>
+                      </a:r>
+                      <a:br>
+                        <a:rPr lang="en-US" dirty="0"/>
+                      </a:br>
+                      <a:r>
+                        <a:rPr lang="en-US" sz="1400" dirty="0">
+                          <a:latin typeface="Consolas" panose="020B0609020204030204" pitchFamily="49" charset="0"/>
+                          <a:cs typeface="Consolas" panose="020B0609020204030204" pitchFamily="49" charset="0"/>
+                        </a:rPr>
+                        <a:t>int fd0 = open(“/</a:t>
+                      </a:r>
+                      <a:r>
+                        <a:rPr lang="en-US" sz="1400" dirty="0" err="1">
+                          <a:latin typeface="Consolas" panose="020B0609020204030204" pitchFamily="49" charset="0"/>
+                          <a:cs typeface="Consolas" panose="020B0609020204030204" pitchFamily="49" charset="0"/>
+                        </a:rPr>
+                        <a:t>dir</a:t>
+                      </a:r>
+                      <a:r>
+                        <a:rPr lang="en-US" sz="1400" dirty="0">
+                          <a:latin typeface="Consolas" panose="020B0609020204030204" pitchFamily="49" charset="0"/>
+                          <a:cs typeface="Consolas" panose="020B0609020204030204" pitchFamily="49" charset="0"/>
+                        </a:rPr>
+                        <a:t>/a”, O_RDWR|O_CREAT, S_IRUSR);</a:t>
+                      </a:r>
+                      <a:br>
+                        <a:rPr lang="en-US" sz="1400" dirty="0">
+                          <a:latin typeface="Consolas" panose="020B0609020204030204" pitchFamily="49" charset="0"/>
+                          <a:cs typeface="Consolas" panose="020B0609020204030204" pitchFamily="49" charset="0"/>
+                        </a:rPr>
+                      </a:br>
+                      <a:r>
+                        <a:rPr lang="en-US" sz="1400" dirty="0">
+                          <a:latin typeface="Consolas" panose="020B0609020204030204" pitchFamily="49" charset="0"/>
+                          <a:cs typeface="Consolas" panose="020B0609020204030204" pitchFamily="49" charset="0"/>
+                        </a:rPr>
+                        <a:t>int fd1 = open(“/</a:t>
+                      </a:r>
+                      <a:r>
+                        <a:rPr lang="en-US" sz="1400" dirty="0" err="1">
+                          <a:latin typeface="Consolas" panose="020B0609020204030204" pitchFamily="49" charset="0"/>
+                          <a:cs typeface="Consolas" panose="020B0609020204030204" pitchFamily="49" charset="0"/>
+                        </a:rPr>
+                        <a:t>dir</a:t>
+                      </a:r>
+                      <a:r>
+                        <a:rPr lang="en-US" sz="1400" dirty="0">
+                          <a:latin typeface="Consolas" panose="020B0609020204030204" pitchFamily="49" charset="0"/>
+                          <a:cs typeface="Consolas" panose="020B0609020204030204" pitchFamily="49" charset="0"/>
+                        </a:rPr>
+                        <a:t>/b”, O_RDWR|O_CREAT, S_IRUSR);</a:t>
+                      </a:r>
+                      <a:endParaRPr lang="ru-RU" sz="1400" dirty="0">
+                        <a:latin typeface="Consolas" panose="020B0609020204030204" pitchFamily="49" charset="0"/>
+                        <a:cs typeface="Consolas" panose="020B0609020204030204" pitchFamily="49" charset="0"/>
+                      </a:endParaRPr>
+                    </a:p>
+                  </a:txBody>
+                  <a:tcPr/>
+                </a:tc>
+                <a:tc>
+                  <a:txBody>
+                    <a:bodyPr/>
+                    <a:lstStyle/>
+                    <a:p>
+                      <a:pPr marL="342900" indent="-342900">
+                        <a:buAutoNum type="arabicPeriod"/>
+                      </a:pPr>
+                      <a:r>
+                        <a:rPr lang="en-US" dirty="0"/>
+                        <a:t>There is a time frame when another process can open</a:t>
+                      </a:r>
+                      <a:r>
+                        <a:rPr lang="ru-RU" dirty="0"/>
+                        <a:t> </a:t>
+                      </a:r>
+                      <a:r>
+                        <a:rPr lang="en-US" dirty="0">
+                          <a:latin typeface="Consolas" panose="020B0609020204030204" pitchFamily="49" charset="0"/>
+                          <a:cs typeface="Consolas" panose="020B0609020204030204" pitchFamily="49" charset="0"/>
+                        </a:rPr>
+                        <a:t>/</a:t>
+                      </a:r>
+                      <a:r>
+                        <a:rPr lang="en-US" dirty="0" err="1">
+                          <a:latin typeface="Consolas" panose="020B0609020204030204" pitchFamily="49" charset="0"/>
+                          <a:cs typeface="Consolas" panose="020B0609020204030204" pitchFamily="49" charset="0"/>
+                        </a:rPr>
+                        <a:t>tmp</a:t>
+                      </a:r>
+                      <a:r>
+                        <a:rPr lang="en-US" dirty="0">
+                          <a:latin typeface="Consolas" panose="020B0609020204030204" pitchFamily="49" charset="0"/>
+                          <a:cs typeface="Consolas" panose="020B0609020204030204" pitchFamily="49" charset="0"/>
+                        </a:rPr>
+                        <a:t>/tmp.1b42ac00de</a:t>
+                      </a:r>
+                      <a:r>
+                        <a:rPr lang="ru-RU" dirty="0"/>
+                        <a:t> </a:t>
+                      </a:r>
+                      <a:r>
+                        <a:rPr lang="en-US" dirty="0"/>
+                        <a:t>by name. Such process will be able steal the data from the temp file</a:t>
+                      </a:r>
+                      <a:r>
+                        <a:rPr lang="ru-RU" dirty="0"/>
+                        <a:t>.</a:t>
+                      </a:r>
+                      <a:endParaRPr lang="en-US" dirty="0"/>
+                    </a:p>
+                    <a:p>
+                      <a:pPr marL="342900" indent="-342900">
+                        <a:buAutoNum type="arabicPeriod"/>
+                      </a:pPr>
+                      <a:endParaRPr lang="en-US" dirty="0"/>
+                    </a:p>
+                    <a:p>
+                      <a:pPr marL="342900" indent="-342900">
+                        <a:buAutoNum type="arabicPeriod"/>
+                      </a:pPr>
+                      <a:r>
+                        <a:rPr lang="en-US" dirty="0"/>
+                        <a:t>Another process can change the </a:t>
+                      </a:r>
+                      <a:r>
+                        <a:rPr lang="en-US" dirty="0" err="1"/>
+                        <a:t>symlink</a:t>
+                      </a:r>
+                      <a:r>
+                        <a:rPr lang="en-US" dirty="0"/>
+                        <a:t> value between the calls to </a:t>
+                      </a:r>
+                      <a:r>
+                        <a:rPr lang="en-US" dirty="0" err="1">
+                          <a:latin typeface="Consolas" panose="020B0609020204030204" pitchFamily="49" charset="0"/>
+                          <a:cs typeface="Consolas" panose="020B0609020204030204" pitchFamily="49" charset="0"/>
+                        </a:rPr>
+                        <a:t>lstat</a:t>
+                      </a:r>
+                      <a:r>
+                        <a:rPr lang="en-US" dirty="0">
+                          <a:latin typeface="Consolas" panose="020B0609020204030204" pitchFamily="49" charset="0"/>
+                          <a:cs typeface="Consolas" panose="020B0609020204030204" pitchFamily="49" charset="0"/>
+                        </a:rPr>
+                        <a:t>()</a:t>
+                      </a:r>
+                      <a:r>
+                        <a:rPr lang="ru-RU" dirty="0"/>
+                        <a:t> </a:t>
+                      </a:r>
+                      <a:r>
+                        <a:rPr lang="en-US" dirty="0"/>
+                        <a:t>and</a:t>
+                      </a:r>
+                      <a:r>
+                        <a:rPr lang="ru-RU" dirty="0"/>
+                        <a:t> </a:t>
+                      </a:r>
+                      <a:r>
+                        <a:rPr lang="en-US" dirty="0" err="1">
+                          <a:latin typeface="Consolas" panose="020B0609020204030204" pitchFamily="49" charset="0"/>
+                          <a:cs typeface="Consolas" panose="020B0609020204030204" pitchFamily="49" charset="0"/>
+                        </a:rPr>
+                        <a:t>readlink</a:t>
+                      </a:r>
+                      <a:r>
+                        <a:rPr lang="en-US" dirty="0">
+                          <a:latin typeface="Consolas" panose="020B0609020204030204" pitchFamily="49" charset="0"/>
+                          <a:cs typeface="Consolas" panose="020B0609020204030204" pitchFamily="49" charset="0"/>
+                        </a:rPr>
+                        <a:t>()</a:t>
+                      </a:r>
+                      <a:r>
+                        <a:rPr lang="en-US" dirty="0"/>
+                        <a:t>. See TOCTTOU (time of check to time of use).</a:t>
+                      </a:r>
+                    </a:p>
+                    <a:p>
+                      <a:pPr marL="342900" indent="-342900">
+                        <a:buAutoNum type="arabicPeriod"/>
+                      </a:pPr>
+                      <a:endParaRPr lang="en-US" dirty="0"/>
+                    </a:p>
+                    <a:p>
+                      <a:pPr marL="342900" indent="-342900">
+                        <a:buAutoNum type="arabicPeriod"/>
+                      </a:pPr>
+                      <a:endParaRPr lang="en-US" dirty="0"/>
+                    </a:p>
+                    <a:p>
+                      <a:pPr marL="342900" indent="-342900">
+                        <a:buAutoNum type="arabicPeriod"/>
+                      </a:pPr>
+                      <a:endParaRPr lang="en-US" dirty="0"/>
+                    </a:p>
+                    <a:p>
+                      <a:pPr marL="342900" indent="-342900">
+                        <a:buAutoNum type="arabicPeriod"/>
+                      </a:pPr>
+                      <a:r>
+                        <a:rPr lang="en-US" dirty="0"/>
+                        <a:t>In the time frame between two </a:t>
+                      </a:r>
+                      <a:r>
+                        <a:rPr lang="en-US" dirty="0">
+                          <a:latin typeface="Consolas" panose="020B0609020204030204" pitchFamily="49" charset="0"/>
+                          <a:cs typeface="Consolas" panose="020B0609020204030204" pitchFamily="49" charset="0"/>
+                        </a:rPr>
+                        <a:t>open()</a:t>
+                      </a:r>
+                      <a:r>
+                        <a:rPr lang="en-US" dirty="0"/>
+                        <a:t>s another process can rename </a:t>
+                      </a:r>
+                      <a:r>
+                        <a:rPr lang="en-US" dirty="0">
+                          <a:latin typeface="Consolas" panose="020B0609020204030204" pitchFamily="49" charset="0"/>
+                          <a:cs typeface="Consolas" panose="020B0609020204030204" pitchFamily="49" charset="0"/>
+                        </a:rPr>
+                        <a:t>/</a:t>
+                      </a:r>
+                      <a:r>
+                        <a:rPr lang="en-US" dirty="0" err="1">
+                          <a:latin typeface="Consolas" panose="020B0609020204030204" pitchFamily="49" charset="0"/>
+                          <a:cs typeface="Consolas" panose="020B0609020204030204" pitchFamily="49" charset="0"/>
+                        </a:rPr>
+                        <a:t>dir</a:t>
+                      </a:r>
+                      <a:r>
+                        <a:rPr lang="en-US" dirty="0"/>
+                        <a:t> and then create a different directory with the same name.</a:t>
+                      </a:r>
+                    </a:p>
+                  </a:txBody>
+                  <a:tcPr/>
+                </a:tc>
+                <a:extLst>
+                  <a:ext uri="{0D108BD9-81ED-4DB2-BD59-A6C34878D82A}">
+                    <a16:rowId xmlns:a16="http://schemas.microsoft.com/office/drawing/2014/main" val="1501800952"/>
+                  </a:ext>
+                </a:extLst>
+              </a:tr>
+            </a:tbl>
+          </a:graphicData>
+        </a:graphic>
+      </p:graphicFrame>
+    </p:spTree>
+    <p:extLst>
+      <p:ext uri="{BB962C8B-B14F-4D97-AF65-F5344CB8AC3E}">
+        <p14:creationId xmlns:p14="http://schemas.microsoft.com/office/powerpoint/2010/main" val="2494625810"/>
+      </p:ext>
+    </p:extLst>
+  </p:cSld>
+  <p:clrMapOvr>
+    <a:masterClrMapping/>
+  </p:clrMapOvr>
+</p:sld>
+</file>
+
+<file path=ppt/slides/slide24.xml><?xml version="1.0" encoding="utf-8"?>
+<p:sld xmlns:a="http://schemas.openxmlformats.org/drawingml/2006/main" xmlns:r="http://schemas.openxmlformats.org/officeDocument/2006/relationships" xmlns:p="http://schemas.openxmlformats.org/presentationml/2006/main">
+  <p:cSld>
+    <p:spTree>
+      <p:nvGrpSpPr>
+        <p:cNvPr id="1" name=""/>
+        <p:cNvGrpSpPr/>
+        <p:nvPr/>
+      </p:nvGrpSpPr>
+      <p:grpSpPr>
+        <a:xfrm>
+          <a:off x="0" y="0"/>
+          <a:ext cx="0" cy="0"/>
+          <a:chOff x="0" y="0"/>
+          <a:chExt cx="0" cy="0"/>
+        </a:xfrm>
+      </p:grpSpPr>
+      <p:graphicFrame>
+        <p:nvGraphicFramePr>
+          <p:cNvPr id="5" name="Table 4"/>
+          <p:cNvGraphicFramePr>
+            <a:graphicFrameLocks noGrp="1"/>
+          </p:cNvGraphicFramePr>
+          <p:nvPr/>
+        </p:nvGraphicFramePr>
+        <p:xfrm>
+          <a:off x="0" y="1"/>
+          <a:ext cx="12192000" cy="365760"/>
+        </p:xfrm>
+        <a:graphic>
+          <a:graphicData uri="http://schemas.openxmlformats.org/drawingml/2006/table">
+            <a:tbl>
+              <a:tblPr firstRow="1" bandRow="1">
+                <a:tableStyleId>{5C22544A-7EE6-4342-B048-85BDC9FD1C3A}</a:tableStyleId>
+              </a:tblPr>
+              <a:tblGrid>
+                <a:gridCol w="12192000">
+                  <a:extLst>
+                    <a:ext uri="{9D8B030D-6E8A-4147-A177-3AD203B41FA5}">
+                      <a16:colId xmlns:a16="http://schemas.microsoft.com/office/drawing/2014/main" val="20000"/>
+                    </a:ext>
+                  </a:extLst>
+                </a:gridCol>
+              </a:tblGrid>
+              <a:tr h="321276">
+                <a:tc>
+                  <a:txBody>
+                    <a:bodyPr/>
+                    <a:lstStyle/>
+                    <a:p>
+                      <a:r>
+                        <a:rPr lang="en-US" sz="1800" dirty="0"/>
+                        <a:t>The POSIX file system semantics</a:t>
+                      </a:r>
+                      <a:endParaRPr lang="ru-RU" sz="1800" dirty="0"/>
+                    </a:p>
+                  </a:txBody>
+                  <a:tcPr/>
+                </a:tc>
+                <a:extLst>
+                  <a:ext uri="{0D108BD9-81ED-4DB2-BD59-A6C34878D82A}">
+                    <a16:rowId xmlns:a16="http://schemas.microsoft.com/office/drawing/2014/main" val="10000"/>
+                  </a:ext>
+                </a:extLst>
+              </a:tr>
+            </a:tbl>
+          </a:graphicData>
+        </a:graphic>
+      </p:graphicFrame>
+      <p:graphicFrame>
+        <p:nvGraphicFramePr>
+          <p:cNvPr id="6" name="Table 5"/>
+          <p:cNvGraphicFramePr>
+            <a:graphicFrameLocks noGrp="1"/>
+          </p:cNvGraphicFramePr>
+          <p:nvPr/>
+        </p:nvGraphicFramePr>
+        <p:xfrm>
+          <a:off x="0" y="6532604"/>
+          <a:ext cx="12192000" cy="365760"/>
+        </p:xfrm>
+        <a:graphic>
+          <a:graphicData uri="http://schemas.openxmlformats.org/drawingml/2006/table">
+            <a:tbl>
+              <a:tblPr firstRow="1" bandRow="1">
+                <a:tableStyleId>{5C22544A-7EE6-4342-B048-85BDC9FD1C3A}</a:tableStyleId>
+              </a:tblPr>
+              <a:tblGrid>
+                <a:gridCol w="12192000">
+                  <a:extLst>
+                    <a:ext uri="{9D8B030D-6E8A-4147-A177-3AD203B41FA5}">
+                      <a16:colId xmlns:a16="http://schemas.microsoft.com/office/drawing/2014/main" val="20000"/>
+                    </a:ext>
+                  </a:extLst>
+                </a:gridCol>
+              </a:tblGrid>
+              <a:tr h="308094">
+                <a:tc>
+                  <a:txBody>
+                    <a:bodyPr/>
+                    <a:lstStyle/>
+                    <a:p>
+                      <a:endParaRPr lang="ru-RU" dirty="0"/>
+                    </a:p>
+                  </a:txBody>
+                  <a:tcPr/>
+                </a:tc>
+                <a:extLst>
+                  <a:ext uri="{0D108BD9-81ED-4DB2-BD59-A6C34878D82A}">
+                    <a16:rowId xmlns:a16="http://schemas.microsoft.com/office/drawing/2014/main" val="10000"/>
+                  </a:ext>
+                </a:extLst>
+              </a:tr>
+            </a:tbl>
+          </a:graphicData>
+        </a:graphic>
+      </p:graphicFrame>
+      <p:graphicFrame>
+        <p:nvGraphicFramePr>
+          <p:cNvPr id="2" name="Table 1"/>
+          <p:cNvGraphicFramePr>
+            <a:graphicFrameLocks noGrp="1"/>
+          </p:cNvGraphicFramePr>
+          <p:nvPr>
+            <p:extLst>
+              <p:ext uri="{D42A27DB-BD31-4B8C-83A1-F6EECF244321}">
                 <p14:modId xmlns:p14="http://schemas.microsoft.com/office/powerpoint/2010/main" val="3891556230"/>
               </p:ext>
             </p:extLst>
@@ -16502,7 +18894,7 @@
 </p:sld>
 </file>
 
-<file path=ppt/slides/slide23.xml><?xml version="1.0" encoding="utf-8"?>
+<file path=ppt/slides/slide25.xml><?xml version="1.0" encoding="utf-8"?>
 <p:sld xmlns:a="http://schemas.openxmlformats.org/drawingml/2006/main" xmlns:r="http://schemas.openxmlformats.org/officeDocument/2006/relationships" xmlns:p="http://schemas.openxmlformats.org/presentationml/2006/main">
   <p:cSld>
     <p:spTree>
@@ -16834,900 +19226,6 @@
 </p:sld>
 </file>
 
-<file path=ppt/slides/slide24.xml><?xml version="1.0" encoding="utf-8"?>
-<p:sld xmlns:a="http://schemas.openxmlformats.org/drawingml/2006/main" xmlns:r="http://schemas.openxmlformats.org/officeDocument/2006/relationships" xmlns:p="http://schemas.openxmlformats.org/presentationml/2006/main">
-  <p:cSld>
-    <p:spTree>
-      <p:nvGrpSpPr>
-        <p:cNvPr id="1" name=""/>
-        <p:cNvGrpSpPr/>
-        <p:nvPr/>
-      </p:nvGrpSpPr>
-      <p:grpSpPr>
-        <a:xfrm>
-          <a:off x="0" y="0"/>
-          <a:ext cx="0" cy="0"/>
-          <a:chOff x="0" y="0"/>
-          <a:chExt cx="0" cy="0"/>
-        </a:xfrm>
-      </p:grpSpPr>
-      <p:graphicFrame>
-        <p:nvGraphicFramePr>
-          <p:cNvPr id="5" name="Table 4"/>
-          <p:cNvGraphicFramePr>
-            <a:graphicFrameLocks noGrp="1"/>
-          </p:cNvGraphicFramePr>
-          <p:nvPr/>
-        </p:nvGraphicFramePr>
-        <p:xfrm>
-          <a:off x="0" y="1"/>
-          <a:ext cx="12192000" cy="365760"/>
-        </p:xfrm>
-        <a:graphic>
-          <a:graphicData uri="http://schemas.openxmlformats.org/drawingml/2006/table">
-            <a:tbl>
-              <a:tblPr firstRow="1" bandRow="1">
-                <a:tableStyleId>{5C22544A-7EE6-4342-B048-85BDC9FD1C3A}</a:tableStyleId>
-              </a:tblPr>
-              <a:tblGrid>
-                <a:gridCol w="12192000">
-                  <a:extLst>
-                    <a:ext uri="{9D8B030D-6E8A-4147-A177-3AD203B41FA5}">
-                      <a16:colId xmlns:a16="http://schemas.microsoft.com/office/drawing/2014/main" val="20000"/>
-                    </a:ext>
-                  </a:extLst>
-                </a:gridCol>
-              </a:tblGrid>
-              <a:tr h="321276">
-                <a:tc>
-                  <a:txBody>
-                    <a:bodyPr/>
-                    <a:lstStyle/>
-                    <a:p>
-                      <a:r>
-                        <a:rPr lang="en-US" sz="1800" dirty="0"/>
-                        <a:t>The POSIX file system semantics</a:t>
-                      </a:r>
-                      <a:endParaRPr lang="ru-RU" sz="1800" dirty="0"/>
-                    </a:p>
-                  </a:txBody>
-                  <a:tcPr/>
-                </a:tc>
-                <a:extLst>
-                  <a:ext uri="{0D108BD9-81ED-4DB2-BD59-A6C34878D82A}">
-                    <a16:rowId xmlns:a16="http://schemas.microsoft.com/office/drawing/2014/main" val="10000"/>
-                  </a:ext>
-                </a:extLst>
-              </a:tr>
-            </a:tbl>
-          </a:graphicData>
-        </a:graphic>
-      </p:graphicFrame>
-      <p:graphicFrame>
-        <p:nvGraphicFramePr>
-          <p:cNvPr id="6" name="Table 5"/>
-          <p:cNvGraphicFramePr>
-            <a:graphicFrameLocks noGrp="1"/>
-          </p:cNvGraphicFramePr>
-          <p:nvPr/>
-        </p:nvGraphicFramePr>
-        <p:xfrm>
-          <a:off x="0" y="6532604"/>
-          <a:ext cx="12192000" cy="365760"/>
-        </p:xfrm>
-        <a:graphic>
-          <a:graphicData uri="http://schemas.openxmlformats.org/drawingml/2006/table">
-            <a:tbl>
-              <a:tblPr firstRow="1" bandRow="1">
-                <a:tableStyleId>{5C22544A-7EE6-4342-B048-85BDC9FD1C3A}</a:tableStyleId>
-              </a:tblPr>
-              <a:tblGrid>
-                <a:gridCol w="12192000">
-                  <a:extLst>
-                    <a:ext uri="{9D8B030D-6E8A-4147-A177-3AD203B41FA5}">
-                      <a16:colId xmlns:a16="http://schemas.microsoft.com/office/drawing/2014/main" val="20000"/>
-                    </a:ext>
-                  </a:extLst>
-                </a:gridCol>
-              </a:tblGrid>
-              <a:tr h="308094">
-                <a:tc>
-                  <a:txBody>
-                    <a:bodyPr/>
-                    <a:lstStyle/>
-                    <a:p>
-                      <a:endParaRPr lang="ru-RU" dirty="0"/>
-                    </a:p>
-                  </a:txBody>
-                  <a:tcPr/>
-                </a:tc>
-                <a:extLst>
-                  <a:ext uri="{0D108BD9-81ED-4DB2-BD59-A6C34878D82A}">
-                    <a16:rowId xmlns:a16="http://schemas.microsoft.com/office/drawing/2014/main" val="10000"/>
-                  </a:ext>
-                </a:extLst>
-              </a:tr>
-            </a:tbl>
-          </a:graphicData>
-        </a:graphic>
-      </p:graphicFrame>
-      <p:graphicFrame>
-        <p:nvGraphicFramePr>
-          <p:cNvPr id="2" name="Table 1"/>
-          <p:cNvGraphicFramePr>
-            <a:graphicFrameLocks noGrp="1"/>
-          </p:cNvGraphicFramePr>
-          <p:nvPr>
-            <p:extLst>
-              <p:ext uri="{D42A27DB-BD31-4B8C-83A1-F6EECF244321}">
-                <p14:modId xmlns:p14="http://schemas.microsoft.com/office/powerpoint/2010/main" val="118317154"/>
-              </p:ext>
-            </p:extLst>
-          </p:nvPr>
-        </p:nvGraphicFramePr>
-        <p:xfrm>
-          <a:off x="0" y="342613"/>
-          <a:ext cx="12192000" cy="3085935"/>
-        </p:xfrm>
-        <a:graphic>
-          <a:graphicData uri="http://schemas.openxmlformats.org/drawingml/2006/table">
-            <a:tbl>
-              <a:tblPr firstRow="1" bandRow="1">
-                <a:tableStyleId>{3B4B98B0-60AC-42C2-AFA5-B58CD77FA1E5}</a:tableStyleId>
-              </a:tblPr>
-              <a:tblGrid>
-                <a:gridCol w="6096000">
-                  <a:extLst>
-                    <a:ext uri="{9D8B030D-6E8A-4147-A177-3AD203B41FA5}">
-                      <a16:colId xmlns:a16="http://schemas.microsoft.com/office/drawing/2014/main" val="20000"/>
-                    </a:ext>
-                  </a:extLst>
-                </a:gridCol>
-                <a:gridCol w="6096000">
-                  <a:extLst>
-                    <a:ext uri="{9D8B030D-6E8A-4147-A177-3AD203B41FA5}">
-                      <a16:colId xmlns:a16="http://schemas.microsoft.com/office/drawing/2014/main" val="3688292786"/>
-                    </a:ext>
-                  </a:extLst>
-                </a:gridCol>
-              </a:tblGrid>
-              <a:tr h="434175">
-                <a:tc>
-                  <a:txBody>
-                    <a:bodyPr/>
-                    <a:lstStyle/>
-                    <a:p>
-                      <a:r>
-                        <a:rPr lang="en-US" dirty="0"/>
-                        <a:t>A file system is a shared resource: concurrent access and races</a:t>
-                      </a:r>
-                      <a:endParaRPr lang="ru-RU" dirty="0"/>
-                    </a:p>
-                  </a:txBody>
-                  <a:tcPr/>
-                </a:tc>
-                <a:tc>
-                  <a:txBody>
-                    <a:bodyPr/>
-                    <a:lstStyle/>
-                    <a:p>
-                      <a:endParaRPr lang="ru-RU" dirty="0"/>
-                    </a:p>
-                  </a:txBody>
-                  <a:tcPr/>
-                </a:tc>
-                <a:extLst>
-                  <a:ext uri="{0D108BD9-81ED-4DB2-BD59-A6C34878D82A}">
-                    <a16:rowId xmlns:a16="http://schemas.microsoft.com/office/drawing/2014/main" val="10000"/>
-                  </a:ext>
-                </a:extLst>
-              </a:tr>
-              <a:tr h="434175">
-                <a:tc gridSpan="2">
-                  <a:txBody>
-                    <a:bodyPr/>
-                    <a:lstStyle/>
-                    <a:p>
-                      <a:r>
-                        <a:rPr lang="en-US" dirty="0"/>
-                        <a:t>One of the solutions: run applications in containers:</a:t>
-                      </a:r>
-                      <a:endParaRPr lang="ru-RU" dirty="0"/>
-                    </a:p>
-                    <a:p>
-                      <a:pPr marL="285750" indent="-285750">
-                        <a:buFont typeface="Arial" panose="020B0604020202020204" pitchFamily="34" charset="0"/>
-                        <a:buChar char="•"/>
-                      </a:pPr>
-                      <a:r>
-                        <a:rPr lang="en-US" dirty="0"/>
-                        <a:t>If processes A and B each have their ”private” </a:t>
-                      </a:r>
-                      <a:r>
-                        <a:rPr lang="en-US" dirty="0">
-                          <a:latin typeface="Consolas" panose="020B0609020204030204" pitchFamily="49" charset="0"/>
-                          <a:cs typeface="Consolas" panose="020B0609020204030204" pitchFamily="49" charset="0"/>
-                        </a:rPr>
-                        <a:t>/</a:t>
-                      </a:r>
-                      <a:r>
-                        <a:rPr lang="en-US" dirty="0" err="1">
-                          <a:latin typeface="Consolas" panose="020B0609020204030204" pitchFamily="49" charset="0"/>
-                          <a:cs typeface="Consolas" panose="020B0609020204030204" pitchFamily="49" charset="0"/>
-                        </a:rPr>
-                        <a:t>tmp</a:t>
-                      </a:r>
-                      <a:r>
-                        <a:rPr lang="en-US" dirty="0"/>
-                        <a:t> directory, then they cannot access files of each other by construction</a:t>
-                      </a:r>
-                      <a:r>
-                        <a:rPr lang="ru-RU" dirty="0"/>
-                        <a:t>.</a:t>
-                      </a:r>
-                      <a:endParaRPr lang="en-US" dirty="0"/>
-                    </a:p>
-                    <a:p>
-                      <a:pPr marL="285750" indent="-285750">
-                        <a:buFont typeface="Arial" panose="020B0604020202020204" pitchFamily="34" charset="0"/>
-                        <a:buChar char="•"/>
-                      </a:pPr>
-                      <a:r>
-                        <a:rPr lang="en-US" dirty="0"/>
-                        <a:t>Linux has</a:t>
-                      </a:r>
-                      <a:r>
-                        <a:rPr lang="ru-RU" dirty="0"/>
-                        <a:t> </a:t>
-                      </a:r>
-                      <a:r>
-                        <a:rPr lang="en-US" dirty="0"/>
-                        <a:t>“</a:t>
-                      </a:r>
-                      <a:r>
-                        <a:rPr lang="en-US" b="1" dirty="0"/>
-                        <a:t>filesystem namespaces</a:t>
-                      </a:r>
-                      <a:r>
-                        <a:rPr lang="en-US" dirty="0"/>
-                        <a:t>” which are collections of mount points. Mount points of a FS namespace are visible only to processes that run in that specific FS namespace.</a:t>
-                      </a:r>
-                    </a:p>
-                    <a:p>
-                      <a:pPr marL="285750" indent="-285750">
-                        <a:buFont typeface="Arial" panose="020B0604020202020204" pitchFamily="34" charset="0"/>
-                        <a:buChar char="•"/>
-                      </a:pPr>
-                      <a:r>
-                        <a:rPr lang="en-US" dirty="0"/>
-                        <a:t>In two different FS namespaces the path </a:t>
-                      </a:r>
-                      <a:r>
-                        <a:rPr lang="en-US" dirty="0">
-                          <a:latin typeface="Consolas" panose="020B0609020204030204" pitchFamily="49" charset="0"/>
-                          <a:cs typeface="Consolas" panose="020B0609020204030204" pitchFamily="49" charset="0"/>
-                        </a:rPr>
-                        <a:t>/</a:t>
-                      </a:r>
-                      <a:r>
-                        <a:rPr lang="en-US" dirty="0" err="1">
-                          <a:latin typeface="Consolas" panose="020B0609020204030204" pitchFamily="49" charset="0"/>
-                          <a:cs typeface="Consolas" panose="020B0609020204030204" pitchFamily="49" charset="0"/>
-                        </a:rPr>
-                        <a:t>tmp</a:t>
-                      </a:r>
-                      <a:r>
-                        <a:rPr lang="en-US" dirty="0"/>
-                        <a:t> may refer to two different </a:t>
-                      </a:r>
-                      <a:r>
-                        <a:rPr lang="en-US" dirty="0" err="1"/>
-                        <a:t>tmpfs</a:t>
-                      </a:r>
-                      <a:r>
-                        <a:rPr lang="en-US" dirty="0"/>
-                        <a:t> instances.</a:t>
-                      </a:r>
-                      <a:endParaRPr lang="ru-RU" dirty="0"/>
-                    </a:p>
-                  </a:txBody>
-                  <a:tcPr/>
-                </a:tc>
-                <a:tc hMerge="1">
-                  <a:txBody>
-                    <a:bodyPr/>
-                    <a:lstStyle/>
-                    <a:p>
-                      <a:endParaRPr lang="ru-RU" dirty="0"/>
-                    </a:p>
-                  </a:txBody>
-                  <a:tcPr/>
-                </a:tc>
-                <a:extLst>
-                  <a:ext uri="{0D108BD9-81ED-4DB2-BD59-A6C34878D82A}">
-                    <a16:rowId xmlns:a16="http://schemas.microsoft.com/office/drawing/2014/main" val="3908480295"/>
-                  </a:ext>
-                </a:extLst>
-              </a:tr>
-              <a:tr h="434175">
-                <a:tc gridSpan="2">
-                  <a:txBody>
-                    <a:bodyPr/>
-                    <a:lstStyle/>
-                    <a:p>
-                      <a:pPr marL="0" indent="0">
-                        <a:buFont typeface="Arial" panose="020B0604020202020204" pitchFamily="34" charset="0"/>
-                        <a:buNone/>
-                      </a:pPr>
-                      <a:r>
-                        <a:rPr lang="en-US" dirty="0"/>
-                        <a:t>See also:</a:t>
-                      </a:r>
-                    </a:p>
-                    <a:p>
-                      <a:pPr marL="285750" indent="-285750">
-                        <a:buFont typeface="Arial" panose="020B0604020202020204" pitchFamily="34" charset="0"/>
-                        <a:buChar char="•"/>
-                      </a:pPr>
-                      <a:r>
-                        <a:rPr lang="en-US" dirty="0" err="1"/>
-                        <a:t>Pid</a:t>
-                      </a:r>
-                      <a:r>
-                        <a:rPr lang="en-US" dirty="0"/>
-                        <a:t> namespaces,</a:t>
-                      </a:r>
-                    </a:p>
-                    <a:p>
-                      <a:pPr marL="285750" indent="-285750">
-                        <a:buFont typeface="Arial" panose="020B0604020202020204" pitchFamily="34" charset="0"/>
-                        <a:buChar char="•"/>
-                      </a:pPr>
-                      <a:r>
-                        <a:rPr lang="en-US" dirty="0"/>
-                        <a:t>Network namespaces,</a:t>
-                      </a:r>
-                    </a:p>
-                    <a:p>
-                      <a:pPr marL="285750" marR="0" lvl="0" indent="-285750" algn="l" defTabSz="914400" rtl="0" eaLnBrk="1" fontAlgn="auto" latinLnBrk="0" hangingPunct="1">
-                        <a:lnSpc>
-                          <a:spcPct val="100000"/>
-                        </a:lnSpc>
-                        <a:spcBef>
-                          <a:spcPts val="0"/>
-                        </a:spcBef>
-                        <a:spcAft>
-                          <a:spcPts val="0"/>
-                        </a:spcAft>
-                        <a:buClrTx/>
-                        <a:buSzTx/>
-                        <a:buFont typeface="Arial" panose="020B0604020202020204" pitchFamily="34" charset="0"/>
-                        <a:buChar char="•"/>
-                        <a:tabLst/>
-                        <a:defRPr/>
-                      </a:pPr>
-                      <a:r>
-                        <a:rPr lang="en-US" dirty="0"/>
-                        <a:t>User namespaces.</a:t>
-                      </a:r>
-                    </a:p>
-                  </a:txBody>
-                  <a:tcPr/>
-                </a:tc>
-                <a:tc hMerge="1">
-                  <a:txBody>
-                    <a:bodyPr/>
-                    <a:lstStyle/>
-                    <a:p>
-                      <a:endParaRPr lang="en-CY"/>
-                    </a:p>
-                  </a:txBody>
-                  <a:tcPr/>
-                </a:tc>
-                <a:extLst>
-                  <a:ext uri="{0D108BD9-81ED-4DB2-BD59-A6C34878D82A}">
-                    <a16:rowId xmlns:a16="http://schemas.microsoft.com/office/drawing/2014/main" val="3226834803"/>
-                  </a:ext>
-                </a:extLst>
-              </a:tr>
-            </a:tbl>
-          </a:graphicData>
-        </a:graphic>
-      </p:graphicFrame>
-    </p:spTree>
-    <p:extLst>
-      <p:ext uri="{BB962C8B-B14F-4D97-AF65-F5344CB8AC3E}">
-        <p14:creationId xmlns:p14="http://schemas.microsoft.com/office/powerpoint/2010/main" val="33160589"/>
-      </p:ext>
-    </p:extLst>
-  </p:cSld>
-  <p:clrMapOvr>
-    <a:masterClrMapping/>
-  </p:clrMapOvr>
-</p:sld>
-</file>
-
-<file path=ppt/slides/slide25.xml><?xml version="1.0" encoding="utf-8"?>
-<p:sld xmlns:a="http://schemas.openxmlformats.org/drawingml/2006/main" xmlns:r="http://schemas.openxmlformats.org/officeDocument/2006/relationships" xmlns:p="http://schemas.openxmlformats.org/presentationml/2006/main">
-  <p:cSld>
-    <p:spTree>
-      <p:nvGrpSpPr>
-        <p:cNvPr id="1" name=""/>
-        <p:cNvGrpSpPr/>
-        <p:nvPr/>
-      </p:nvGrpSpPr>
-      <p:grpSpPr>
-        <a:xfrm>
-          <a:off x="0" y="0"/>
-          <a:ext cx="0" cy="0"/>
-          <a:chOff x="0" y="0"/>
-          <a:chExt cx="0" cy="0"/>
-        </a:xfrm>
-      </p:grpSpPr>
-      <p:graphicFrame>
-        <p:nvGraphicFramePr>
-          <p:cNvPr id="5" name="Table 4"/>
-          <p:cNvGraphicFramePr>
-            <a:graphicFrameLocks noGrp="1"/>
-          </p:cNvGraphicFramePr>
-          <p:nvPr/>
-        </p:nvGraphicFramePr>
-        <p:xfrm>
-          <a:off x="0" y="1"/>
-          <a:ext cx="12192000" cy="365760"/>
-        </p:xfrm>
-        <a:graphic>
-          <a:graphicData uri="http://schemas.openxmlformats.org/drawingml/2006/table">
-            <a:tbl>
-              <a:tblPr firstRow="1" bandRow="1">
-                <a:tableStyleId>{5C22544A-7EE6-4342-B048-85BDC9FD1C3A}</a:tableStyleId>
-              </a:tblPr>
-              <a:tblGrid>
-                <a:gridCol w="12192000">
-                  <a:extLst>
-                    <a:ext uri="{9D8B030D-6E8A-4147-A177-3AD203B41FA5}">
-                      <a16:colId xmlns:a16="http://schemas.microsoft.com/office/drawing/2014/main" val="20000"/>
-                    </a:ext>
-                  </a:extLst>
-                </a:gridCol>
-              </a:tblGrid>
-              <a:tr h="321276">
-                <a:tc>
-                  <a:txBody>
-                    <a:bodyPr/>
-                    <a:lstStyle/>
-                    <a:p>
-                      <a:r>
-                        <a:rPr lang="en-US" sz="1800" dirty="0"/>
-                        <a:t>The POSIX file system semantics</a:t>
-                      </a:r>
-                      <a:endParaRPr lang="ru-RU" sz="1800" dirty="0"/>
-                    </a:p>
-                  </a:txBody>
-                  <a:tcPr/>
-                </a:tc>
-                <a:extLst>
-                  <a:ext uri="{0D108BD9-81ED-4DB2-BD59-A6C34878D82A}">
-                    <a16:rowId xmlns:a16="http://schemas.microsoft.com/office/drawing/2014/main" val="10000"/>
-                  </a:ext>
-                </a:extLst>
-              </a:tr>
-            </a:tbl>
-          </a:graphicData>
-        </a:graphic>
-      </p:graphicFrame>
-      <p:graphicFrame>
-        <p:nvGraphicFramePr>
-          <p:cNvPr id="6" name="Table 5"/>
-          <p:cNvGraphicFramePr>
-            <a:graphicFrameLocks noGrp="1"/>
-          </p:cNvGraphicFramePr>
-          <p:nvPr/>
-        </p:nvGraphicFramePr>
-        <p:xfrm>
-          <a:off x="0" y="6532604"/>
-          <a:ext cx="12192000" cy="365760"/>
-        </p:xfrm>
-        <a:graphic>
-          <a:graphicData uri="http://schemas.openxmlformats.org/drawingml/2006/table">
-            <a:tbl>
-              <a:tblPr firstRow="1" bandRow="1">
-                <a:tableStyleId>{5C22544A-7EE6-4342-B048-85BDC9FD1C3A}</a:tableStyleId>
-              </a:tblPr>
-              <a:tblGrid>
-                <a:gridCol w="12192000">
-                  <a:extLst>
-                    <a:ext uri="{9D8B030D-6E8A-4147-A177-3AD203B41FA5}">
-                      <a16:colId xmlns:a16="http://schemas.microsoft.com/office/drawing/2014/main" val="20000"/>
-                    </a:ext>
-                  </a:extLst>
-                </a:gridCol>
-              </a:tblGrid>
-              <a:tr h="308094">
-                <a:tc>
-                  <a:txBody>
-                    <a:bodyPr/>
-                    <a:lstStyle/>
-                    <a:p>
-                      <a:endParaRPr lang="ru-RU" dirty="0"/>
-                    </a:p>
-                  </a:txBody>
-                  <a:tcPr/>
-                </a:tc>
-                <a:extLst>
-                  <a:ext uri="{0D108BD9-81ED-4DB2-BD59-A6C34878D82A}">
-                    <a16:rowId xmlns:a16="http://schemas.microsoft.com/office/drawing/2014/main" val="10000"/>
-                  </a:ext>
-                </a:extLst>
-              </a:tr>
-            </a:tbl>
-          </a:graphicData>
-        </a:graphic>
-      </p:graphicFrame>
-      <p:graphicFrame>
-        <p:nvGraphicFramePr>
-          <p:cNvPr id="2" name="Table 1"/>
-          <p:cNvGraphicFramePr>
-            <a:graphicFrameLocks noGrp="1"/>
-          </p:cNvGraphicFramePr>
-          <p:nvPr>
-            <p:extLst>
-              <p:ext uri="{D42A27DB-BD31-4B8C-83A1-F6EECF244321}">
-                <p14:modId xmlns:p14="http://schemas.microsoft.com/office/powerpoint/2010/main" val="1123637325"/>
-              </p:ext>
-            </p:extLst>
-          </p:nvPr>
-        </p:nvGraphicFramePr>
-        <p:xfrm>
-          <a:off x="0" y="342613"/>
-          <a:ext cx="12192000" cy="4183215"/>
-        </p:xfrm>
-        <a:graphic>
-          <a:graphicData uri="http://schemas.openxmlformats.org/drawingml/2006/table">
-            <a:tbl>
-              <a:tblPr firstRow="1" bandRow="1">
-                <a:tableStyleId>{3B4B98B0-60AC-42C2-AFA5-B58CD77FA1E5}</a:tableStyleId>
-              </a:tblPr>
-              <a:tblGrid>
-                <a:gridCol w="6096000">
-                  <a:extLst>
-                    <a:ext uri="{9D8B030D-6E8A-4147-A177-3AD203B41FA5}">
-                      <a16:colId xmlns:a16="http://schemas.microsoft.com/office/drawing/2014/main" val="20000"/>
-                    </a:ext>
-                  </a:extLst>
-                </a:gridCol>
-                <a:gridCol w="6096000">
-                  <a:extLst>
-                    <a:ext uri="{9D8B030D-6E8A-4147-A177-3AD203B41FA5}">
-                      <a16:colId xmlns:a16="http://schemas.microsoft.com/office/drawing/2014/main" val="3688292786"/>
-                    </a:ext>
-                  </a:extLst>
-                </a:gridCol>
-              </a:tblGrid>
-              <a:tr h="434175">
-                <a:tc>
-                  <a:txBody>
-                    <a:bodyPr/>
-                    <a:lstStyle/>
-                    <a:p>
-                      <a:r>
-                        <a:rPr lang="en-US" dirty="0"/>
-                        <a:t>A file system is a shared resource: concurrent access and races</a:t>
-                      </a:r>
-                      <a:endParaRPr lang="ru-RU" dirty="0"/>
-                    </a:p>
-                  </a:txBody>
-                  <a:tcPr/>
-                </a:tc>
-                <a:tc>
-                  <a:txBody>
-                    <a:bodyPr/>
-                    <a:lstStyle/>
-                    <a:p>
-                      <a:endParaRPr lang="ru-RU" dirty="0"/>
-                    </a:p>
-                  </a:txBody>
-                  <a:tcPr/>
-                </a:tc>
-                <a:extLst>
-                  <a:ext uri="{0D108BD9-81ED-4DB2-BD59-A6C34878D82A}">
-                    <a16:rowId xmlns:a16="http://schemas.microsoft.com/office/drawing/2014/main" val="10000"/>
-                  </a:ext>
-                </a:extLst>
-              </a:tr>
-              <a:tr h="434175">
-                <a:tc gridSpan="2">
-                  <a:txBody>
-                    <a:bodyPr/>
-                    <a:lstStyle/>
-                    <a:p>
-                      <a:r>
-                        <a:rPr lang="en-US" dirty="0"/>
-                        <a:t>One of the solutions: run applications in containers:</a:t>
-                      </a:r>
-                      <a:endParaRPr lang="ru-RU" dirty="0"/>
-                    </a:p>
-                    <a:p>
-                      <a:pPr marL="285750" indent="-285750">
-                        <a:buFont typeface="Arial" panose="020B0604020202020204" pitchFamily="34" charset="0"/>
-                        <a:buChar char="•"/>
-                      </a:pPr>
-                      <a:r>
-                        <a:rPr lang="en-US" dirty="0"/>
-                        <a:t>If processes A and B each have their ”private” </a:t>
-                      </a:r>
-                      <a:r>
-                        <a:rPr lang="en-US" dirty="0">
-                          <a:latin typeface="Consolas" panose="020B0609020204030204" pitchFamily="49" charset="0"/>
-                          <a:cs typeface="Consolas" panose="020B0609020204030204" pitchFamily="49" charset="0"/>
-                        </a:rPr>
-                        <a:t>/</a:t>
-                      </a:r>
-                      <a:r>
-                        <a:rPr lang="en-US" dirty="0" err="1">
-                          <a:latin typeface="Consolas" panose="020B0609020204030204" pitchFamily="49" charset="0"/>
-                          <a:cs typeface="Consolas" panose="020B0609020204030204" pitchFamily="49" charset="0"/>
-                        </a:rPr>
-                        <a:t>tmp</a:t>
-                      </a:r>
-                      <a:r>
-                        <a:rPr lang="en-US" dirty="0"/>
-                        <a:t> directory, then they cannot access files of each other by construction</a:t>
-                      </a:r>
-                      <a:r>
-                        <a:rPr lang="ru-RU" dirty="0"/>
-                        <a:t>.</a:t>
-                      </a:r>
-                      <a:endParaRPr lang="en-US" dirty="0"/>
-                    </a:p>
-                    <a:p>
-                      <a:pPr marL="285750" indent="-285750">
-                        <a:buFont typeface="Arial" panose="020B0604020202020204" pitchFamily="34" charset="0"/>
-                        <a:buChar char="•"/>
-                      </a:pPr>
-                      <a:r>
-                        <a:rPr lang="en-US" dirty="0"/>
-                        <a:t>Linux has</a:t>
-                      </a:r>
-                      <a:r>
-                        <a:rPr lang="ru-RU" dirty="0"/>
-                        <a:t> </a:t>
-                      </a:r>
-                      <a:r>
-                        <a:rPr lang="en-US" dirty="0"/>
-                        <a:t>“</a:t>
-                      </a:r>
-                      <a:r>
-                        <a:rPr lang="en-US" b="1" dirty="0"/>
-                        <a:t>filesystem namespaces</a:t>
-                      </a:r>
-                      <a:r>
-                        <a:rPr lang="en-US" dirty="0"/>
-                        <a:t>” which are collections of mount points. Mount points of a FS namespace are visible only to processes that run in that specific FS namespace.</a:t>
-                      </a:r>
-                    </a:p>
-                    <a:p>
-                      <a:pPr marL="285750" indent="-285750">
-                        <a:buFont typeface="Arial" panose="020B0604020202020204" pitchFamily="34" charset="0"/>
-                        <a:buChar char="•"/>
-                      </a:pPr>
-                      <a:r>
-                        <a:rPr lang="en-US" dirty="0"/>
-                        <a:t>In two different FS namespaces the path </a:t>
-                      </a:r>
-                      <a:r>
-                        <a:rPr lang="en-US" dirty="0">
-                          <a:latin typeface="Consolas" panose="020B0609020204030204" pitchFamily="49" charset="0"/>
-                          <a:cs typeface="Consolas" panose="020B0609020204030204" pitchFamily="49" charset="0"/>
-                        </a:rPr>
-                        <a:t>/</a:t>
-                      </a:r>
-                      <a:r>
-                        <a:rPr lang="en-US" dirty="0" err="1">
-                          <a:latin typeface="Consolas" panose="020B0609020204030204" pitchFamily="49" charset="0"/>
-                          <a:cs typeface="Consolas" panose="020B0609020204030204" pitchFamily="49" charset="0"/>
-                        </a:rPr>
-                        <a:t>tmp</a:t>
-                      </a:r>
-                      <a:r>
-                        <a:rPr lang="en-US" dirty="0"/>
-                        <a:t> may refer to two different </a:t>
-                      </a:r>
-                      <a:r>
-                        <a:rPr lang="en-US" dirty="0" err="1"/>
-                        <a:t>tmpfs</a:t>
-                      </a:r>
-                      <a:r>
-                        <a:rPr lang="en-US" dirty="0"/>
-                        <a:t> instances.</a:t>
-                      </a:r>
-                      <a:endParaRPr lang="ru-RU" dirty="0"/>
-                    </a:p>
-                  </a:txBody>
-                  <a:tcPr/>
-                </a:tc>
-                <a:tc hMerge="1">
-                  <a:txBody>
-                    <a:bodyPr/>
-                    <a:lstStyle/>
-                    <a:p>
-                      <a:endParaRPr lang="ru-RU" dirty="0"/>
-                    </a:p>
-                  </a:txBody>
-                  <a:tcPr/>
-                </a:tc>
-                <a:extLst>
-                  <a:ext uri="{0D108BD9-81ED-4DB2-BD59-A6C34878D82A}">
-                    <a16:rowId xmlns:a16="http://schemas.microsoft.com/office/drawing/2014/main" val="3908480295"/>
-                  </a:ext>
-                </a:extLst>
-              </a:tr>
-              <a:tr h="434175">
-                <a:tc>
-                  <a:txBody>
-                    <a:bodyPr/>
-                    <a:lstStyle/>
-                    <a:p>
-                      <a:pPr marL="0" indent="0">
-                        <a:buFont typeface="Arial" panose="020B0604020202020204" pitchFamily="34" charset="0"/>
-                        <a:buNone/>
-                      </a:pPr>
-                      <a:r>
-                        <a:rPr lang="en-US" dirty="0"/>
-                        <a:t>How to populate a FS namespace?</a:t>
-                      </a:r>
-                      <a:endParaRPr lang="ru-RU" dirty="0"/>
-                    </a:p>
-                    <a:p>
-                      <a:pPr marL="285750" indent="-285750">
-                        <a:buFont typeface="Arial" panose="020B0604020202020204" pitchFamily="34" charset="0"/>
-                        <a:buChar char="•"/>
-                      </a:pPr>
-                      <a:r>
-                        <a:rPr lang="en-US" dirty="0"/>
-                        <a:t>One can start with an empty directory that will become the root of the FS namespace</a:t>
-                      </a:r>
-                      <a:r>
-                        <a:rPr lang="ru-RU" dirty="0"/>
-                        <a:t>,</a:t>
-                      </a:r>
-                    </a:p>
-                    <a:p>
-                      <a:pPr marL="285750" indent="-285750">
-                        <a:buFont typeface="Arial" panose="020B0604020202020204" pitchFamily="34" charset="0"/>
-                        <a:buChar char="•"/>
-                      </a:pPr>
-                      <a:r>
-                        <a:rPr lang="en-US" dirty="0"/>
-                        <a:t>Add read-only images of directories with standard binaries and libraries like </a:t>
-                      </a:r>
-                      <a:r>
-                        <a:rPr lang="en-US" dirty="0">
-                          <a:latin typeface="Consolas" panose="020B0609020204030204" pitchFamily="49" charset="0"/>
-                          <a:cs typeface="Consolas" panose="020B0609020204030204" pitchFamily="49" charset="0"/>
-                        </a:rPr>
-                        <a:t>/</a:t>
-                      </a:r>
-                      <a:r>
-                        <a:rPr lang="en-US" dirty="0" err="1">
-                          <a:latin typeface="Consolas" panose="020B0609020204030204" pitchFamily="49" charset="0"/>
-                          <a:cs typeface="Consolas" panose="020B0609020204030204" pitchFamily="49" charset="0"/>
-                        </a:rPr>
-                        <a:t>usr</a:t>
-                      </a:r>
-                      <a:r>
-                        <a:rPr lang="en-US" dirty="0"/>
-                        <a:t> and </a:t>
-                      </a:r>
-                      <a:r>
-                        <a:rPr lang="en-US" dirty="0">
-                          <a:latin typeface="Consolas" panose="020B0609020204030204" pitchFamily="49" charset="0"/>
-                          <a:cs typeface="Consolas" panose="020B0609020204030204" pitchFamily="49" charset="0"/>
-                        </a:rPr>
-                        <a:t>/lib</a:t>
-                      </a:r>
-                      <a:r>
-                        <a:rPr lang="en-US" dirty="0"/>
-                        <a:t>,</a:t>
-                      </a:r>
-                    </a:p>
-                    <a:p>
-                      <a:pPr marL="285750" indent="-285750">
-                        <a:buFont typeface="Arial" panose="020B0604020202020204" pitchFamily="34" charset="0"/>
-                        <a:buChar char="•"/>
-                      </a:pPr>
-                      <a:r>
-                        <a:rPr lang="en-US" dirty="0"/>
-                        <a:t>Add instances of </a:t>
-                      </a:r>
-                      <a:r>
-                        <a:rPr lang="en-US" dirty="0">
-                          <a:latin typeface="Consolas" panose="020B0609020204030204" pitchFamily="49" charset="0"/>
-                          <a:cs typeface="Consolas" panose="020B0609020204030204" pitchFamily="49" charset="0"/>
-                        </a:rPr>
-                        <a:t>/</a:t>
-                      </a:r>
-                      <a:r>
-                        <a:rPr lang="en-US" dirty="0" err="1">
-                          <a:latin typeface="Consolas" panose="020B0609020204030204" pitchFamily="49" charset="0"/>
-                          <a:cs typeface="Consolas" panose="020B0609020204030204" pitchFamily="49" charset="0"/>
-                        </a:rPr>
-                        <a:t>tmp</a:t>
-                      </a:r>
-                      <a:r>
-                        <a:rPr lang="en-US" dirty="0"/>
-                        <a:t> and </a:t>
-                      </a:r>
-                      <a:r>
-                        <a:rPr lang="en-US" dirty="0">
-                          <a:latin typeface="Consolas" panose="020B0609020204030204" pitchFamily="49" charset="0"/>
-                          <a:cs typeface="Consolas" panose="020B0609020204030204" pitchFamily="49" charset="0"/>
-                        </a:rPr>
-                        <a:t>/proc</a:t>
-                      </a:r>
-                      <a:r>
-                        <a:rPr lang="en-US" dirty="0"/>
-                        <a:t> private to the container</a:t>
-                      </a:r>
-                      <a:r>
-                        <a:rPr lang="ru-RU" dirty="0"/>
-                        <a:t>,</a:t>
-                      </a:r>
-                    </a:p>
-                    <a:p>
-                      <a:pPr marL="285750" indent="-285750">
-                        <a:buFont typeface="Arial" panose="020B0604020202020204" pitchFamily="34" charset="0"/>
-                        <a:buChar char="•"/>
-                      </a:pPr>
-                      <a:r>
-                        <a:rPr lang="en-US" dirty="0"/>
-                        <a:t>Add directories with the data of an application that runs in the container</a:t>
-                      </a:r>
-                      <a:r>
-                        <a:rPr lang="ru-RU" dirty="0"/>
-                        <a:t>.</a:t>
-                      </a:r>
-                    </a:p>
-                  </a:txBody>
-                  <a:tcPr/>
-                </a:tc>
-                <a:tc>
-                  <a:txBody>
-                    <a:bodyPr/>
-                    <a:lstStyle/>
-                    <a:p>
-                      <a:pPr marL="285750" indent="-285750">
-                        <a:buFont typeface="Arial" panose="020B0604020202020204" pitchFamily="34" charset="0"/>
-                        <a:buChar char="•"/>
-                      </a:pPr>
-                      <a:endParaRPr lang="en-US" dirty="0"/>
-                    </a:p>
-                  </a:txBody>
-                  <a:tcPr/>
-                </a:tc>
-                <a:extLst>
-                  <a:ext uri="{0D108BD9-81ED-4DB2-BD59-A6C34878D82A}">
-                    <a16:rowId xmlns:a16="http://schemas.microsoft.com/office/drawing/2014/main" val="3226834803"/>
-                  </a:ext>
-                </a:extLst>
-              </a:tr>
-            </a:tbl>
-          </a:graphicData>
-        </a:graphic>
-      </p:graphicFrame>
-    </p:spTree>
-    <p:extLst>
-      <p:ext uri="{BB962C8B-B14F-4D97-AF65-F5344CB8AC3E}">
-        <p14:creationId xmlns:p14="http://schemas.microsoft.com/office/powerpoint/2010/main" val="3300123523"/>
-      </p:ext>
-    </p:extLst>
-  </p:cSld>
-  <p:clrMapOvr>
-    <a:masterClrMapping/>
-  </p:clrMapOvr>
-</p:sld>
-</file>
-
 <file path=ppt/slides/slide26.xml><?xml version="1.0" encoding="utf-8"?>
 <p:sld xmlns:a="http://schemas.openxmlformats.org/drawingml/2006/main" xmlns:r="http://schemas.openxmlformats.org/officeDocument/2006/relationships" xmlns:p="http://schemas.openxmlformats.org/presentationml/2006/main">
   <p:cSld>
@@ -17851,11 +19349,17 @@
           <p:cNvGraphicFramePr>
             <a:graphicFrameLocks noGrp="1"/>
           </p:cNvGraphicFramePr>
-          <p:nvPr/>
+          <p:nvPr>
+            <p:extLst>
+              <p:ext uri="{D42A27DB-BD31-4B8C-83A1-F6EECF244321}">
+                <p14:modId xmlns:p14="http://schemas.microsoft.com/office/powerpoint/2010/main" val="2314282816"/>
+              </p:ext>
+            </p:extLst>
+          </p:nvPr>
         </p:nvGraphicFramePr>
         <p:xfrm>
           <a:off x="0" y="342613"/>
-          <a:ext cx="12192000" cy="4183215"/>
+          <a:ext cx="12192000" cy="3085935"/>
         </p:xfrm>
         <a:graphic>
           <a:graphicData uri="http://schemas.openxmlformats.org/drawingml/2006/table">
@@ -17988,7 +19492,7 @@
                       </a:pPr>
                       <a:r>
                         <a:rPr lang="en-US" dirty="0"/>
-                        <a:t>In two different FS namespaces the path </a:t>
+                        <a:t>In different FS namespaces the path </a:t>
                       </a:r>
                       <a:r>
                         <a:rPr lang="en-US" dirty="0">
@@ -18006,7 +19510,420 @@
                       </a:r>
                       <a:r>
                         <a:rPr lang="en-US" dirty="0"/>
-                        <a:t> may refer to two different </a:t>
+                        <a:t> may refer to different </a:t>
+                      </a:r>
+                      <a:r>
+                        <a:rPr lang="en-US" dirty="0" err="1"/>
+                        <a:t>tmpfs</a:t>
+                      </a:r>
+                      <a:r>
+                        <a:rPr lang="en-US" dirty="0"/>
+                        <a:t> instances.</a:t>
+                      </a:r>
+                      <a:endParaRPr lang="ru-RU" dirty="0"/>
+                    </a:p>
+                  </a:txBody>
+                  <a:tcPr/>
+                </a:tc>
+                <a:tc hMerge="1">
+                  <a:txBody>
+                    <a:bodyPr/>
+                    <a:lstStyle/>
+                    <a:p>
+                      <a:endParaRPr lang="ru-RU" dirty="0"/>
+                    </a:p>
+                  </a:txBody>
+                  <a:tcPr/>
+                </a:tc>
+                <a:extLst>
+                  <a:ext uri="{0D108BD9-81ED-4DB2-BD59-A6C34878D82A}">
+                    <a16:rowId xmlns:a16="http://schemas.microsoft.com/office/drawing/2014/main" val="3908480295"/>
+                  </a:ext>
+                </a:extLst>
+              </a:tr>
+              <a:tr h="434175">
+                <a:tc gridSpan="2">
+                  <a:txBody>
+                    <a:bodyPr/>
+                    <a:lstStyle/>
+                    <a:p>
+                      <a:pPr marL="0" indent="0">
+                        <a:buFont typeface="Arial" panose="020B0604020202020204" pitchFamily="34" charset="0"/>
+                        <a:buNone/>
+                      </a:pPr>
+                      <a:r>
+                        <a:rPr lang="en-US" dirty="0"/>
+                        <a:t>See also:</a:t>
+                      </a:r>
+                    </a:p>
+                    <a:p>
+                      <a:pPr marL="285750" indent="-285750">
+                        <a:buFont typeface="Arial" panose="020B0604020202020204" pitchFamily="34" charset="0"/>
+                        <a:buChar char="•"/>
+                      </a:pPr>
+                      <a:r>
+                        <a:rPr lang="en-US" dirty="0" err="1"/>
+                        <a:t>Pid</a:t>
+                      </a:r>
+                      <a:r>
+                        <a:rPr lang="en-US" dirty="0"/>
+                        <a:t> namespaces,</a:t>
+                      </a:r>
+                    </a:p>
+                    <a:p>
+                      <a:pPr marL="285750" indent="-285750">
+                        <a:buFont typeface="Arial" panose="020B0604020202020204" pitchFamily="34" charset="0"/>
+                        <a:buChar char="•"/>
+                      </a:pPr>
+                      <a:r>
+                        <a:rPr lang="en-US" dirty="0"/>
+                        <a:t>Network namespaces,</a:t>
+                      </a:r>
+                    </a:p>
+                    <a:p>
+                      <a:pPr marL="285750" marR="0" lvl="0" indent="-285750" algn="l" defTabSz="914400" rtl="0" eaLnBrk="1" fontAlgn="auto" latinLnBrk="0" hangingPunct="1">
+                        <a:lnSpc>
+                          <a:spcPct val="100000"/>
+                        </a:lnSpc>
+                        <a:spcBef>
+                          <a:spcPts val="0"/>
+                        </a:spcBef>
+                        <a:spcAft>
+                          <a:spcPts val="0"/>
+                        </a:spcAft>
+                        <a:buClrTx/>
+                        <a:buSzTx/>
+                        <a:buFont typeface="Arial" panose="020B0604020202020204" pitchFamily="34" charset="0"/>
+                        <a:buChar char="•"/>
+                        <a:tabLst/>
+                        <a:defRPr/>
+                      </a:pPr>
+                      <a:r>
+                        <a:rPr lang="en-US" dirty="0"/>
+                        <a:t>User namespaces.</a:t>
+                      </a:r>
+                    </a:p>
+                  </a:txBody>
+                  <a:tcPr/>
+                </a:tc>
+                <a:tc hMerge="1">
+                  <a:txBody>
+                    <a:bodyPr/>
+                    <a:lstStyle/>
+                    <a:p>
+                      <a:endParaRPr lang="en-CY"/>
+                    </a:p>
+                  </a:txBody>
+                  <a:tcPr/>
+                </a:tc>
+                <a:extLst>
+                  <a:ext uri="{0D108BD9-81ED-4DB2-BD59-A6C34878D82A}">
+                    <a16:rowId xmlns:a16="http://schemas.microsoft.com/office/drawing/2014/main" val="3226834803"/>
+                  </a:ext>
+                </a:extLst>
+              </a:tr>
+            </a:tbl>
+          </a:graphicData>
+        </a:graphic>
+      </p:graphicFrame>
+    </p:spTree>
+    <p:extLst>
+      <p:ext uri="{BB962C8B-B14F-4D97-AF65-F5344CB8AC3E}">
+        <p14:creationId xmlns:p14="http://schemas.microsoft.com/office/powerpoint/2010/main" val="33160589"/>
+      </p:ext>
+    </p:extLst>
+  </p:cSld>
+  <p:clrMapOvr>
+    <a:masterClrMapping/>
+  </p:clrMapOvr>
+</p:sld>
+</file>
+
+<file path=ppt/slides/slide27.xml><?xml version="1.0" encoding="utf-8"?>
+<p:sld xmlns:a="http://schemas.openxmlformats.org/drawingml/2006/main" xmlns:r="http://schemas.openxmlformats.org/officeDocument/2006/relationships" xmlns:p="http://schemas.openxmlformats.org/presentationml/2006/main">
+  <p:cSld>
+    <p:spTree>
+      <p:nvGrpSpPr>
+        <p:cNvPr id="1" name=""/>
+        <p:cNvGrpSpPr/>
+        <p:nvPr/>
+      </p:nvGrpSpPr>
+      <p:grpSpPr>
+        <a:xfrm>
+          <a:off x="0" y="0"/>
+          <a:ext cx="0" cy="0"/>
+          <a:chOff x="0" y="0"/>
+          <a:chExt cx="0" cy="0"/>
+        </a:xfrm>
+      </p:grpSpPr>
+      <p:graphicFrame>
+        <p:nvGraphicFramePr>
+          <p:cNvPr id="5" name="Table 4"/>
+          <p:cNvGraphicFramePr>
+            <a:graphicFrameLocks noGrp="1"/>
+          </p:cNvGraphicFramePr>
+          <p:nvPr/>
+        </p:nvGraphicFramePr>
+        <p:xfrm>
+          <a:off x="0" y="1"/>
+          <a:ext cx="12192000" cy="365760"/>
+        </p:xfrm>
+        <a:graphic>
+          <a:graphicData uri="http://schemas.openxmlformats.org/drawingml/2006/table">
+            <a:tbl>
+              <a:tblPr firstRow="1" bandRow="1">
+                <a:tableStyleId>{5C22544A-7EE6-4342-B048-85BDC9FD1C3A}</a:tableStyleId>
+              </a:tblPr>
+              <a:tblGrid>
+                <a:gridCol w="12192000">
+                  <a:extLst>
+                    <a:ext uri="{9D8B030D-6E8A-4147-A177-3AD203B41FA5}">
+                      <a16:colId xmlns:a16="http://schemas.microsoft.com/office/drawing/2014/main" val="20000"/>
+                    </a:ext>
+                  </a:extLst>
+                </a:gridCol>
+              </a:tblGrid>
+              <a:tr h="321276">
+                <a:tc>
+                  <a:txBody>
+                    <a:bodyPr/>
+                    <a:lstStyle/>
+                    <a:p>
+                      <a:r>
+                        <a:rPr lang="en-US" sz="1800" dirty="0"/>
+                        <a:t>The POSIX file system semantics</a:t>
+                      </a:r>
+                      <a:endParaRPr lang="ru-RU" sz="1800" dirty="0"/>
+                    </a:p>
+                  </a:txBody>
+                  <a:tcPr/>
+                </a:tc>
+                <a:extLst>
+                  <a:ext uri="{0D108BD9-81ED-4DB2-BD59-A6C34878D82A}">
+                    <a16:rowId xmlns:a16="http://schemas.microsoft.com/office/drawing/2014/main" val="10000"/>
+                  </a:ext>
+                </a:extLst>
+              </a:tr>
+            </a:tbl>
+          </a:graphicData>
+        </a:graphic>
+      </p:graphicFrame>
+      <p:graphicFrame>
+        <p:nvGraphicFramePr>
+          <p:cNvPr id="6" name="Table 5"/>
+          <p:cNvGraphicFramePr>
+            <a:graphicFrameLocks noGrp="1"/>
+          </p:cNvGraphicFramePr>
+          <p:nvPr/>
+        </p:nvGraphicFramePr>
+        <p:xfrm>
+          <a:off x="0" y="6532604"/>
+          <a:ext cx="12192000" cy="365760"/>
+        </p:xfrm>
+        <a:graphic>
+          <a:graphicData uri="http://schemas.openxmlformats.org/drawingml/2006/table">
+            <a:tbl>
+              <a:tblPr firstRow="1" bandRow="1">
+                <a:tableStyleId>{5C22544A-7EE6-4342-B048-85BDC9FD1C3A}</a:tableStyleId>
+              </a:tblPr>
+              <a:tblGrid>
+                <a:gridCol w="12192000">
+                  <a:extLst>
+                    <a:ext uri="{9D8B030D-6E8A-4147-A177-3AD203B41FA5}">
+                      <a16:colId xmlns:a16="http://schemas.microsoft.com/office/drawing/2014/main" val="20000"/>
+                    </a:ext>
+                  </a:extLst>
+                </a:gridCol>
+              </a:tblGrid>
+              <a:tr h="308094">
+                <a:tc>
+                  <a:txBody>
+                    <a:bodyPr/>
+                    <a:lstStyle/>
+                    <a:p>
+                      <a:endParaRPr lang="ru-RU" dirty="0"/>
+                    </a:p>
+                  </a:txBody>
+                  <a:tcPr/>
+                </a:tc>
+                <a:extLst>
+                  <a:ext uri="{0D108BD9-81ED-4DB2-BD59-A6C34878D82A}">
+                    <a16:rowId xmlns:a16="http://schemas.microsoft.com/office/drawing/2014/main" val="10000"/>
+                  </a:ext>
+                </a:extLst>
+              </a:tr>
+            </a:tbl>
+          </a:graphicData>
+        </a:graphic>
+      </p:graphicFrame>
+      <p:graphicFrame>
+        <p:nvGraphicFramePr>
+          <p:cNvPr id="2" name="Table 1"/>
+          <p:cNvGraphicFramePr>
+            <a:graphicFrameLocks noGrp="1"/>
+          </p:cNvGraphicFramePr>
+          <p:nvPr>
+            <p:extLst>
+              <p:ext uri="{D42A27DB-BD31-4B8C-83A1-F6EECF244321}">
+                <p14:modId xmlns:p14="http://schemas.microsoft.com/office/powerpoint/2010/main" val="639052910"/>
+              </p:ext>
+            </p:extLst>
+          </p:nvPr>
+        </p:nvGraphicFramePr>
+        <p:xfrm>
+          <a:off x="0" y="342613"/>
+          <a:ext cx="12192000" cy="4457535"/>
+        </p:xfrm>
+        <a:graphic>
+          <a:graphicData uri="http://schemas.openxmlformats.org/drawingml/2006/table">
+            <a:tbl>
+              <a:tblPr firstRow="1" bandRow="1">
+                <a:tableStyleId>{3B4B98B0-60AC-42C2-AFA5-B58CD77FA1E5}</a:tableStyleId>
+              </a:tblPr>
+              <a:tblGrid>
+                <a:gridCol w="6096000">
+                  <a:extLst>
+                    <a:ext uri="{9D8B030D-6E8A-4147-A177-3AD203B41FA5}">
+                      <a16:colId xmlns:a16="http://schemas.microsoft.com/office/drawing/2014/main" val="20000"/>
+                    </a:ext>
+                  </a:extLst>
+                </a:gridCol>
+                <a:gridCol w="6096000">
+                  <a:extLst>
+                    <a:ext uri="{9D8B030D-6E8A-4147-A177-3AD203B41FA5}">
+                      <a16:colId xmlns:a16="http://schemas.microsoft.com/office/drawing/2014/main" val="3688292786"/>
+                    </a:ext>
+                  </a:extLst>
+                </a:gridCol>
+              </a:tblGrid>
+              <a:tr h="434175">
+                <a:tc>
+                  <a:txBody>
+                    <a:bodyPr/>
+                    <a:lstStyle/>
+                    <a:p>
+                      <a:r>
+                        <a:rPr lang="en-US" dirty="0"/>
+                        <a:t>A file system is a shared resource: concurrent access and races</a:t>
+                      </a:r>
+                      <a:endParaRPr lang="ru-RU" dirty="0"/>
+                    </a:p>
+                  </a:txBody>
+                  <a:tcPr/>
+                </a:tc>
+                <a:tc>
+                  <a:txBody>
+                    <a:bodyPr/>
+                    <a:lstStyle/>
+                    <a:p>
+                      <a:endParaRPr lang="ru-RU" dirty="0"/>
+                    </a:p>
+                  </a:txBody>
+                  <a:tcPr/>
+                </a:tc>
+                <a:extLst>
+                  <a:ext uri="{0D108BD9-81ED-4DB2-BD59-A6C34878D82A}">
+                    <a16:rowId xmlns:a16="http://schemas.microsoft.com/office/drawing/2014/main" val="10000"/>
+                  </a:ext>
+                </a:extLst>
+              </a:tr>
+              <a:tr h="434175">
+                <a:tc gridSpan="2">
+                  <a:txBody>
+                    <a:bodyPr/>
+                    <a:lstStyle/>
+                    <a:p>
+                      <a:r>
+                        <a:rPr lang="en-US" dirty="0"/>
+                        <a:t>One of the solutions: run applications in containers:</a:t>
+                      </a:r>
+                      <a:endParaRPr lang="ru-RU" dirty="0"/>
+                    </a:p>
+                    <a:p>
+                      <a:pPr marL="285750" indent="-285750">
+                        <a:buFont typeface="Arial" panose="020B0604020202020204" pitchFamily="34" charset="0"/>
+                        <a:buChar char="•"/>
+                      </a:pPr>
+                      <a:r>
+                        <a:rPr lang="en-US" dirty="0"/>
+                        <a:t>If processes A and B each have their ”private” </a:t>
+                      </a:r>
+                      <a:r>
+                        <a:rPr lang="en-US" dirty="0">
+                          <a:latin typeface="Consolas" panose="020B0609020204030204" pitchFamily="49" charset="0"/>
+                          <a:cs typeface="Consolas" panose="020B0609020204030204" pitchFamily="49" charset="0"/>
+                        </a:rPr>
+                        <a:t>/</a:t>
+                      </a:r>
+                      <a:r>
+                        <a:rPr lang="en-US" dirty="0" err="1">
+                          <a:latin typeface="Consolas" panose="020B0609020204030204" pitchFamily="49" charset="0"/>
+                          <a:cs typeface="Consolas" panose="020B0609020204030204" pitchFamily="49" charset="0"/>
+                        </a:rPr>
+                        <a:t>tmp</a:t>
+                      </a:r>
+                      <a:r>
+                        <a:rPr lang="en-US" dirty="0"/>
+                        <a:t> directory, then they cannot access files of each other by construction</a:t>
+                      </a:r>
+                      <a:r>
+                        <a:rPr lang="ru-RU" dirty="0"/>
+                        <a:t>.</a:t>
+                      </a:r>
+                      <a:endParaRPr lang="en-US" dirty="0"/>
+                    </a:p>
+                    <a:p>
+                      <a:pPr marL="285750" indent="-285750">
+                        <a:buFont typeface="Arial" panose="020B0604020202020204" pitchFamily="34" charset="0"/>
+                        <a:buChar char="•"/>
+                      </a:pPr>
+                      <a:r>
+                        <a:rPr lang="en-US" dirty="0"/>
+                        <a:t>Linux has</a:t>
+                      </a:r>
+                      <a:r>
+                        <a:rPr lang="ru-RU" dirty="0"/>
+                        <a:t> </a:t>
+                      </a:r>
+                      <a:r>
+                        <a:rPr lang="en-US" dirty="0"/>
+                        <a:t>“</a:t>
+                      </a:r>
+                      <a:r>
+                        <a:rPr lang="en-US" b="1" dirty="0"/>
+                        <a:t>filesystem namespaces</a:t>
+                      </a:r>
+                      <a:r>
+                        <a:rPr lang="en-US" dirty="0"/>
+                        <a:t>” which are collections of mount points. Mount points of a FS namespace are visible only to processes that run in that specific FS namespace.</a:t>
+                      </a:r>
+                    </a:p>
+                    <a:p>
+                      <a:pPr marL="285750" indent="-285750">
+                        <a:buFont typeface="Arial" panose="020B0604020202020204" pitchFamily="34" charset="0"/>
+                        <a:buChar char="•"/>
+                      </a:pPr>
+                      <a:r>
+                        <a:rPr lang="en-US" dirty="0"/>
+                        <a:t>In different FS namespaces the path </a:t>
+                      </a:r>
+                      <a:r>
+                        <a:rPr lang="en-US" dirty="0">
+                          <a:latin typeface="Consolas" panose="020B0609020204030204" pitchFamily="49" charset="0"/>
+                          <a:cs typeface="Consolas" panose="020B0609020204030204" pitchFamily="49" charset="0"/>
+                        </a:rPr>
+                        <a:t>/</a:t>
+                      </a:r>
+                      <a:r>
+                        <a:rPr lang="en-US" dirty="0" err="1">
+                          <a:latin typeface="Consolas" panose="020B0609020204030204" pitchFamily="49" charset="0"/>
+                          <a:cs typeface="Consolas" panose="020B0609020204030204" pitchFamily="49" charset="0"/>
+                        </a:rPr>
+                        <a:t>tmp</a:t>
+                      </a:r>
+                      <a:r>
+                        <a:rPr lang="en-US" dirty="0"/>
+                        <a:t> may refer to different </a:t>
                       </a:r>
                       <a:r>
                         <a:rPr lang="en-US" dirty="0" err="1"/>
@@ -18066,6 +19983,26 @@
                         <a:rPr lang="ru-RU" dirty="0"/>
                         <a:t>,</a:t>
                       </a:r>
+                      <a:endParaRPr lang="en-US" dirty="0"/>
+                    </a:p>
+                    <a:p>
+                      <a:pPr marL="285750" indent="-285750">
+                        <a:buFont typeface="Arial" panose="020B0604020202020204" pitchFamily="34" charset="0"/>
+                        <a:buChar char="•"/>
+                      </a:pPr>
+                      <a:r>
+                        <a:rPr lang="en-US" dirty="0"/>
+                        <a:t>Populate that directory (e.g. with </a:t>
+                      </a:r>
+                      <a:r>
+                        <a:rPr lang="en-US" dirty="0" err="1"/>
+                        <a:t>untar</a:t>
+                      </a:r>
+                      <a:r>
+                        <a:rPr lang="en-US" dirty="0"/>
+                        <a:t>),</a:t>
+                      </a:r>
+                      <a:endParaRPr lang="ru-RU" dirty="0"/>
                     </a:p>
                     <a:p>
                       <a:pPr marL="285750" indent="-285750">
@@ -18170,6 +20107,527 @@
                   <a:txBody>
                     <a:bodyPr/>
                     <a:lstStyle/>
+                    <a:p>
+                      <a:pPr marL="285750" indent="-285750">
+                        <a:buFont typeface="Arial" panose="020B0604020202020204" pitchFamily="34" charset="0"/>
+                        <a:buChar char="•"/>
+                      </a:pPr>
+                      <a:endParaRPr lang="en-US" dirty="0"/>
+                    </a:p>
+                  </a:txBody>
+                  <a:tcPr/>
+                </a:tc>
+                <a:extLst>
+                  <a:ext uri="{0D108BD9-81ED-4DB2-BD59-A6C34878D82A}">
+                    <a16:rowId xmlns:a16="http://schemas.microsoft.com/office/drawing/2014/main" val="3226834803"/>
+                  </a:ext>
+                </a:extLst>
+              </a:tr>
+            </a:tbl>
+          </a:graphicData>
+        </a:graphic>
+      </p:graphicFrame>
+    </p:spTree>
+    <p:extLst>
+      <p:ext uri="{BB962C8B-B14F-4D97-AF65-F5344CB8AC3E}">
+        <p14:creationId xmlns:p14="http://schemas.microsoft.com/office/powerpoint/2010/main" val="3300123523"/>
+      </p:ext>
+    </p:extLst>
+  </p:cSld>
+  <p:clrMapOvr>
+    <a:masterClrMapping/>
+  </p:clrMapOvr>
+</p:sld>
+</file>
+
+<file path=ppt/slides/slide28.xml><?xml version="1.0" encoding="utf-8"?>
+<p:sld xmlns:a="http://schemas.openxmlformats.org/drawingml/2006/main" xmlns:r="http://schemas.openxmlformats.org/officeDocument/2006/relationships" xmlns:p="http://schemas.openxmlformats.org/presentationml/2006/main">
+  <p:cSld>
+    <p:spTree>
+      <p:nvGrpSpPr>
+        <p:cNvPr id="1" name=""/>
+        <p:cNvGrpSpPr/>
+        <p:nvPr/>
+      </p:nvGrpSpPr>
+      <p:grpSpPr>
+        <a:xfrm>
+          <a:off x="0" y="0"/>
+          <a:ext cx="0" cy="0"/>
+          <a:chOff x="0" y="0"/>
+          <a:chExt cx="0" cy="0"/>
+        </a:xfrm>
+      </p:grpSpPr>
+      <p:graphicFrame>
+        <p:nvGraphicFramePr>
+          <p:cNvPr id="5" name="Table 4"/>
+          <p:cNvGraphicFramePr>
+            <a:graphicFrameLocks noGrp="1"/>
+          </p:cNvGraphicFramePr>
+          <p:nvPr/>
+        </p:nvGraphicFramePr>
+        <p:xfrm>
+          <a:off x="0" y="1"/>
+          <a:ext cx="12192000" cy="365760"/>
+        </p:xfrm>
+        <a:graphic>
+          <a:graphicData uri="http://schemas.openxmlformats.org/drawingml/2006/table">
+            <a:tbl>
+              <a:tblPr firstRow="1" bandRow="1">
+                <a:tableStyleId>{5C22544A-7EE6-4342-B048-85BDC9FD1C3A}</a:tableStyleId>
+              </a:tblPr>
+              <a:tblGrid>
+                <a:gridCol w="12192000">
+                  <a:extLst>
+                    <a:ext uri="{9D8B030D-6E8A-4147-A177-3AD203B41FA5}">
+                      <a16:colId xmlns:a16="http://schemas.microsoft.com/office/drawing/2014/main" val="20000"/>
+                    </a:ext>
+                  </a:extLst>
+                </a:gridCol>
+              </a:tblGrid>
+              <a:tr h="321276">
+                <a:tc>
+                  <a:txBody>
+                    <a:bodyPr/>
+                    <a:lstStyle/>
+                    <a:p>
+                      <a:r>
+                        <a:rPr lang="en-US" sz="1800" dirty="0"/>
+                        <a:t>The POSIX file system semantics</a:t>
+                      </a:r>
+                      <a:endParaRPr lang="ru-RU" sz="1800" dirty="0"/>
+                    </a:p>
+                  </a:txBody>
+                  <a:tcPr/>
+                </a:tc>
+                <a:extLst>
+                  <a:ext uri="{0D108BD9-81ED-4DB2-BD59-A6C34878D82A}">
+                    <a16:rowId xmlns:a16="http://schemas.microsoft.com/office/drawing/2014/main" val="10000"/>
+                  </a:ext>
+                </a:extLst>
+              </a:tr>
+            </a:tbl>
+          </a:graphicData>
+        </a:graphic>
+      </p:graphicFrame>
+      <p:graphicFrame>
+        <p:nvGraphicFramePr>
+          <p:cNvPr id="6" name="Table 5"/>
+          <p:cNvGraphicFramePr>
+            <a:graphicFrameLocks noGrp="1"/>
+          </p:cNvGraphicFramePr>
+          <p:nvPr/>
+        </p:nvGraphicFramePr>
+        <p:xfrm>
+          <a:off x="0" y="6532604"/>
+          <a:ext cx="12192000" cy="365760"/>
+        </p:xfrm>
+        <a:graphic>
+          <a:graphicData uri="http://schemas.openxmlformats.org/drawingml/2006/table">
+            <a:tbl>
+              <a:tblPr firstRow="1" bandRow="1">
+                <a:tableStyleId>{5C22544A-7EE6-4342-B048-85BDC9FD1C3A}</a:tableStyleId>
+              </a:tblPr>
+              <a:tblGrid>
+                <a:gridCol w="12192000">
+                  <a:extLst>
+                    <a:ext uri="{9D8B030D-6E8A-4147-A177-3AD203B41FA5}">
+                      <a16:colId xmlns:a16="http://schemas.microsoft.com/office/drawing/2014/main" val="20000"/>
+                    </a:ext>
+                  </a:extLst>
+                </a:gridCol>
+              </a:tblGrid>
+              <a:tr h="308094">
+                <a:tc>
+                  <a:txBody>
+                    <a:bodyPr/>
+                    <a:lstStyle/>
+                    <a:p>
+                      <a:endParaRPr lang="ru-RU" dirty="0"/>
+                    </a:p>
+                  </a:txBody>
+                  <a:tcPr/>
+                </a:tc>
+                <a:extLst>
+                  <a:ext uri="{0D108BD9-81ED-4DB2-BD59-A6C34878D82A}">
+                    <a16:rowId xmlns:a16="http://schemas.microsoft.com/office/drawing/2014/main" val="10000"/>
+                  </a:ext>
+                </a:extLst>
+              </a:tr>
+            </a:tbl>
+          </a:graphicData>
+        </a:graphic>
+      </p:graphicFrame>
+      <p:graphicFrame>
+        <p:nvGraphicFramePr>
+          <p:cNvPr id="2" name="Table 1"/>
+          <p:cNvGraphicFramePr>
+            <a:graphicFrameLocks noGrp="1"/>
+          </p:cNvGraphicFramePr>
+          <p:nvPr>
+            <p:extLst>
+              <p:ext uri="{D42A27DB-BD31-4B8C-83A1-F6EECF244321}">
+                <p14:modId xmlns:p14="http://schemas.microsoft.com/office/powerpoint/2010/main" val="1985397405"/>
+              </p:ext>
+            </p:extLst>
+          </p:nvPr>
+        </p:nvGraphicFramePr>
+        <p:xfrm>
+          <a:off x="0" y="342613"/>
+          <a:ext cx="12192000" cy="4457535"/>
+        </p:xfrm>
+        <a:graphic>
+          <a:graphicData uri="http://schemas.openxmlformats.org/drawingml/2006/table">
+            <a:tbl>
+              <a:tblPr firstRow="1" bandRow="1">
+                <a:tableStyleId>{3B4B98B0-60AC-42C2-AFA5-B58CD77FA1E5}</a:tableStyleId>
+              </a:tblPr>
+              <a:tblGrid>
+                <a:gridCol w="6096000">
+                  <a:extLst>
+                    <a:ext uri="{9D8B030D-6E8A-4147-A177-3AD203B41FA5}">
+                      <a16:colId xmlns:a16="http://schemas.microsoft.com/office/drawing/2014/main" val="20000"/>
+                    </a:ext>
+                  </a:extLst>
+                </a:gridCol>
+                <a:gridCol w="6096000">
+                  <a:extLst>
+                    <a:ext uri="{9D8B030D-6E8A-4147-A177-3AD203B41FA5}">
+                      <a16:colId xmlns:a16="http://schemas.microsoft.com/office/drawing/2014/main" val="3688292786"/>
+                    </a:ext>
+                  </a:extLst>
+                </a:gridCol>
+              </a:tblGrid>
+              <a:tr h="434175">
+                <a:tc>
+                  <a:txBody>
+                    <a:bodyPr/>
+                    <a:lstStyle/>
+                    <a:p>
+                      <a:r>
+                        <a:rPr lang="en-US" dirty="0"/>
+                        <a:t>A file system is a shared resource: concurrent access and races</a:t>
+                      </a:r>
+                      <a:endParaRPr lang="ru-RU" dirty="0"/>
+                    </a:p>
+                  </a:txBody>
+                  <a:tcPr/>
+                </a:tc>
+                <a:tc>
+                  <a:txBody>
+                    <a:bodyPr/>
+                    <a:lstStyle/>
+                    <a:p>
+                      <a:endParaRPr lang="ru-RU" dirty="0"/>
+                    </a:p>
+                  </a:txBody>
+                  <a:tcPr/>
+                </a:tc>
+                <a:extLst>
+                  <a:ext uri="{0D108BD9-81ED-4DB2-BD59-A6C34878D82A}">
+                    <a16:rowId xmlns:a16="http://schemas.microsoft.com/office/drawing/2014/main" val="10000"/>
+                  </a:ext>
+                </a:extLst>
+              </a:tr>
+              <a:tr h="434175">
+                <a:tc gridSpan="2">
+                  <a:txBody>
+                    <a:bodyPr/>
+                    <a:lstStyle/>
+                    <a:p>
+                      <a:r>
+                        <a:rPr lang="en-US" dirty="0"/>
+                        <a:t>One of the solutions: run applications in containers:</a:t>
+                      </a:r>
+                      <a:endParaRPr lang="ru-RU" dirty="0"/>
+                    </a:p>
+                    <a:p>
+                      <a:pPr marL="285750" indent="-285750">
+                        <a:buFont typeface="Arial" panose="020B0604020202020204" pitchFamily="34" charset="0"/>
+                        <a:buChar char="•"/>
+                      </a:pPr>
+                      <a:r>
+                        <a:rPr lang="en-US" dirty="0"/>
+                        <a:t>If processes A and B each have their ”private” </a:t>
+                      </a:r>
+                      <a:r>
+                        <a:rPr lang="en-US" dirty="0">
+                          <a:latin typeface="Consolas" panose="020B0609020204030204" pitchFamily="49" charset="0"/>
+                          <a:cs typeface="Consolas" panose="020B0609020204030204" pitchFamily="49" charset="0"/>
+                        </a:rPr>
+                        <a:t>/</a:t>
+                      </a:r>
+                      <a:r>
+                        <a:rPr lang="en-US" dirty="0" err="1">
+                          <a:latin typeface="Consolas" panose="020B0609020204030204" pitchFamily="49" charset="0"/>
+                          <a:cs typeface="Consolas" panose="020B0609020204030204" pitchFamily="49" charset="0"/>
+                        </a:rPr>
+                        <a:t>tmp</a:t>
+                      </a:r>
+                      <a:r>
+                        <a:rPr lang="en-US" dirty="0"/>
+                        <a:t> directory, then they cannot access files of each other by construction</a:t>
+                      </a:r>
+                      <a:r>
+                        <a:rPr lang="ru-RU" dirty="0"/>
+                        <a:t>.</a:t>
+                      </a:r>
+                      <a:endParaRPr lang="en-US" dirty="0"/>
+                    </a:p>
+                    <a:p>
+                      <a:pPr marL="285750" indent="-285750">
+                        <a:buFont typeface="Arial" panose="020B0604020202020204" pitchFamily="34" charset="0"/>
+                        <a:buChar char="•"/>
+                      </a:pPr>
+                      <a:r>
+                        <a:rPr lang="en-US" dirty="0"/>
+                        <a:t>Linux has</a:t>
+                      </a:r>
+                      <a:r>
+                        <a:rPr lang="ru-RU" dirty="0"/>
+                        <a:t> </a:t>
+                      </a:r>
+                      <a:r>
+                        <a:rPr lang="en-US" dirty="0"/>
+                        <a:t>“</a:t>
+                      </a:r>
+                      <a:r>
+                        <a:rPr lang="en-US" b="1" dirty="0"/>
+                        <a:t>filesystem namespaces</a:t>
+                      </a:r>
+                      <a:r>
+                        <a:rPr lang="en-US" dirty="0"/>
+                        <a:t>” which are collections of mount points. Mount points of a FS namespace are visible only to processes that run in that specific FS namespace.</a:t>
+                      </a:r>
+                    </a:p>
+                    <a:p>
+                      <a:pPr marL="285750" indent="-285750">
+                        <a:buFont typeface="Arial" panose="020B0604020202020204" pitchFamily="34" charset="0"/>
+                        <a:buChar char="•"/>
+                      </a:pPr>
+                      <a:r>
+                        <a:rPr lang="en-US" dirty="0"/>
+                        <a:t>In different FS namespaces the path </a:t>
+                      </a:r>
+                      <a:r>
+                        <a:rPr lang="en-US" dirty="0">
+                          <a:latin typeface="Consolas" panose="020B0609020204030204" pitchFamily="49" charset="0"/>
+                          <a:cs typeface="Consolas" panose="020B0609020204030204" pitchFamily="49" charset="0"/>
+                        </a:rPr>
+                        <a:t>/</a:t>
+                      </a:r>
+                      <a:r>
+                        <a:rPr lang="en-US" dirty="0" err="1">
+                          <a:latin typeface="Consolas" panose="020B0609020204030204" pitchFamily="49" charset="0"/>
+                          <a:cs typeface="Consolas" panose="020B0609020204030204" pitchFamily="49" charset="0"/>
+                        </a:rPr>
+                        <a:t>tmp</a:t>
+                      </a:r>
+                      <a:r>
+                        <a:rPr lang="en-US" dirty="0"/>
+                        <a:t> may refer to different </a:t>
+                      </a:r>
+                      <a:r>
+                        <a:rPr lang="en-US" dirty="0" err="1"/>
+                        <a:t>tmpfs</a:t>
+                      </a:r>
+                      <a:r>
+                        <a:rPr lang="en-US" dirty="0"/>
+                        <a:t> instances.</a:t>
+                      </a:r>
+                      <a:endParaRPr lang="ru-RU" dirty="0"/>
+                    </a:p>
+                  </a:txBody>
+                  <a:tcPr/>
+                </a:tc>
+                <a:tc hMerge="1">
+                  <a:txBody>
+                    <a:bodyPr/>
+                    <a:lstStyle/>
+                    <a:p>
+                      <a:endParaRPr lang="ru-RU" dirty="0"/>
+                    </a:p>
+                  </a:txBody>
+                  <a:tcPr/>
+                </a:tc>
+                <a:extLst>
+                  <a:ext uri="{0D108BD9-81ED-4DB2-BD59-A6C34878D82A}">
+                    <a16:rowId xmlns:a16="http://schemas.microsoft.com/office/drawing/2014/main" val="3908480295"/>
+                  </a:ext>
+                </a:extLst>
+              </a:tr>
+              <a:tr h="434175">
+                <a:tc>
+                  <a:txBody>
+                    <a:bodyPr/>
+                    <a:lstStyle/>
+                    <a:p>
+                      <a:pPr marL="0" indent="0">
+                        <a:buFont typeface="Arial" panose="020B0604020202020204" pitchFamily="34" charset="0"/>
+                        <a:buNone/>
+                      </a:pPr>
+                      <a:r>
+                        <a:rPr lang="en-US" dirty="0"/>
+                        <a:t>How to populate a FS namespace?</a:t>
+                      </a:r>
+                      <a:endParaRPr lang="ru-RU" dirty="0"/>
+                    </a:p>
+                    <a:p>
+                      <a:pPr marL="285750" indent="-285750">
+                        <a:buFont typeface="Arial" panose="020B0604020202020204" pitchFamily="34" charset="0"/>
+                        <a:buChar char="•"/>
+                      </a:pPr>
+                      <a:r>
+                        <a:rPr lang="en-US" dirty="0"/>
+                        <a:t>One can start with an empty directory that will become the root of the FS namespace</a:t>
+                      </a:r>
+                      <a:r>
+                        <a:rPr lang="ru-RU" dirty="0"/>
+                        <a:t>,</a:t>
+                      </a:r>
+                      <a:endParaRPr lang="en-US" dirty="0"/>
+                    </a:p>
+                    <a:p>
+                      <a:pPr marL="285750" marR="0" lvl="0" indent="-285750" algn="l" defTabSz="914400" rtl="0" eaLnBrk="1" fontAlgn="auto" latinLnBrk="0" hangingPunct="1">
+                        <a:lnSpc>
+                          <a:spcPct val="100000"/>
+                        </a:lnSpc>
+                        <a:spcBef>
+                          <a:spcPts val="0"/>
+                        </a:spcBef>
+                        <a:spcAft>
+                          <a:spcPts val="0"/>
+                        </a:spcAft>
+                        <a:buClrTx/>
+                        <a:buSzTx/>
+                        <a:buFont typeface="Arial" panose="020B0604020202020204" pitchFamily="34" charset="0"/>
+                        <a:buChar char="•"/>
+                        <a:tabLst/>
+                        <a:defRPr/>
+                      </a:pPr>
+                      <a:r>
+                        <a:rPr lang="en-US" dirty="0"/>
+                        <a:t>Populate that directory (e.g. with </a:t>
+                      </a:r>
+                      <a:r>
+                        <a:rPr lang="en-US" dirty="0" err="1"/>
+                        <a:t>untar</a:t>
+                      </a:r>
+                      <a:r>
+                        <a:rPr lang="en-US" dirty="0"/>
+                        <a:t>),</a:t>
+                      </a:r>
+                      <a:endParaRPr lang="ru-RU" dirty="0"/>
+                    </a:p>
+                    <a:p>
+                      <a:pPr marL="285750" indent="-285750">
+                        <a:buFont typeface="Arial" panose="020B0604020202020204" pitchFamily="34" charset="0"/>
+                        <a:buChar char="•"/>
+                      </a:pPr>
+                      <a:r>
+                        <a:rPr lang="en-US" dirty="0"/>
+                        <a:t>Add read-only images of directories with standard binaries and libraries like </a:t>
+                      </a:r>
+                      <a:r>
+                        <a:rPr lang="en-US" dirty="0">
+                          <a:latin typeface="Consolas" panose="020B0609020204030204" pitchFamily="49" charset="0"/>
+                          <a:cs typeface="Consolas" panose="020B0609020204030204" pitchFamily="49" charset="0"/>
+                        </a:rPr>
+                        <a:t>/</a:t>
+                      </a:r>
+                      <a:r>
+                        <a:rPr lang="en-US" dirty="0" err="1">
+                          <a:latin typeface="Consolas" panose="020B0609020204030204" pitchFamily="49" charset="0"/>
+                          <a:cs typeface="Consolas" panose="020B0609020204030204" pitchFamily="49" charset="0"/>
+                        </a:rPr>
+                        <a:t>usr</a:t>
+                      </a:r>
+                      <a:r>
+                        <a:rPr lang="en-US" dirty="0"/>
+                        <a:t> and </a:t>
+                      </a:r>
+                      <a:r>
+                        <a:rPr lang="en-US" dirty="0">
+                          <a:latin typeface="Consolas" panose="020B0609020204030204" pitchFamily="49" charset="0"/>
+                          <a:cs typeface="Consolas" panose="020B0609020204030204" pitchFamily="49" charset="0"/>
+                        </a:rPr>
+                        <a:t>/lib</a:t>
+                      </a:r>
+                      <a:r>
+                        <a:rPr lang="en-US" dirty="0"/>
+                        <a:t>,</a:t>
+                      </a:r>
+                    </a:p>
+                    <a:p>
+                      <a:pPr marL="285750" indent="-285750">
+                        <a:buFont typeface="Arial" panose="020B0604020202020204" pitchFamily="34" charset="0"/>
+                        <a:buChar char="•"/>
+                      </a:pPr>
+                      <a:r>
+                        <a:rPr lang="en-US" dirty="0"/>
+                        <a:t>Add instances of </a:t>
+                      </a:r>
+                      <a:r>
+                        <a:rPr lang="en-US" dirty="0">
+                          <a:latin typeface="Consolas" panose="020B0609020204030204" pitchFamily="49" charset="0"/>
+                          <a:cs typeface="Consolas" panose="020B0609020204030204" pitchFamily="49" charset="0"/>
+                        </a:rPr>
+                        <a:t>/</a:t>
+                      </a:r>
+                      <a:r>
+                        <a:rPr lang="en-US" dirty="0" err="1">
+                          <a:latin typeface="Consolas" panose="020B0609020204030204" pitchFamily="49" charset="0"/>
+                          <a:cs typeface="Consolas" panose="020B0609020204030204" pitchFamily="49" charset="0"/>
+                        </a:rPr>
+                        <a:t>tmp</a:t>
+                      </a:r>
+                      <a:r>
+                        <a:rPr lang="en-US" dirty="0"/>
+                        <a:t> and </a:t>
+                      </a:r>
+                      <a:r>
+                        <a:rPr lang="en-US" dirty="0">
+                          <a:latin typeface="Consolas" panose="020B0609020204030204" pitchFamily="49" charset="0"/>
+                          <a:cs typeface="Consolas" panose="020B0609020204030204" pitchFamily="49" charset="0"/>
+                        </a:rPr>
+                        <a:t>/proc</a:t>
+                      </a:r>
+                      <a:r>
+                        <a:rPr lang="en-US" dirty="0"/>
+                        <a:t> private to the container</a:t>
+                      </a:r>
+                      <a:r>
+                        <a:rPr lang="ru-RU" dirty="0"/>
+                        <a:t>,</a:t>
+                      </a:r>
+                    </a:p>
+                    <a:p>
+                      <a:pPr marL="285750" indent="-285750">
+                        <a:buFont typeface="Arial" panose="020B0604020202020204" pitchFamily="34" charset="0"/>
+                        <a:buChar char="•"/>
+                      </a:pPr>
+                      <a:r>
+                        <a:rPr lang="en-US" dirty="0"/>
+                        <a:t>Add directories with the data of an application that runs in the container</a:t>
+                      </a:r>
+                      <a:r>
+                        <a:rPr lang="ru-RU" dirty="0"/>
+                        <a:t>.</a:t>
+                      </a:r>
+                    </a:p>
+                  </a:txBody>
+                  <a:tcPr/>
+                </a:tc>
+                <a:tc>
+                  <a:txBody>
+                    <a:bodyPr/>
+                    <a:lstStyle/>
+                    <a:p>
+                      <a:pPr marL="285750" indent="-285750">
+                        <a:buFont typeface="Arial" panose="020B0604020202020204" pitchFamily="34" charset="0"/>
+                        <a:buChar char="•"/>
+                      </a:pPr>
+                      <a:endParaRPr lang="en-US" dirty="0"/>
+                    </a:p>
                     <a:p>
                       <a:pPr marL="285750" indent="-285750">
                         <a:buFont typeface="Arial" panose="020B0604020202020204" pitchFamily="34" charset="0"/>
@@ -18252,7 +20710,7 @@
 </p:sld>
 </file>
 
-<file path=ppt/slides/slide27.xml><?xml version="1.0" encoding="utf-8"?>
+<file path=ppt/slides/slide29.xml><?xml version="1.0" encoding="utf-8"?>
 <p:sld xmlns:a="http://schemas.openxmlformats.org/drawingml/2006/main" xmlns:r="http://schemas.openxmlformats.org/officeDocument/2006/relationships" xmlns:p="http://schemas.openxmlformats.org/presentationml/2006/main">
   <p:cSld>
     <p:spTree>
@@ -19927,6 +22385,2869 @@
     <p:extLst>
       <p:ext uri="{BB962C8B-B14F-4D97-AF65-F5344CB8AC3E}">
         <p14:creationId xmlns:p14="http://schemas.microsoft.com/office/powerpoint/2010/main" val="1937105352"/>
+      </p:ext>
+    </p:extLst>
+  </p:cSld>
+  <p:clrMapOvr>
+    <a:masterClrMapping/>
+  </p:clrMapOvr>
+</p:sld>
+</file>
+
+<file path=ppt/slides/slide30.xml><?xml version="1.0" encoding="utf-8"?>
+<p:sld xmlns:a="http://schemas.openxmlformats.org/drawingml/2006/main" xmlns:r="http://schemas.openxmlformats.org/officeDocument/2006/relationships" xmlns:p="http://schemas.openxmlformats.org/presentationml/2006/main">
+  <p:cSld>
+    <p:spTree>
+      <p:nvGrpSpPr>
+        <p:cNvPr id="1" name="">
+          <a:extLst>
+            <a:ext uri="{FF2B5EF4-FFF2-40B4-BE49-F238E27FC236}">
+              <a16:creationId xmlns:a16="http://schemas.microsoft.com/office/drawing/2014/main" id="{E49A5B38-5BF4-E155-4DED-868536BCF8B4}"/>
+            </a:ext>
+          </a:extLst>
+        </p:cNvPr>
+        <p:cNvGrpSpPr/>
+        <p:nvPr/>
+      </p:nvGrpSpPr>
+      <p:grpSpPr>
+        <a:xfrm>
+          <a:off x="0" y="0"/>
+          <a:ext cx="0" cy="0"/>
+          <a:chOff x="0" y="0"/>
+          <a:chExt cx="0" cy="0"/>
+        </a:xfrm>
+      </p:grpSpPr>
+      <p:graphicFrame>
+        <p:nvGraphicFramePr>
+          <p:cNvPr id="5" name="Table 4">
+            <a:extLst>
+              <a:ext uri="{FF2B5EF4-FFF2-40B4-BE49-F238E27FC236}">
+                <a16:creationId xmlns:a16="http://schemas.microsoft.com/office/drawing/2014/main" id="{7A97AFD2-B552-C6EE-6388-73E468202C7A}"/>
+              </a:ext>
+            </a:extLst>
+          </p:cNvPr>
+          <p:cNvGraphicFramePr>
+            <a:graphicFrameLocks noGrp="1"/>
+          </p:cNvGraphicFramePr>
+          <p:nvPr/>
+        </p:nvGraphicFramePr>
+        <p:xfrm>
+          <a:off x="0" y="1"/>
+          <a:ext cx="12192000" cy="365760"/>
+        </p:xfrm>
+        <a:graphic>
+          <a:graphicData uri="http://schemas.openxmlformats.org/drawingml/2006/table">
+            <a:tbl>
+              <a:tblPr firstRow="1" bandRow="1">
+                <a:tableStyleId>{5C22544A-7EE6-4342-B048-85BDC9FD1C3A}</a:tableStyleId>
+              </a:tblPr>
+              <a:tblGrid>
+                <a:gridCol w="12192000">
+                  <a:extLst>
+                    <a:ext uri="{9D8B030D-6E8A-4147-A177-3AD203B41FA5}">
+                      <a16:colId xmlns:a16="http://schemas.microsoft.com/office/drawing/2014/main" val="20000"/>
+                    </a:ext>
+                  </a:extLst>
+                </a:gridCol>
+              </a:tblGrid>
+              <a:tr h="321276">
+                <a:tc>
+                  <a:txBody>
+                    <a:bodyPr/>
+                    <a:lstStyle/>
+                    <a:p>
+                      <a:r>
+                        <a:rPr lang="en-US" sz="1800" dirty="0"/>
+                        <a:t>The POSIX file system semantics</a:t>
+                      </a:r>
+                      <a:endParaRPr lang="ru-RU" sz="1800" dirty="0"/>
+                    </a:p>
+                  </a:txBody>
+                  <a:tcPr/>
+                </a:tc>
+                <a:extLst>
+                  <a:ext uri="{0D108BD9-81ED-4DB2-BD59-A6C34878D82A}">
+                    <a16:rowId xmlns:a16="http://schemas.microsoft.com/office/drawing/2014/main" val="10000"/>
+                  </a:ext>
+                </a:extLst>
+              </a:tr>
+            </a:tbl>
+          </a:graphicData>
+        </a:graphic>
+      </p:graphicFrame>
+      <p:graphicFrame>
+        <p:nvGraphicFramePr>
+          <p:cNvPr id="6" name="Table 5">
+            <a:extLst>
+              <a:ext uri="{FF2B5EF4-FFF2-40B4-BE49-F238E27FC236}">
+                <a16:creationId xmlns:a16="http://schemas.microsoft.com/office/drawing/2014/main" id="{BD2A3562-1743-8A0F-E76E-01878A401169}"/>
+              </a:ext>
+            </a:extLst>
+          </p:cNvPr>
+          <p:cNvGraphicFramePr>
+            <a:graphicFrameLocks noGrp="1"/>
+          </p:cNvGraphicFramePr>
+          <p:nvPr/>
+        </p:nvGraphicFramePr>
+        <p:xfrm>
+          <a:off x="0" y="6532604"/>
+          <a:ext cx="12192000" cy="365760"/>
+        </p:xfrm>
+        <a:graphic>
+          <a:graphicData uri="http://schemas.openxmlformats.org/drawingml/2006/table">
+            <a:tbl>
+              <a:tblPr firstRow="1" bandRow="1">
+                <a:tableStyleId>{5C22544A-7EE6-4342-B048-85BDC9FD1C3A}</a:tableStyleId>
+              </a:tblPr>
+              <a:tblGrid>
+                <a:gridCol w="12192000">
+                  <a:extLst>
+                    <a:ext uri="{9D8B030D-6E8A-4147-A177-3AD203B41FA5}">
+                      <a16:colId xmlns:a16="http://schemas.microsoft.com/office/drawing/2014/main" val="20000"/>
+                    </a:ext>
+                  </a:extLst>
+                </a:gridCol>
+              </a:tblGrid>
+              <a:tr h="308094">
+                <a:tc>
+                  <a:txBody>
+                    <a:bodyPr/>
+                    <a:lstStyle/>
+                    <a:p>
+                      <a:endParaRPr lang="ru-RU" dirty="0"/>
+                    </a:p>
+                  </a:txBody>
+                  <a:tcPr/>
+                </a:tc>
+                <a:extLst>
+                  <a:ext uri="{0D108BD9-81ED-4DB2-BD59-A6C34878D82A}">
+                    <a16:rowId xmlns:a16="http://schemas.microsoft.com/office/drawing/2014/main" val="10000"/>
+                  </a:ext>
+                </a:extLst>
+              </a:tr>
+            </a:tbl>
+          </a:graphicData>
+        </a:graphic>
+      </p:graphicFrame>
+      <p:graphicFrame>
+        <p:nvGraphicFramePr>
+          <p:cNvPr id="2" name="Table 1">
+            <a:extLst>
+              <a:ext uri="{FF2B5EF4-FFF2-40B4-BE49-F238E27FC236}">
+                <a16:creationId xmlns:a16="http://schemas.microsoft.com/office/drawing/2014/main" id="{152A7E98-2E32-DBD2-D7EA-B555401A5148}"/>
+              </a:ext>
+            </a:extLst>
+          </p:cNvPr>
+          <p:cNvGraphicFramePr>
+            <a:graphicFrameLocks noGrp="1"/>
+          </p:cNvGraphicFramePr>
+          <p:nvPr>
+            <p:extLst>
+              <p:ext uri="{D42A27DB-BD31-4B8C-83A1-F6EECF244321}">
+                <p14:modId xmlns:p14="http://schemas.microsoft.com/office/powerpoint/2010/main" val="2545839300"/>
+              </p:ext>
+            </p:extLst>
+          </p:nvPr>
+        </p:nvGraphicFramePr>
+        <p:xfrm>
+          <a:off x="0" y="342613"/>
+          <a:ext cx="12192000" cy="3702990"/>
+        </p:xfrm>
+        <a:graphic>
+          <a:graphicData uri="http://schemas.openxmlformats.org/drawingml/2006/table">
+            <a:tbl>
+              <a:tblPr firstRow="1" bandRow="1">
+                <a:tableStyleId>{3B4B98B0-60AC-42C2-AFA5-B58CD77FA1E5}</a:tableStyleId>
+              </a:tblPr>
+              <a:tblGrid>
+                <a:gridCol w="6096000">
+                  <a:extLst>
+                    <a:ext uri="{9D8B030D-6E8A-4147-A177-3AD203B41FA5}">
+                      <a16:colId xmlns:a16="http://schemas.microsoft.com/office/drawing/2014/main" val="20000"/>
+                    </a:ext>
+                  </a:extLst>
+                </a:gridCol>
+                <a:gridCol w="6096000">
+                  <a:extLst>
+                    <a:ext uri="{9D8B030D-6E8A-4147-A177-3AD203B41FA5}">
+                      <a16:colId xmlns:a16="http://schemas.microsoft.com/office/drawing/2014/main" val="3688292786"/>
+                    </a:ext>
+                  </a:extLst>
+                </a:gridCol>
+              </a:tblGrid>
+              <a:tr h="434175">
+                <a:tc>
+                  <a:txBody>
+                    <a:bodyPr/>
+                    <a:lstStyle/>
+                    <a:p>
+                      <a:r>
+                        <a:rPr lang="en-US" dirty="0"/>
+                        <a:t>A file system is a shared resource: concurrent access and races</a:t>
+                      </a:r>
+                      <a:endParaRPr lang="ru-RU" dirty="0"/>
+                    </a:p>
+                  </a:txBody>
+                  <a:tcPr/>
+                </a:tc>
+                <a:tc>
+                  <a:txBody>
+                    <a:bodyPr/>
+                    <a:lstStyle/>
+                    <a:p>
+                      <a:endParaRPr lang="ru-RU" dirty="0"/>
+                    </a:p>
+                  </a:txBody>
+                  <a:tcPr/>
+                </a:tc>
+                <a:extLst>
+                  <a:ext uri="{0D108BD9-81ED-4DB2-BD59-A6C34878D82A}">
+                    <a16:rowId xmlns:a16="http://schemas.microsoft.com/office/drawing/2014/main" val="10000"/>
+                  </a:ext>
+                </a:extLst>
+              </a:tr>
+              <a:tr h="434175">
+                <a:tc gridSpan="2">
+                  <a:txBody>
+                    <a:bodyPr/>
+                    <a:lstStyle/>
+                    <a:p>
+                      <a:r>
+                        <a:rPr lang="en-US" dirty="0"/>
+                        <a:t>A </a:t>
+                      </a:r>
+                      <a:r>
+                        <a:rPr lang="en-US" dirty="0" err="1"/>
+                        <a:t>userspace</a:t>
+                      </a:r>
+                      <a:r>
+                        <a:rPr lang="en-US" dirty="0"/>
+                        <a:t> process can race with the kernel as well.</a:t>
+                      </a:r>
+                      <a:endParaRPr lang="ru-RU" dirty="0"/>
+                    </a:p>
+                  </a:txBody>
+                  <a:tcPr/>
+                </a:tc>
+                <a:tc hMerge="1">
+                  <a:txBody>
+                    <a:bodyPr/>
+                    <a:lstStyle/>
+                    <a:p>
+                      <a:endParaRPr lang="ru-RU" dirty="0"/>
+                    </a:p>
+                  </a:txBody>
+                  <a:tcPr/>
+                </a:tc>
+                <a:extLst>
+                  <a:ext uri="{0D108BD9-81ED-4DB2-BD59-A6C34878D82A}">
+                    <a16:rowId xmlns:a16="http://schemas.microsoft.com/office/drawing/2014/main" val="3908480295"/>
+                  </a:ext>
+                </a:extLst>
+              </a:tr>
+              <a:tr h="434175">
+                <a:tc>
+                  <a:txBody>
+                    <a:bodyPr/>
+                    <a:lstStyle/>
+                    <a:p>
+                      <a:pPr marL="0" indent="0">
+                        <a:buFont typeface="Arial" panose="020B0604020202020204" pitchFamily="34" charset="0"/>
+                        <a:buNone/>
+                      </a:pPr>
+                      <a:r>
+                        <a:rPr lang="en-US" sz="1400" dirty="0" err="1">
+                          <a:latin typeface="Menlo" panose="020B0609030804020204" pitchFamily="49" charset="0"/>
+                          <a:ea typeface="Menlo" panose="020B0609030804020204" pitchFamily="49" charset="0"/>
+                          <a:cs typeface="Menlo" panose="020B0609030804020204" pitchFamily="49" charset="0"/>
+                        </a:rPr>
+                        <a:t>fd</a:t>
+                      </a:r>
+                      <a:r>
+                        <a:rPr lang="en-US" sz="1400" dirty="0">
+                          <a:latin typeface="Menlo" panose="020B0609030804020204" pitchFamily="49" charset="0"/>
+                          <a:ea typeface="Menlo" panose="020B0609030804020204" pitchFamily="49" charset="0"/>
+                          <a:cs typeface="Menlo" panose="020B0609030804020204" pitchFamily="49" charset="0"/>
+                        </a:rPr>
+                        <a:t> = open(“/a/file”, O_RDWR | O_DIRECT);</a:t>
+                      </a:r>
+                    </a:p>
+                    <a:p>
+                      <a:pPr marL="0" indent="0">
+                        <a:buFont typeface="Arial" panose="020B0604020202020204" pitchFamily="34" charset="0"/>
+                        <a:buNone/>
+                      </a:pPr>
+                      <a:r>
+                        <a:rPr lang="en-US" sz="1400" dirty="0">
+                          <a:latin typeface="Menlo" panose="020B0609030804020204" pitchFamily="49" charset="0"/>
+                          <a:ea typeface="Menlo" panose="020B0609030804020204" pitchFamily="49" charset="0"/>
+                          <a:cs typeface="Menlo" panose="020B0609030804020204" pitchFamily="49" charset="0"/>
+                        </a:rPr>
+                        <a:t>write(</a:t>
+                      </a:r>
+                      <a:r>
+                        <a:rPr lang="en-US" sz="1400" dirty="0" err="1">
+                          <a:latin typeface="Menlo" panose="020B0609030804020204" pitchFamily="49" charset="0"/>
+                          <a:ea typeface="Menlo" panose="020B0609030804020204" pitchFamily="49" charset="0"/>
+                          <a:cs typeface="Menlo" panose="020B0609030804020204" pitchFamily="49" charset="0"/>
+                        </a:rPr>
+                        <a:t>fd</a:t>
+                      </a:r>
+                      <a:r>
+                        <a:rPr lang="en-US" sz="1400" dirty="0">
+                          <a:latin typeface="Menlo" panose="020B0609030804020204" pitchFamily="49" charset="0"/>
+                          <a:ea typeface="Menlo" panose="020B0609030804020204" pitchFamily="49" charset="0"/>
+                          <a:cs typeface="Menlo" panose="020B0609030804020204" pitchFamily="49" charset="0"/>
+                        </a:rPr>
+                        <a:t>, </a:t>
+                      </a:r>
+                      <a:r>
+                        <a:rPr lang="en-US" sz="1400" dirty="0" err="1">
+                          <a:latin typeface="Menlo" panose="020B0609030804020204" pitchFamily="49" charset="0"/>
+                          <a:ea typeface="Menlo" panose="020B0609030804020204" pitchFamily="49" charset="0"/>
+                          <a:cs typeface="Menlo" panose="020B0609030804020204" pitchFamily="49" charset="0"/>
+                        </a:rPr>
+                        <a:t>buf</a:t>
+                      </a:r>
+                      <a:r>
+                        <a:rPr lang="en-US" sz="1400" dirty="0">
+                          <a:latin typeface="Menlo" panose="020B0609030804020204" pitchFamily="49" charset="0"/>
+                          <a:ea typeface="Menlo" panose="020B0609030804020204" pitchFamily="49" charset="0"/>
+                          <a:cs typeface="Menlo" panose="020B0609030804020204" pitchFamily="49" charset="0"/>
+                        </a:rPr>
+                        <a:t>, </a:t>
+                      </a:r>
+                      <a:r>
+                        <a:rPr lang="en-US" sz="1400" dirty="0" err="1">
+                          <a:latin typeface="Menlo" panose="020B0609030804020204" pitchFamily="49" charset="0"/>
+                          <a:ea typeface="Menlo" panose="020B0609030804020204" pitchFamily="49" charset="0"/>
+                          <a:cs typeface="Menlo" panose="020B0609030804020204" pitchFamily="49" charset="0"/>
+                        </a:rPr>
+                        <a:t>len</a:t>
+                      </a:r>
+                      <a:r>
+                        <a:rPr lang="en-US" sz="1400" dirty="0">
+                          <a:latin typeface="Menlo" panose="020B0609030804020204" pitchFamily="49" charset="0"/>
+                          <a:ea typeface="Menlo" panose="020B0609030804020204" pitchFamily="49" charset="0"/>
+                          <a:cs typeface="Menlo" panose="020B0609030804020204" pitchFamily="49" charset="0"/>
+                        </a:rPr>
+                        <a:t>);</a:t>
+                      </a:r>
+                    </a:p>
+                    <a:p>
+                      <a:pPr marL="0" indent="0">
+                        <a:buFont typeface="Arial" panose="020B0604020202020204" pitchFamily="34" charset="0"/>
+                        <a:buNone/>
+                      </a:pPr>
+                      <a:r>
+                        <a:rPr lang="en-US" sz="1400" dirty="0">
+                          <a:latin typeface="Menlo" panose="020B0609030804020204" pitchFamily="49" charset="0"/>
+                          <a:ea typeface="Menlo" panose="020B0609030804020204" pitchFamily="49" charset="0"/>
+                          <a:cs typeface="Menlo" panose="020B0609030804020204" pitchFamily="49" charset="0"/>
+                        </a:rPr>
+                        <a:t>…</a:t>
+                      </a:r>
+                      <a:endParaRPr lang="ru-RU" sz="1400" dirty="0">
+                        <a:latin typeface="Menlo" panose="020B0609030804020204" pitchFamily="49" charset="0"/>
+                        <a:ea typeface="Menlo" panose="020B0609030804020204" pitchFamily="49" charset="0"/>
+                        <a:cs typeface="Menlo" panose="020B0609030804020204" pitchFamily="49" charset="0"/>
+                      </a:endParaRPr>
+                    </a:p>
+                  </a:txBody>
+                  <a:tcPr/>
+                </a:tc>
+                <a:tc>
+                  <a:txBody>
+                    <a:bodyPr/>
+                    <a:lstStyle/>
+                    <a:p>
+                      <a:pPr marL="0" indent="0">
+                        <a:buFont typeface="Arial" panose="020B0604020202020204" pitchFamily="34" charset="0"/>
+                        <a:buNone/>
+                      </a:pPr>
+                      <a:endParaRPr lang="en-US" dirty="0"/>
+                    </a:p>
+                    <a:p>
+                      <a:pPr marL="0" indent="0">
+                        <a:buFont typeface="Arial" panose="020B0604020202020204" pitchFamily="34" charset="0"/>
+                        <a:buNone/>
+                      </a:pPr>
+                      <a:endParaRPr lang="en-US" dirty="0"/>
+                    </a:p>
+                    <a:p>
+                      <a:pPr marL="0" indent="0">
+                        <a:buFont typeface="Arial" panose="020B0604020202020204" pitchFamily="34" charset="0"/>
+                        <a:buNone/>
+                      </a:pPr>
+                      <a:endParaRPr lang="en-US" dirty="0"/>
+                    </a:p>
+                  </a:txBody>
+                  <a:tcPr/>
+                </a:tc>
+                <a:extLst>
+                  <a:ext uri="{0D108BD9-81ED-4DB2-BD59-A6C34878D82A}">
+                    <a16:rowId xmlns:a16="http://schemas.microsoft.com/office/drawing/2014/main" val="3226834803"/>
+                  </a:ext>
+                </a:extLst>
+              </a:tr>
+              <a:tr h="434175">
+                <a:tc>
+                  <a:txBody>
+                    <a:bodyPr/>
+                    <a:lstStyle/>
+                    <a:p>
+                      <a:pPr marL="0" indent="0">
+                        <a:buFont typeface="Arial" panose="020B0604020202020204" pitchFamily="34" charset="0"/>
+                        <a:buNone/>
+                      </a:pPr>
+                      <a:r>
+                        <a:rPr lang="en-US" sz="1400" dirty="0" err="1">
+                          <a:latin typeface="Menlo" panose="020B0609030804020204" pitchFamily="49" charset="0"/>
+                          <a:ea typeface="Menlo" panose="020B0609030804020204" pitchFamily="49" charset="0"/>
+                          <a:cs typeface="Menlo" panose="020B0609030804020204" pitchFamily="49" charset="0"/>
+                        </a:rPr>
+                        <a:t>fd</a:t>
+                      </a:r>
+                      <a:r>
+                        <a:rPr lang="en-US" sz="1400" dirty="0">
+                          <a:latin typeface="Menlo" panose="020B0609030804020204" pitchFamily="49" charset="0"/>
+                          <a:ea typeface="Menlo" panose="020B0609030804020204" pitchFamily="49" charset="0"/>
+                          <a:cs typeface="Menlo" panose="020B0609030804020204" pitchFamily="49" charset="0"/>
+                        </a:rPr>
+                        <a:t> = open(“/a/file”, O_RDWR | O_DIRECT);</a:t>
+                      </a:r>
+                    </a:p>
+                    <a:p>
+                      <a:pPr marL="0" indent="0">
+                        <a:buFont typeface="Arial" panose="020B0604020202020204" pitchFamily="34" charset="0"/>
+                        <a:buNone/>
+                      </a:pPr>
+                      <a:r>
+                        <a:rPr lang="en-US" sz="1400" dirty="0">
+                          <a:latin typeface="Menlo" panose="020B0609030804020204" pitchFamily="49" charset="0"/>
+                          <a:ea typeface="Menlo" panose="020B0609030804020204" pitchFamily="49" charset="0"/>
+                          <a:cs typeface="Menlo" panose="020B0609030804020204" pitchFamily="49" charset="0"/>
+                        </a:rPr>
+                        <a:t>write(</a:t>
+                      </a:r>
+                      <a:r>
+                        <a:rPr lang="en-US" sz="1400" dirty="0" err="1">
+                          <a:latin typeface="Menlo" panose="020B0609030804020204" pitchFamily="49" charset="0"/>
+                          <a:ea typeface="Menlo" panose="020B0609030804020204" pitchFamily="49" charset="0"/>
+                          <a:cs typeface="Menlo" panose="020B0609030804020204" pitchFamily="49" charset="0"/>
+                        </a:rPr>
+                        <a:t>fd</a:t>
+                      </a:r>
+                      <a:r>
+                        <a:rPr lang="en-US" sz="1400" dirty="0">
+                          <a:latin typeface="Menlo" panose="020B0609030804020204" pitchFamily="49" charset="0"/>
+                          <a:ea typeface="Menlo" panose="020B0609030804020204" pitchFamily="49" charset="0"/>
+                          <a:cs typeface="Menlo" panose="020B0609030804020204" pitchFamily="49" charset="0"/>
+                        </a:rPr>
+                        <a:t>, </a:t>
+                      </a:r>
+                      <a:r>
+                        <a:rPr lang="en-US" sz="1400" dirty="0" err="1">
+                          <a:latin typeface="Menlo" panose="020B0609030804020204" pitchFamily="49" charset="0"/>
+                          <a:ea typeface="Menlo" panose="020B0609030804020204" pitchFamily="49" charset="0"/>
+                          <a:cs typeface="Menlo" panose="020B0609030804020204" pitchFamily="49" charset="0"/>
+                        </a:rPr>
+                        <a:t>buf</a:t>
+                      </a:r>
+                      <a:r>
+                        <a:rPr lang="en-US" sz="1400" dirty="0">
+                          <a:latin typeface="Menlo" panose="020B0609030804020204" pitchFamily="49" charset="0"/>
+                          <a:ea typeface="Menlo" panose="020B0609030804020204" pitchFamily="49" charset="0"/>
+                          <a:cs typeface="Menlo" panose="020B0609030804020204" pitchFamily="49" charset="0"/>
+                        </a:rPr>
+                        <a:t>, </a:t>
+                      </a:r>
+                      <a:r>
+                        <a:rPr lang="en-US" sz="1400" dirty="0" err="1">
+                          <a:latin typeface="Menlo" panose="020B0609030804020204" pitchFamily="49" charset="0"/>
+                          <a:ea typeface="Menlo" panose="020B0609030804020204" pitchFamily="49" charset="0"/>
+                          <a:cs typeface="Menlo" panose="020B0609030804020204" pitchFamily="49" charset="0"/>
+                        </a:rPr>
+                        <a:t>len</a:t>
+                      </a:r>
+                      <a:r>
+                        <a:rPr lang="en-US" sz="1400" dirty="0">
+                          <a:latin typeface="Menlo" panose="020B0609030804020204" pitchFamily="49" charset="0"/>
+                          <a:ea typeface="Menlo" panose="020B0609030804020204" pitchFamily="49" charset="0"/>
+                          <a:cs typeface="Menlo" panose="020B0609030804020204" pitchFamily="49" charset="0"/>
+                        </a:rPr>
+                        <a:t>);</a:t>
+                      </a:r>
+                    </a:p>
+                    <a:p>
+                      <a:pPr marL="0" indent="0">
+                        <a:buFont typeface="Arial" panose="020B0604020202020204" pitchFamily="34" charset="0"/>
+                        <a:buNone/>
+                      </a:pPr>
+                      <a:r>
+                        <a:rPr lang="en-US" sz="1400" dirty="0">
+                          <a:latin typeface="Menlo" panose="020B0609030804020204" pitchFamily="49" charset="0"/>
+                          <a:ea typeface="Menlo" panose="020B0609030804020204" pitchFamily="49" charset="0"/>
+                          <a:cs typeface="Menlo" panose="020B0609030804020204" pitchFamily="49" charset="0"/>
+                        </a:rPr>
+                        <a:t>…</a:t>
+                      </a:r>
+                      <a:endParaRPr lang="ru-RU" sz="1400" dirty="0">
+                        <a:latin typeface="Menlo" panose="020B0609030804020204" pitchFamily="49" charset="0"/>
+                        <a:ea typeface="Menlo" panose="020B0609030804020204" pitchFamily="49" charset="0"/>
+                        <a:cs typeface="Menlo" panose="020B0609030804020204" pitchFamily="49" charset="0"/>
+                      </a:endParaRPr>
+                    </a:p>
+                  </a:txBody>
+                  <a:tcPr/>
+                </a:tc>
+                <a:tc>
+                  <a:txBody>
+                    <a:bodyPr/>
+                    <a:lstStyle/>
+                    <a:p>
+                      <a:pPr marL="0" indent="0">
+                        <a:buFont typeface="Arial" panose="020B0604020202020204" pitchFamily="34" charset="0"/>
+                        <a:buNone/>
+                      </a:pPr>
+                      <a:endParaRPr lang="en-US" dirty="0"/>
+                    </a:p>
+                  </a:txBody>
+                  <a:tcPr/>
+                </a:tc>
+                <a:extLst>
+                  <a:ext uri="{0D108BD9-81ED-4DB2-BD59-A6C34878D82A}">
+                    <a16:rowId xmlns:a16="http://schemas.microsoft.com/office/drawing/2014/main" val="1075154831"/>
+                  </a:ext>
+                </a:extLst>
+              </a:tr>
+              <a:tr h="434175">
+                <a:tc>
+                  <a:txBody>
+                    <a:bodyPr/>
+                    <a:lstStyle/>
+                    <a:p>
+                      <a:pPr marL="0" indent="0">
+                        <a:buFont typeface="Arial" panose="020B0604020202020204" pitchFamily="34" charset="0"/>
+                        <a:buNone/>
+                      </a:pPr>
+                      <a:r>
+                        <a:rPr lang="en-US" sz="1400" dirty="0" err="1">
+                          <a:latin typeface="Menlo" panose="020B0609030804020204" pitchFamily="49" charset="0"/>
+                          <a:ea typeface="Menlo" panose="020B0609030804020204" pitchFamily="49" charset="0"/>
+                          <a:cs typeface="Menlo" panose="020B0609030804020204" pitchFamily="49" charset="0"/>
+                        </a:rPr>
+                        <a:t>fd</a:t>
+                      </a:r>
+                      <a:r>
+                        <a:rPr lang="en-US" sz="1400" dirty="0">
+                          <a:latin typeface="Menlo" panose="020B0609030804020204" pitchFamily="49" charset="0"/>
+                          <a:ea typeface="Menlo" panose="020B0609030804020204" pitchFamily="49" charset="0"/>
+                          <a:cs typeface="Menlo" panose="020B0609030804020204" pitchFamily="49" charset="0"/>
+                        </a:rPr>
+                        <a:t> = open(“/a/file”, O_RDONLY | O_DIRECT);</a:t>
+                      </a:r>
+                    </a:p>
+                    <a:p>
+                      <a:pPr marL="0" indent="0">
+                        <a:buFont typeface="Arial" panose="020B0604020202020204" pitchFamily="34" charset="0"/>
+                        <a:buNone/>
+                      </a:pPr>
+                      <a:r>
+                        <a:rPr lang="en-US" sz="1400" dirty="0">
+                          <a:latin typeface="Menlo" panose="020B0609030804020204" pitchFamily="49" charset="0"/>
+                          <a:ea typeface="Menlo" panose="020B0609030804020204" pitchFamily="49" charset="0"/>
+                          <a:cs typeface="Menlo" panose="020B0609030804020204" pitchFamily="49" charset="0"/>
+                        </a:rPr>
+                        <a:t>read(</a:t>
+                      </a:r>
+                      <a:r>
+                        <a:rPr lang="en-US" sz="1400" dirty="0" err="1">
+                          <a:latin typeface="Menlo" panose="020B0609030804020204" pitchFamily="49" charset="0"/>
+                          <a:ea typeface="Menlo" panose="020B0609030804020204" pitchFamily="49" charset="0"/>
+                          <a:cs typeface="Menlo" panose="020B0609030804020204" pitchFamily="49" charset="0"/>
+                        </a:rPr>
+                        <a:t>fd</a:t>
+                      </a:r>
+                      <a:r>
+                        <a:rPr lang="en-US" sz="1400" dirty="0">
+                          <a:latin typeface="Menlo" panose="020B0609030804020204" pitchFamily="49" charset="0"/>
+                          <a:ea typeface="Menlo" panose="020B0609030804020204" pitchFamily="49" charset="0"/>
+                          <a:cs typeface="Menlo" panose="020B0609030804020204" pitchFamily="49" charset="0"/>
+                        </a:rPr>
+                        <a:t>, </a:t>
+                      </a:r>
+                      <a:r>
+                        <a:rPr lang="en-US" sz="1400" dirty="0" err="1">
+                          <a:latin typeface="Menlo" panose="020B0609030804020204" pitchFamily="49" charset="0"/>
+                          <a:ea typeface="Menlo" panose="020B0609030804020204" pitchFamily="49" charset="0"/>
+                          <a:cs typeface="Menlo" panose="020B0609030804020204" pitchFamily="49" charset="0"/>
+                        </a:rPr>
+                        <a:t>buf</a:t>
+                      </a:r>
+                      <a:r>
+                        <a:rPr lang="en-US" sz="1400" dirty="0">
+                          <a:latin typeface="Menlo" panose="020B0609030804020204" pitchFamily="49" charset="0"/>
+                          <a:ea typeface="Menlo" panose="020B0609030804020204" pitchFamily="49" charset="0"/>
+                          <a:cs typeface="Menlo" panose="020B0609030804020204" pitchFamily="49" charset="0"/>
+                        </a:rPr>
+                        <a:t>, </a:t>
+                      </a:r>
+                      <a:r>
+                        <a:rPr lang="en-US" sz="1400" dirty="0" err="1">
+                          <a:latin typeface="Menlo" panose="020B0609030804020204" pitchFamily="49" charset="0"/>
+                          <a:ea typeface="Menlo" panose="020B0609030804020204" pitchFamily="49" charset="0"/>
+                          <a:cs typeface="Menlo" panose="020B0609030804020204" pitchFamily="49" charset="0"/>
+                        </a:rPr>
+                        <a:t>len</a:t>
+                      </a:r>
+                      <a:r>
+                        <a:rPr lang="en-US" sz="1400" dirty="0">
+                          <a:latin typeface="Menlo" panose="020B0609030804020204" pitchFamily="49" charset="0"/>
+                          <a:ea typeface="Menlo" panose="020B0609030804020204" pitchFamily="49" charset="0"/>
+                          <a:cs typeface="Menlo" panose="020B0609030804020204" pitchFamily="49" charset="0"/>
+                        </a:rPr>
+                        <a:t>);</a:t>
+                      </a:r>
+                    </a:p>
+                    <a:p>
+                      <a:pPr marL="0" indent="0">
+                        <a:buFont typeface="Arial" panose="020B0604020202020204" pitchFamily="34" charset="0"/>
+                        <a:buNone/>
+                      </a:pPr>
+                      <a:r>
+                        <a:rPr lang="en-US" sz="1400" dirty="0">
+                          <a:latin typeface="Menlo" panose="020B0609030804020204" pitchFamily="49" charset="0"/>
+                          <a:ea typeface="Menlo" panose="020B0609030804020204" pitchFamily="49" charset="0"/>
+                          <a:cs typeface="Menlo" panose="020B0609030804020204" pitchFamily="49" charset="0"/>
+                        </a:rPr>
+                        <a:t>…</a:t>
+                      </a:r>
+                      <a:endParaRPr lang="ru-RU" sz="1400" dirty="0">
+                        <a:latin typeface="Menlo" panose="020B0609030804020204" pitchFamily="49" charset="0"/>
+                        <a:ea typeface="Menlo" panose="020B0609030804020204" pitchFamily="49" charset="0"/>
+                        <a:cs typeface="Menlo" panose="020B0609030804020204" pitchFamily="49" charset="0"/>
+                      </a:endParaRPr>
+                    </a:p>
+                  </a:txBody>
+                  <a:tcPr/>
+                </a:tc>
+                <a:tc>
+                  <a:txBody>
+                    <a:bodyPr/>
+                    <a:lstStyle/>
+                    <a:p>
+                      <a:pPr marL="0" indent="0">
+                        <a:buFont typeface="Arial" panose="020B0604020202020204" pitchFamily="34" charset="0"/>
+                        <a:buNone/>
+                      </a:pPr>
+                      <a:endParaRPr lang="en-US" dirty="0"/>
+                    </a:p>
+                    <a:p>
+                      <a:pPr marL="0" indent="0">
+                        <a:buFont typeface="Arial" panose="020B0604020202020204" pitchFamily="34" charset="0"/>
+                        <a:buNone/>
+                      </a:pPr>
+                      <a:endParaRPr lang="en-US" dirty="0"/>
+                    </a:p>
+                    <a:p>
+                      <a:pPr marL="0" indent="0">
+                        <a:buFont typeface="Arial" panose="020B0604020202020204" pitchFamily="34" charset="0"/>
+                        <a:buNone/>
+                      </a:pPr>
+                      <a:endParaRPr lang="en-US" dirty="0"/>
+                    </a:p>
+                    <a:p>
+                      <a:pPr marL="0" indent="0">
+                        <a:buFont typeface="Arial" panose="020B0604020202020204" pitchFamily="34" charset="0"/>
+                        <a:buNone/>
+                      </a:pPr>
+                      <a:endParaRPr lang="en-US" dirty="0"/>
+                    </a:p>
+                  </a:txBody>
+                  <a:tcPr/>
+                </a:tc>
+                <a:extLst>
+                  <a:ext uri="{0D108BD9-81ED-4DB2-BD59-A6C34878D82A}">
+                    <a16:rowId xmlns:a16="http://schemas.microsoft.com/office/drawing/2014/main" val="2595636294"/>
+                  </a:ext>
+                </a:extLst>
+              </a:tr>
+            </a:tbl>
+          </a:graphicData>
+        </a:graphic>
+      </p:graphicFrame>
+    </p:spTree>
+    <p:extLst>
+      <p:ext uri="{BB962C8B-B14F-4D97-AF65-F5344CB8AC3E}">
+        <p14:creationId xmlns:p14="http://schemas.microsoft.com/office/powerpoint/2010/main" val="920208087"/>
+      </p:ext>
+    </p:extLst>
+  </p:cSld>
+  <p:clrMapOvr>
+    <a:masterClrMapping/>
+  </p:clrMapOvr>
+</p:sld>
+</file>
+
+<file path=ppt/slides/slide31.xml><?xml version="1.0" encoding="utf-8"?>
+<p:sld xmlns:a="http://schemas.openxmlformats.org/drawingml/2006/main" xmlns:r="http://schemas.openxmlformats.org/officeDocument/2006/relationships" xmlns:p="http://schemas.openxmlformats.org/presentationml/2006/main">
+  <p:cSld>
+    <p:spTree>
+      <p:nvGrpSpPr>
+        <p:cNvPr id="1" name="">
+          <a:extLst>
+            <a:ext uri="{FF2B5EF4-FFF2-40B4-BE49-F238E27FC236}">
+              <a16:creationId xmlns:a16="http://schemas.microsoft.com/office/drawing/2014/main" id="{AE109227-E66A-6661-2388-DC1184623D47}"/>
+            </a:ext>
+          </a:extLst>
+        </p:cNvPr>
+        <p:cNvGrpSpPr/>
+        <p:nvPr/>
+      </p:nvGrpSpPr>
+      <p:grpSpPr>
+        <a:xfrm>
+          <a:off x="0" y="0"/>
+          <a:ext cx="0" cy="0"/>
+          <a:chOff x="0" y="0"/>
+          <a:chExt cx="0" cy="0"/>
+        </a:xfrm>
+      </p:grpSpPr>
+      <p:graphicFrame>
+        <p:nvGraphicFramePr>
+          <p:cNvPr id="5" name="Table 4">
+            <a:extLst>
+              <a:ext uri="{FF2B5EF4-FFF2-40B4-BE49-F238E27FC236}">
+                <a16:creationId xmlns:a16="http://schemas.microsoft.com/office/drawing/2014/main" id="{5D10225E-0A5E-071B-570E-518400C4FC96}"/>
+              </a:ext>
+            </a:extLst>
+          </p:cNvPr>
+          <p:cNvGraphicFramePr>
+            <a:graphicFrameLocks noGrp="1"/>
+          </p:cNvGraphicFramePr>
+          <p:nvPr/>
+        </p:nvGraphicFramePr>
+        <p:xfrm>
+          <a:off x="0" y="1"/>
+          <a:ext cx="12192000" cy="365760"/>
+        </p:xfrm>
+        <a:graphic>
+          <a:graphicData uri="http://schemas.openxmlformats.org/drawingml/2006/table">
+            <a:tbl>
+              <a:tblPr firstRow="1" bandRow="1">
+                <a:tableStyleId>{5C22544A-7EE6-4342-B048-85BDC9FD1C3A}</a:tableStyleId>
+              </a:tblPr>
+              <a:tblGrid>
+                <a:gridCol w="12192000">
+                  <a:extLst>
+                    <a:ext uri="{9D8B030D-6E8A-4147-A177-3AD203B41FA5}">
+                      <a16:colId xmlns:a16="http://schemas.microsoft.com/office/drawing/2014/main" val="20000"/>
+                    </a:ext>
+                  </a:extLst>
+                </a:gridCol>
+              </a:tblGrid>
+              <a:tr h="321276">
+                <a:tc>
+                  <a:txBody>
+                    <a:bodyPr/>
+                    <a:lstStyle/>
+                    <a:p>
+                      <a:r>
+                        <a:rPr lang="en-US" sz="1800" dirty="0"/>
+                        <a:t>The POSIX file system semantics</a:t>
+                      </a:r>
+                      <a:endParaRPr lang="ru-RU" sz="1800" dirty="0"/>
+                    </a:p>
+                  </a:txBody>
+                  <a:tcPr/>
+                </a:tc>
+                <a:extLst>
+                  <a:ext uri="{0D108BD9-81ED-4DB2-BD59-A6C34878D82A}">
+                    <a16:rowId xmlns:a16="http://schemas.microsoft.com/office/drawing/2014/main" val="10000"/>
+                  </a:ext>
+                </a:extLst>
+              </a:tr>
+            </a:tbl>
+          </a:graphicData>
+        </a:graphic>
+      </p:graphicFrame>
+      <p:graphicFrame>
+        <p:nvGraphicFramePr>
+          <p:cNvPr id="6" name="Table 5">
+            <a:extLst>
+              <a:ext uri="{FF2B5EF4-FFF2-40B4-BE49-F238E27FC236}">
+                <a16:creationId xmlns:a16="http://schemas.microsoft.com/office/drawing/2014/main" id="{F37D7709-7D7F-974E-B3E7-147118C0835C}"/>
+              </a:ext>
+            </a:extLst>
+          </p:cNvPr>
+          <p:cNvGraphicFramePr>
+            <a:graphicFrameLocks noGrp="1"/>
+          </p:cNvGraphicFramePr>
+          <p:nvPr/>
+        </p:nvGraphicFramePr>
+        <p:xfrm>
+          <a:off x="0" y="6532604"/>
+          <a:ext cx="12192000" cy="365760"/>
+        </p:xfrm>
+        <a:graphic>
+          <a:graphicData uri="http://schemas.openxmlformats.org/drawingml/2006/table">
+            <a:tbl>
+              <a:tblPr firstRow="1" bandRow="1">
+                <a:tableStyleId>{5C22544A-7EE6-4342-B048-85BDC9FD1C3A}</a:tableStyleId>
+              </a:tblPr>
+              <a:tblGrid>
+                <a:gridCol w="12192000">
+                  <a:extLst>
+                    <a:ext uri="{9D8B030D-6E8A-4147-A177-3AD203B41FA5}">
+                      <a16:colId xmlns:a16="http://schemas.microsoft.com/office/drawing/2014/main" val="20000"/>
+                    </a:ext>
+                  </a:extLst>
+                </a:gridCol>
+              </a:tblGrid>
+              <a:tr h="308094">
+                <a:tc>
+                  <a:txBody>
+                    <a:bodyPr/>
+                    <a:lstStyle/>
+                    <a:p>
+                      <a:endParaRPr lang="ru-RU" dirty="0"/>
+                    </a:p>
+                  </a:txBody>
+                  <a:tcPr/>
+                </a:tc>
+                <a:extLst>
+                  <a:ext uri="{0D108BD9-81ED-4DB2-BD59-A6C34878D82A}">
+                    <a16:rowId xmlns:a16="http://schemas.microsoft.com/office/drawing/2014/main" val="10000"/>
+                  </a:ext>
+                </a:extLst>
+              </a:tr>
+            </a:tbl>
+          </a:graphicData>
+        </a:graphic>
+      </p:graphicFrame>
+      <p:graphicFrame>
+        <p:nvGraphicFramePr>
+          <p:cNvPr id="2" name="Table 1">
+            <a:extLst>
+              <a:ext uri="{FF2B5EF4-FFF2-40B4-BE49-F238E27FC236}">
+                <a16:creationId xmlns:a16="http://schemas.microsoft.com/office/drawing/2014/main" id="{8CF7F778-1597-DB53-1585-24C062592FF9}"/>
+              </a:ext>
+            </a:extLst>
+          </p:cNvPr>
+          <p:cNvGraphicFramePr>
+            <a:graphicFrameLocks noGrp="1"/>
+          </p:cNvGraphicFramePr>
+          <p:nvPr>
+            <p:extLst>
+              <p:ext uri="{D42A27DB-BD31-4B8C-83A1-F6EECF244321}">
+                <p14:modId xmlns:p14="http://schemas.microsoft.com/office/powerpoint/2010/main" val="2526804841"/>
+              </p:ext>
+            </p:extLst>
+          </p:nvPr>
+        </p:nvGraphicFramePr>
+        <p:xfrm>
+          <a:off x="0" y="342613"/>
+          <a:ext cx="12192000" cy="3702990"/>
+        </p:xfrm>
+        <a:graphic>
+          <a:graphicData uri="http://schemas.openxmlformats.org/drawingml/2006/table">
+            <a:tbl>
+              <a:tblPr firstRow="1" bandRow="1">
+                <a:tableStyleId>{3B4B98B0-60AC-42C2-AFA5-B58CD77FA1E5}</a:tableStyleId>
+              </a:tblPr>
+              <a:tblGrid>
+                <a:gridCol w="6096000">
+                  <a:extLst>
+                    <a:ext uri="{9D8B030D-6E8A-4147-A177-3AD203B41FA5}">
+                      <a16:colId xmlns:a16="http://schemas.microsoft.com/office/drawing/2014/main" val="20000"/>
+                    </a:ext>
+                  </a:extLst>
+                </a:gridCol>
+                <a:gridCol w="6096000">
+                  <a:extLst>
+                    <a:ext uri="{9D8B030D-6E8A-4147-A177-3AD203B41FA5}">
+                      <a16:colId xmlns:a16="http://schemas.microsoft.com/office/drawing/2014/main" val="3688292786"/>
+                    </a:ext>
+                  </a:extLst>
+                </a:gridCol>
+              </a:tblGrid>
+              <a:tr h="434175">
+                <a:tc>
+                  <a:txBody>
+                    <a:bodyPr/>
+                    <a:lstStyle/>
+                    <a:p>
+                      <a:r>
+                        <a:rPr lang="en-US" dirty="0"/>
+                        <a:t>A file system is a shared resource: concurrent access and races</a:t>
+                      </a:r>
+                      <a:endParaRPr lang="ru-RU" dirty="0"/>
+                    </a:p>
+                  </a:txBody>
+                  <a:tcPr/>
+                </a:tc>
+                <a:tc>
+                  <a:txBody>
+                    <a:bodyPr/>
+                    <a:lstStyle/>
+                    <a:p>
+                      <a:endParaRPr lang="ru-RU" dirty="0"/>
+                    </a:p>
+                  </a:txBody>
+                  <a:tcPr/>
+                </a:tc>
+                <a:extLst>
+                  <a:ext uri="{0D108BD9-81ED-4DB2-BD59-A6C34878D82A}">
+                    <a16:rowId xmlns:a16="http://schemas.microsoft.com/office/drawing/2014/main" val="10000"/>
+                  </a:ext>
+                </a:extLst>
+              </a:tr>
+              <a:tr h="434175">
+                <a:tc gridSpan="2">
+                  <a:txBody>
+                    <a:bodyPr/>
+                    <a:lstStyle/>
+                    <a:p>
+                      <a:r>
+                        <a:rPr lang="en-US" dirty="0"/>
+                        <a:t>A </a:t>
+                      </a:r>
+                      <a:r>
+                        <a:rPr lang="en-US" dirty="0" err="1"/>
+                        <a:t>userspace</a:t>
+                      </a:r>
+                      <a:r>
+                        <a:rPr lang="en-US" dirty="0"/>
+                        <a:t> process can race with the kernel as well.</a:t>
+                      </a:r>
+                      <a:endParaRPr lang="ru-RU" dirty="0"/>
+                    </a:p>
+                  </a:txBody>
+                  <a:tcPr/>
+                </a:tc>
+                <a:tc hMerge="1">
+                  <a:txBody>
+                    <a:bodyPr/>
+                    <a:lstStyle/>
+                    <a:p>
+                      <a:endParaRPr lang="ru-RU" dirty="0"/>
+                    </a:p>
+                  </a:txBody>
+                  <a:tcPr/>
+                </a:tc>
+                <a:extLst>
+                  <a:ext uri="{0D108BD9-81ED-4DB2-BD59-A6C34878D82A}">
+                    <a16:rowId xmlns:a16="http://schemas.microsoft.com/office/drawing/2014/main" val="3908480295"/>
+                  </a:ext>
+                </a:extLst>
+              </a:tr>
+              <a:tr h="434175">
+                <a:tc>
+                  <a:txBody>
+                    <a:bodyPr/>
+                    <a:lstStyle/>
+                    <a:p>
+                      <a:pPr marL="0" indent="0">
+                        <a:buFont typeface="Arial" panose="020B0604020202020204" pitchFamily="34" charset="0"/>
+                        <a:buNone/>
+                      </a:pPr>
+                      <a:r>
+                        <a:rPr lang="en-US" sz="1400" dirty="0" err="1">
+                          <a:latin typeface="Menlo" panose="020B0609030804020204" pitchFamily="49" charset="0"/>
+                          <a:ea typeface="Menlo" panose="020B0609030804020204" pitchFamily="49" charset="0"/>
+                          <a:cs typeface="Menlo" panose="020B0609030804020204" pitchFamily="49" charset="0"/>
+                        </a:rPr>
+                        <a:t>fd</a:t>
+                      </a:r>
+                      <a:r>
+                        <a:rPr lang="en-US" sz="1400" dirty="0">
+                          <a:latin typeface="Menlo" panose="020B0609030804020204" pitchFamily="49" charset="0"/>
+                          <a:ea typeface="Menlo" panose="020B0609030804020204" pitchFamily="49" charset="0"/>
+                          <a:cs typeface="Menlo" panose="020B0609030804020204" pitchFamily="49" charset="0"/>
+                        </a:rPr>
+                        <a:t> = open(“/a/file”, O_RDWR | O_DIRECT);</a:t>
+                      </a:r>
+                    </a:p>
+                    <a:p>
+                      <a:pPr marL="0" indent="0">
+                        <a:buFont typeface="Arial" panose="020B0604020202020204" pitchFamily="34" charset="0"/>
+                        <a:buNone/>
+                      </a:pPr>
+                      <a:r>
+                        <a:rPr lang="en-US" sz="1400" dirty="0">
+                          <a:latin typeface="Menlo" panose="020B0609030804020204" pitchFamily="49" charset="0"/>
+                          <a:ea typeface="Menlo" panose="020B0609030804020204" pitchFamily="49" charset="0"/>
+                          <a:cs typeface="Menlo" panose="020B0609030804020204" pitchFamily="49" charset="0"/>
+                        </a:rPr>
+                        <a:t>write(</a:t>
+                      </a:r>
+                      <a:r>
+                        <a:rPr lang="en-US" sz="1400" dirty="0" err="1">
+                          <a:latin typeface="Menlo" panose="020B0609030804020204" pitchFamily="49" charset="0"/>
+                          <a:ea typeface="Menlo" panose="020B0609030804020204" pitchFamily="49" charset="0"/>
+                          <a:cs typeface="Menlo" panose="020B0609030804020204" pitchFamily="49" charset="0"/>
+                        </a:rPr>
+                        <a:t>fd</a:t>
+                      </a:r>
+                      <a:r>
+                        <a:rPr lang="en-US" sz="1400" dirty="0">
+                          <a:latin typeface="Menlo" panose="020B0609030804020204" pitchFamily="49" charset="0"/>
+                          <a:ea typeface="Menlo" panose="020B0609030804020204" pitchFamily="49" charset="0"/>
+                          <a:cs typeface="Menlo" panose="020B0609030804020204" pitchFamily="49" charset="0"/>
+                        </a:rPr>
+                        <a:t>, </a:t>
+                      </a:r>
+                      <a:r>
+                        <a:rPr lang="en-US" sz="1400" dirty="0" err="1">
+                          <a:latin typeface="Menlo" panose="020B0609030804020204" pitchFamily="49" charset="0"/>
+                          <a:ea typeface="Menlo" panose="020B0609030804020204" pitchFamily="49" charset="0"/>
+                          <a:cs typeface="Menlo" panose="020B0609030804020204" pitchFamily="49" charset="0"/>
+                        </a:rPr>
+                        <a:t>buf</a:t>
+                      </a:r>
+                      <a:r>
+                        <a:rPr lang="en-US" sz="1400" dirty="0">
+                          <a:latin typeface="Menlo" panose="020B0609030804020204" pitchFamily="49" charset="0"/>
+                          <a:ea typeface="Menlo" panose="020B0609030804020204" pitchFamily="49" charset="0"/>
+                          <a:cs typeface="Menlo" panose="020B0609030804020204" pitchFamily="49" charset="0"/>
+                        </a:rPr>
+                        <a:t>, </a:t>
+                      </a:r>
+                      <a:r>
+                        <a:rPr lang="en-US" sz="1400" dirty="0" err="1">
+                          <a:latin typeface="Menlo" panose="020B0609030804020204" pitchFamily="49" charset="0"/>
+                          <a:ea typeface="Menlo" panose="020B0609030804020204" pitchFamily="49" charset="0"/>
+                          <a:cs typeface="Menlo" panose="020B0609030804020204" pitchFamily="49" charset="0"/>
+                        </a:rPr>
+                        <a:t>len</a:t>
+                      </a:r>
+                      <a:r>
+                        <a:rPr lang="en-US" sz="1400" dirty="0">
+                          <a:latin typeface="Menlo" panose="020B0609030804020204" pitchFamily="49" charset="0"/>
+                          <a:ea typeface="Menlo" panose="020B0609030804020204" pitchFamily="49" charset="0"/>
+                          <a:cs typeface="Menlo" panose="020B0609030804020204" pitchFamily="49" charset="0"/>
+                        </a:rPr>
+                        <a:t>);</a:t>
+                      </a:r>
+                    </a:p>
+                    <a:p>
+                      <a:pPr marL="0" indent="0">
+                        <a:buFont typeface="Arial" panose="020B0604020202020204" pitchFamily="34" charset="0"/>
+                        <a:buNone/>
+                      </a:pPr>
+                      <a:r>
+                        <a:rPr lang="en-US" sz="1400" dirty="0">
+                          <a:latin typeface="Menlo" panose="020B0609030804020204" pitchFamily="49" charset="0"/>
+                          <a:ea typeface="Menlo" panose="020B0609030804020204" pitchFamily="49" charset="0"/>
+                          <a:cs typeface="Menlo" panose="020B0609030804020204" pitchFamily="49" charset="0"/>
+                        </a:rPr>
+                        <a:t>…</a:t>
+                      </a:r>
+                      <a:endParaRPr lang="ru-RU" sz="1400" dirty="0">
+                        <a:latin typeface="Menlo" panose="020B0609030804020204" pitchFamily="49" charset="0"/>
+                        <a:ea typeface="Menlo" panose="020B0609030804020204" pitchFamily="49" charset="0"/>
+                        <a:cs typeface="Menlo" panose="020B0609030804020204" pitchFamily="49" charset="0"/>
+                      </a:endParaRPr>
+                    </a:p>
+                  </a:txBody>
+                  <a:tcPr/>
+                </a:tc>
+                <a:tc>
+                  <a:txBody>
+                    <a:bodyPr/>
+                    <a:lstStyle/>
+                    <a:p>
+                      <a:pPr marL="0" indent="0">
+                        <a:buFont typeface="Arial" panose="020B0604020202020204" pitchFamily="34" charset="0"/>
+                        <a:buNone/>
+                      </a:pPr>
+                      <a:r>
+                        <a:rPr lang="en-US" dirty="0" err="1">
+                          <a:latin typeface="Menlo" panose="020B0609030804020204" pitchFamily="49" charset="0"/>
+                          <a:ea typeface="Menlo" panose="020B0609030804020204" pitchFamily="49" charset="0"/>
+                          <a:cs typeface="Menlo" panose="020B0609030804020204" pitchFamily="49" charset="0"/>
+                        </a:rPr>
+                        <a:t>buf</a:t>
+                      </a:r>
+                      <a:r>
+                        <a:rPr lang="en-US" dirty="0"/>
+                        <a:t> must not be modified while a write is in progress. Some devices may write a mix of the old and new data. Some devices that implement </a:t>
+                      </a:r>
+                      <a:r>
+                        <a:rPr lang="en-US" dirty="0" err="1"/>
+                        <a:t>checksumming</a:t>
+                      </a:r>
+                      <a:r>
+                        <a:rPr lang="en-US" dirty="0"/>
+                        <a:t> may detect a race.</a:t>
+                      </a:r>
+                    </a:p>
+                  </a:txBody>
+                  <a:tcPr/>
+                </a:tc>
+                <a:extLst>
+                  <a:ext uri="{0D108BD9-81ED-4DB2-BD59-A6C34878D82A}">
+                    <a16:rowId xmlns:a16="http://schemas.microsoft.com/office/drawing/2014/main" val="3226834803"/>
+                  </a:ext>
+                </a:extLst>
+              </a:tr>
+              <a:tr h="434175">
+                <a:tc>
+                  <a:txBody>
+                    <a:bodyPr/>
+                    <a:lstStyle/>
+                    <a:p>
+                      <a:pPr marL="0" indent="0">
+                        <a:buFont typeface="Arial" panose="020B0604020202020204" pitchFamily="34" charset="0"/>
+                        <a:buNone/>
+                      </a:pPr>
+                      <a:r>
+                        <a:rPr lang="en-US" sz="1400" dirty="0" err="1">
+                          <a:latin typeface="Menlo" panose="020B0609030804020204" pitchFamily="49" charset="0"/>
+                          <a:ea typeface="Menlo" panose="020B0609030804020204" pitchFamily="49" charset="0"/>
+                          <a:cs typeface="Menlo" panose="020B0609030804020204" pitchFamily="49" charset="0"/>
+                        </a:rPr>
+                        <a:t>fd</a:t>
+                      </a:r>
+                      <a:r>
+                        <a:rPr lang="en-US" sz="1400" dirty="0">
+                          <a:latin typeface="Menlo" panose="020B0609030804020204" pitchFamily="49" charset="0"/>
+                          <a:ea typeface="Menlo" panose="020B0609030804020204" pitchFamily="49" charset="0"/>
+                          <a:cs typeface="Menlo" panose="020B0609030804020204" pitchFamily="49" charset="0"/>
+                        </a:rPr>
+                        <a:t> = open(“/a/file”, O_RDWR | O_DIRECT);</a:t>
+                      </a:r>
+                    </a:p>
+                    <a:p>
+                      <a:pPr marL="0" indent="0">
+                        <a:buFont typeface="Arial" panose="020B0604020202020204" pitchFamily="34" charset="0"/>
+                        <a:buNone/>
+                      </a:pPr>
+                      <a:r>
+                        <a:rPr lang="en-US" sz="1400" dirty="0">
+                          <a:latin typeface="Menlo" panose="020B0609030804020204" pitchFamily="49" charset="0"/>
+                          <a:ea typeface="Menlo" panose="020B0609030804020204" pitchFamily="49" charset="0"/>
+                          <a:cs typeface="Menlo" panose="020B0609030804020204" pitchFamily="49" charset="0"/>
+                        </a:rPr>
+                        <a:t>write(</a:t>
+                      </a:r>
+                      <a:r>
+                        <a:rPr lang="en-US" sz="1400" dirty="0" err="1">
+                          <a:latin typeface="Menlo" panose="020B0609030804020204" pitchFamily="49" charset="0"/>
+                          <a:ea typeface="Menlo" panose="020B0609030804020204" pitchFamily="49" charset="0"/>
+                          <a:cs typeface="Menlo" panose="020B0609030804020204" pitchFamily="49" charset="0"/>
+                        </a:rPr>
+                        <a:t>fd</a:t>
+                      </a:r>
+                      <a:r>
+                        <a:rPr lang="en-US" sz="1400" dirty="0">
+                          <a:latin typeface="Menlo" panose="020B0609030804020204" pitchFamily="49" charset="0"/>
+                          <a:ea typeface="Menlo" panose="020B0609030804020204" pitchFamily="49" charset="0"/>
+                          <a:cs typeface="Menlo" panose="020B0609030804020204" pitchFamily="49" charset="0"/>
+                        </a:rPr>
+                        <a:t>, </a:t>
+                      </a:r>
+                      <a:r>
+                        <a:rPr lang="en-US" sz="1400" dirty="0" err="1">
+                          <a:latin typeface="Menlo" panose="020B0609030804020204" pitchFamily="49" charset="0"/>
+                          <a:ea typeface="Menlo" panose="020B0609030804020204" pitchFamily="49" charset="0"/>
+                          <a:cs typeface="Menlo" panose="020B0609030804020204" pitchFamily="49" charset="0"/>
+                        </a:rPr>
+                        <a:t>buf</a:t>
+                      </a:r>
+                      <a:r>
+                        <a:rPr lang="en-US" sz="1400" dirty="0">
+                          <a:latin typeface="Menlo" panose="020B0609030804020204" pitchFamily="49" charset="0"/>
+                          <a:ea typeface="Menlo" panose="020B0609030804020204" pitchFamily="49" charset="0"/>
+                          <a:cs typeface="Menlo" panose="020B0609030804020204" pitchFamily="49" charset="0"/>
+                        </a:rPr>
+                        <a:t>, </a:t>
+                      </a:r>
+                      <a:r>
+                        <a:rPr lang="en-US" sz="1400" dirty="0" err="1">
+                          <a:latin typeface="Menlo" panose="020B0609030804020204" pitchFamily="49" charset="0"/>
+                          <a:ea typeface="Menlo" panose="020B0609030804020204" pitchFamily="49" charset="0"/>
+                          <a:cs typeface="Menlo" panose="020B0609030804020204" pitchFamily="49" charset="0"/>
+                        </a:rPr>
+                        <a:t>len</a:t>
+                      </a:r>
+                      <a:r>
+                        <a:rPr lang="en-US" sz="1400" dirty="0">
+                          <a:latin typeface="Menlo" panose="020B0609030804020204" pitchFamily="49" charset="0"/>
+                          <a:ea typeface="Menlo" panose="020B0609030804020204" pitchFamily="49" charset="0"/>
+                          <a:cs typeface="Menlo" panose="020B0609030804020204" pitchFamily="49" charset="0"/>
+                        </a:rPr>
+                        <a:t>);</a:t>
+                      </a:r>
+                    </a:p>
+                    <a:p>
+                      <a:pPr marL="0" indent="0">
+                        <a:buFont typeface="Arial" panose="020B0604020202020204" pitchFamily="34" charset="0"/>
+                        <a:buNone/>
+                      </a:pPr>
+                      <a:r>
+                        <a:rPr lang="en-US" sz="1400" dirty="0">
+                          <a:latin typeface="Menlo" panose="020B0609030804020204" pitchFamily="49" charset="0"/>
+                          <a:ea typeface="Menlo" panose="020B0609030804020204" pitchFamily="49" charset="0"/>
+                          <a:cs typeface="Menlo" panose="020B0609030804020204" pitchFamily="49" charset="0"/>
+                        </a:rPr>
+                        <a:t>…</a:t>
+                      </a:r>
+                      <a:endParaRPr lang="ru-RU" sz="1400" dirty="0">
+                        <a:latin typeface="Menlo" panose="020B0609030804020204" pitchFamily="49" charset="0"/>
+                        <a:ea typeface="Menlo" panose="020B0609030804020204" pitchFamily="49" charset="0"/>
+                        <a:cs typeface="Menlo" panose="020B0609030804020204" pitchFamily="49" charset="0"/>
+                      </a:endParaRPr>
+                    </a:p>
+                  </a:txBody>
+                  <a:tcPr/>
+                </a:tc>
+                <a:tc>
+                  <a:txBody>
+                    <a:bodyPr/>
+                    <a:lstStyle/>
+                    <a:p>
+                      <a:pPr marL="0" indent="0">
+                        <a:buFont typeface="Arial" panose="020B0604020202020204" pitchFamily="34" charset="0"/>
+                        <a:buNone/>
+                      </a:pPr>
+                      <a:endParaRPr lang="en-US" dirty="0"/>
+                    </a:p>
+                  </a:txBody>
+                  <a:tcPr/>
+                </a:tc>
+                <a:extLst>
+                  <a:ext uri="{0D108BD9-81ED-4DB2-BD59-A6C34878D82A}">
+                    <a16:rowId xmlns:a16="http://schemas.microsoft.com/office/drawing/2014/main" val="1075154831"/>
+                  </a:ext>
+                </a:extLst>
+              </a:tr>
+              <a:tr h="434175">
+                <a:tc>
+                  <a:txBody>
+                    <a:bodyPr/>
+                    <a:lstStyle/>
+                    <a:p>
+                      <a:pPr marL="0" indent="0">
+                        <a:buFont typeface="Arial" panose="020B0604020202020204" pitchFamily="34" charset="0"/>
+                        <a:buNone/>
+                      </a:pPr>
+                      <a:r>
+                        <a:rPr lang="en-US" sz="1400" dirty="0" err="1">
+                          <a:latin typeface="Menlo" panose="020B0609030804020204" pitchFamily="49" charset="0"/>
+                          <a:ea typeface="Menlo" panose="020B0609030804020204" pitchFamily="49" charset="0"/>
+                          <a:cs typeface="Menlo" panose="020B0609030804020204" pitchFamily="49" charset="0"/>
+                        </a:rPr>
+                        <a:t>fd</a:t>
+                      </a:r>
+                      <a:r>
+                        <a:rPr lang="en-US" sz="1400" dirty="0">
+                          <a:latin typeface="Menlo" panose="020B0609030804020204" pitchFamily="49" charset="0"/>
+                          <a:ea typeface="Menlo" panose="020B0609030804020204" pitchFamily="49" charset="0"/>
+                          <a:cs typeface="Menlo" panose="020B0609030804020204" pitchFamily="49" charset="0"/>
+                        </a:rPr>
+                        <a:t> = open(“/a/file”, O_RDONLY | O_DIRECT);</a:t>
+                      </a:r>
+                    </a:p>
+                    <a:p>
+                      <a:pPr marL="0" indent="0">
+                        <a:buFont typeface="Arial" panose="020B0604020202020204" pitchFamily="34" charset="0"/>
+                        <a:buNone/>
+                      </a:pPr>
+                      <a:r>
+                        <a:rPr lang="en-US" sz="1400" dirty="0">
+                          <a:latin typeface="Menlo" panose="020B0609030804020204" pitchFamily="49" charset="0"/>
+                          <a:ea typeface="Menlo" panose="020B0609030804020204" pitchFamily="49" charset="0"/>
+                          <a:cs typeface="Menlo" panose="020B0609030804020204" pitchFamily="49" charset="0"/>
+                        </a:rPr>
+                        <a:t>read(</a:t>
+                      </a:r>
+                      <a:r>
+                        <a:rPr lang="en-US" sz="1400" dirty="0" err="1">
+                          <a:latin typeface="Menlo" panose="020B0609030804020204" pitchFamily="49" charset="0"/>
+                          <a:ea typeface="Menlo" panose="020B0609030804020204" pitchFamily="49" charset="0"/>
+                          <a:cs typeface="Menlo" panose="020B0609030804020204" pitchFamily="49" charset="0"/>
+                        </a:rPr>
+                        <a:t>fd</a:t>
+                      </a:r>
+                      <a:r>
+                        <a:rPr lang="en-US" sz="1400" dirty="0">
+                          <a:latin typeface="Menlo" panose="020B0609030804020204" pitchFamily="49" charset="0"/>
+                          <a:ea typeface="Menlo" panose="020B0609030804020204" pitchFamily="49" charset="0"/>
+                          <a:cs typeface="Menlo" panose="020B0609030804020204" pitchFamily="49" charset="0"/>
+                        </a:rPr>
+                        <a:t>, </a:t>
+                      </a:r>
+                      <a:r>
+                        <a:rPr lang="en-US" sz="1400" dirty="0" err="1">
+                          <a:latin typeface="Menlo" panose="020B0609030804020204" pitchFamily="49" charset="0"/>
+                          <a:ea typeface="Menlo" panose="020B0609030804020204" pitchFamily="49" charset="0"/>
+                          <a:cs typeface="Menlo" panose="020B0609030804020204" pitchFamily="49" charset="0"/>
+                        </a:rPr>
+                        <a:t>buf</a:t>
+                      </a:r>
+                      <a:r>
+                        <a:rPr lang="en-US" sz="1400" dirty="0">
+                          <a:latin typeface="Menlo" panose="020B0609030804020204" pitchFamily="49" charset="0"/>
+                          <a:ea typeface="Menlo" panose="020B0609030804020204" pitchFamily="49" charset="0"/>
+                          <a:cs typeface="Menlo" panose="020B0609030804020204" pitchFamily="49" charset="0"/>
+                        </a:rPr>
+                        <a:t>, </a:t>
+                      </a:r>
+                      <a:r>
+                        <a:rPr lang="en-US" sz="1400" dirty="0" err="1">
+                          <a:latin typeface="Menlo" panose="020B0609030804020204" pitchFamily="49" charset="0"/>
+                          <a:ea typeface="Menlo" panose="020B0609030804020204" pitchFamily="49" charset="0"/>
+                          <a:cs typeface="Menlo" panose="020B0609030804020204" pitchFamily="49" charset="0"/>
+                        </a:rPr>
+                        <a:t>len</a:t>
+                      </a:r>
+                      <a:r>
+                        <a:rPr lang="en-US" sz="1400" dirty="0">
+                          <a:latin typeface="Menlo" panose="020B0609030804020204" pitchFamily="49" charset="0"/>
+                          <a:ea typeface="Menlo" panose="020B0609030804020204" pitchFamily="49" charset="0"/>
+                          <a:cs typeface="Menlo" panose="020B0609030804020204" pitchFamily="49" charset="0"/>
+                        </a:rPr>
+                        <a:t>);</a:t>
+                      </a:r>
+                    </a:p>
+                    <a:p>
+                      <a:pPr marL="0" indent="0">
+                        <a:buFont typeface="Arial" panose="020B0604020202020204" pitchFamily="34" charset="0"/>
+                        <a:buNone/>
+                      </a:pPr>
+                      <a:r>
+                        <a:rPr lang="en-US" sz="1400" dirty="0">
+                          <a:latin typeface="Menlo" panose="020B0609030804020204" pitchFamily="49" charset="0"/>
+                          <a:ea typeface="Menlo" panose="020B0609030804020204" pitchFamily="49" charset="0"/>
+                          <a:cs typeface="Menlo" panose="020B0609030804020204" pitchFamily="49" charset="0"/>
+                        </a:rPr>
+                        <a:t>…</a:t>
+                      </a:r>
+                      <a:endParaRPr lang="ru-RU" sz="1400" dirty="0">
+                        <a:latin typeface="Menlo" panose="020B0609030804020204" pitchFamily="49" charset="0"/>
+                        <a:ea typeface="Menlo" panose="020B0609030804020204" pitchFamily="49" charset="0"/>
+                        <a:cs typeface="Menlo" panose="020B0609030804020204" pitchFamily="49" charset="0"/>
+                      </a:endParaRPr>
+                    </a:p>
+                  </a:txBody>
+                  <a:tcPr/>
+                </a:tc>
+                <a:tc>
+                  <a:txBody>
+                    <a:bodyPr/>
+                    <a:lstStyle/>
+                    <a:p>
+                      <a:pPr marL="0" indent="0">
+                        <a:buFont typeface="Arial" panose="020B0604020202020204" pitchFamily="34" charset="0"/>
+                        <a:buNone/>
+                      </a:pPr>
+                      <a:endParaRPr lang="en-US" dirty="0"/>
+                    </a:p>
+                    <a:p>
+                      <a:pPr marL="0" indent="0">
+                        <a:buFont typeface="Arial" panose="020B0604020202020204" pitchFamily="34" charset="0"/>
+                        <a:buNone/>
+                      </a:pPr>
+                      <a:endParaRPr lang="en-US" dirty="0"/>
+                    </a:p>
+                    <a:p>
+                      <a:pPr marL="0" indent="0">
+                        <a:buFont typeface="Arial" panose="020B0604020202020204" pitchFamily="34" charset="0"/>
+                        <a:buNone/>
+                      </a:pPr>
+                      <a:endParaRPr lang="en-US" dirty="0"/>
+                    </a:p>
+                    <a:p>
+                      <a:pPr marL="0" indent="0">
+                        <a:buFont typeface="Arial" panose="020B0604020202020204" pitchFamily="34" charset="0"/>
+                        <a:buNone/>
+                      </a:pPr>
+                      <a:endParaRPr lang="en-US" dirty="0"/>
+                    </a:p>
+                  </a:txBody>
+                  <a:tcPr/>
+                </a:tc>
+                <a:extLst>
+                  <a:ext uri="{0D108BD9-81ED-4DB2-BD59-A6C34878D82A}">
+                    <a16:rowId xmlns:a16="http://schemas.microsoft.com/office/drawing/2014/main" val="2595636294"/>
+                  </a:ext>
+                </a:extLst>
+              </a:tr>
+            </a:tbl>
+          </a:graphicData>
+        </a:graphic>
+      </p:graphicFrame>
+    </p:spTree>
+    <p:extLst>
+      <p:ext uri="{BB962C8B-B14F-4D97-AF65-F5344CB8AC3E}">
+        <p14:creationId xmlns:p14="http://schemas.microsoft.com/office/powerpoint/2010/main" val="2923564438"/>
+      </p:ext>
+    </p:extLst>
+  </p:cSld>
+  <p:clrMapOvr>
+    <a:masterClrMapping/>
+  </p:clrMapOvr>
+</p:sld>
+</file>
+
+<file path=ppt/slides/slide32.xml><?xml version="1.0" encoding="utf-8"?>
+<p:sld xmlns:a="http://schemas.openxmlformats.org/drawingml/2006/main" xmlns:r="http://schemas.openxmlformats.org/officeDocument/2006/relationships" xmlns:p="http://schemas.openxmlformats.org/presentationml/2006/main">
+  <p:cSld>
+    <p:spTree>
+      <p:nvGrpSpPr>
+        <p:cNvPr id="1" name="">
+          <a:extLst>
+            <a:ext uri="{FF2B5EF4-FFF2-40B4-BE49-F238E27FC236}">
+              <a16:creationId xmlns:a16="http://schemas.microsoft.com/office/drawing/2014/main" id="{2C1004EC-5F36-19C4-5B82-355395034050}"/>
+            </a:ext>
+          </a:extLst>
+        </p:cNvPr>
+        <p:cNvGrpSpPr/>
+        <p:nvPr/>
+      </p:nvGrpSpPr>
+      <p:grpSpPr>
+        <a:xfrm>
+          <a:off x="0" y="0"/>
+          <a:ext cx="0" cy="0"/>
+          <a:chOff x="0" y="0"/>
+          <a:chExt cx="0" cy="0"/>
+        </a:xfrm>
+      </p:grpSpPr>
+      <p:graphicFrame>
+        <p:nvGraphicFramePr>
+          <p:cNvPr id="5" name="Table 4">
+            <a:extLst>
+              <a:ext uri="{FF2B5EF4-FFF2-40B4-BE49-F238E27FC236}">
+                <a16:creationId xmlns:a16="http://schemas.microsoft.com/office/drawing/2014/main" id="{2F44DD07-52F9-4930-0D94-19977CF4710A}"/>
+              </a:ext>
+            </a:extLst>
+          </p:cNvPr>
+          <p:cNvGraphicFramePr>
+            <a:graphicFrameLocks noGrp="1"/>
+          </p:cNvGraphicFramePr>
+          <p:nvPr/>
+        </p:nvGraphicFramePr>
+        <p:xfrm>
+          <a:off x="0" y="1"/>
+          <a:ext cx="12192000" cy="365760"/>
+        </p:xfrm>
+        <a:graphic>
+          <a:graphicData uri="http://schemas.openxmlformats.org/drawingml/2006/table">
+            <a:tbl>
+              <a:tblPr firstRow="1" bandRow="1">
+                <a:tableStyleId>{5C22544A-7EE6-4342-B048-85BDC9FD1C3A}</a:tableStyleId>
+              </a:tblPr>
+              <a:tblGrid>
+                <a:gridCol w="12192000">
+                  <a:extLst>
+                    <a:ext uri="{9D8B030D-6E8A-4147-A177-3AD203B41FA5}">
+                      <a16:colId xmlns:a16="http://schemas.microsoft.com/office/drawing/2014/main" val="20000"/>
+                    </a:ext>
+                  </a:extLst>
+                </a:gridCol>
+              </a:tblGrid>
+              <a:tr h="321276">
+                <a:tc>
+                  <a:txBody>
+                    <a:bodyPr/>
+                    <a:lstStyle/>
+                    <a:p>
+                      <a:r>
+                        <a:rPr lang="en-US" sz="1800" dirty="0"/>
+                        <a:t>The POSIX file system semantics</a:t>
+                      </a:r>
+                      <a:endParaRPr lang="ru-RU" sz="1800" dirty="0"/>
+                    </a:p>
+                  </a:txBody>
+                  <a:tcPr/>
+                </a:tc>
+                <a:extLst>
+                  <a:ext uri="{0D108BD9-81ED-4DB2-BD59-A6C34878D82A}">
+                    <a16:rowId xmlns:a16="http://schemas.microsoft.com/office/drawing/2014/main" val="10000"/>
+                  </a:ext>
+                </a:extLst>
+              </a:tr>
+            </a:tbl>
+          </a:graphicData>
+        </a:graphic>
+      </p:graphicFrame>
+      <p:graphicFrame>
+        <p:nvGraphicFramePr>
+          <p:cNvPr id="6" name="Table 5">
+            <a:extLst>
+              <a:ext uri="{FF2B5EF4-FFF2-40B4-BE49-F238E27FC236}">
+                <a16:creationId xmlns:a16="http://schemas.microsoft.com/office/drawing/2014/main" id="{ECE38FDB-D48F-1237-D68B-B357DA621134}"/>
+              </a:ext>
+            </a:extLst>
+          </p:cNvPr>
+          <p:cNvGraphicFramePr>
+            <a:graphicFrameLocks noGrp="1"/>
+          </p:cNvGraphicFramePr>
+          <p:nvPr/>
+        </p:nvGraphicFramePr>
+        <p:xfrm>
+          <a:off x="0" y="6532604"/>
+          <a:ext cx="12192000" cy="365760"/>
+        </p:xfrm>
+        <a:graphic>
+          <a:graphicData uri="http://schemas.openxmlformats.org/drawingml/2006/table">
+            <a:tbl>
+              <a:tblPr firstRow="1" bandRow="1">
+                <a:tableStyleId>{5C22544A-7EE6-4342-B048-85BDC9FD1C3A}</a:tableStyleId>
+              </a:tblPr>
+              <a:tblGrid>
+                <a:gridCol w="12192000">
+                  <a:extLst>
+                    <a:ext uri="{9D8B030D-6E8A-4147-A177-3AD203B41FA5}">
+                      <a16:colId xmlns:a16="http://schemas.microsoft.com/office/drawing/2014/main" val="20000"/>
+                    </a:ext>
+                  </a:extLst>
+                </a:gridCol>
+              </a:tblGrid>
+              <a:tr h="308094">
+                <a:tc>
+                  <a:txBody>
+                    <a:bodyPr/>
+                    <a:lstStyle/>
+                    <a:p>
+                      <a:endParaRPr lang="ru-RU" dirty="0"/>
+                    </a:p>
+                  </a:txBody>
+                  <a:tcPr/>
+                </a:tc>
+                <a:extLst>
+                  <a:ext uri="{0D108BD9-81ED-4DB2-BD59-A6C34878D82A}">
+                    <a16:rowId xmlns:a16="http://schemas.microsoft.com/office/drawing/2014/main" val="10000"/>
+                  </a:ext>
+                </a:extLst>
+              </a:tr>
+            </a:tbl>
+          </a:graphicData>
+        </a:graphic>
+      </p:graphicFrame>
+      <p:graphicFrame>
+        <p:nvGraphicFramePr>
+          <p:cNvPr id="2" name="Table 1">
+            <a:extLst>
+              <a:ext uri="{FF2B5EF4-FFF2-40B4-BE49-F238E27FC236}">
+                <a16:creationId xmlns:a16="http://schemas.microsoft.com/office/drawing/2014/main" id="{E582EF5B-98C3-147A-AD1C-3D4476472D85}"/>
+              </a:ext>
+            </a:extLst>
+          </p:cNvPr>
+          <p:cNvGraphicFramePr>
+            <a:graphicFrameLocks noGrp="1"/>
+          </p:cNvGraphicFramePr>
+          <p:nvPr>
+            <p:extLst>
+              <p:ext uri="{D42A27DB-BD31-4B8C-83A1-F6EECF244321}">
+                <p14:modId xmlns:p14="http://schemas.microsoft.com/office/powerpoint/2010/main" val="198482183"/>
+              </p:ext>
+            </p:extLst>
+          </p:nvPr>
+        </p:nvGraphicFramePr>
+        <p:xfrm>
+          <a:off x="0" y="342613"/>
+          <a:ext cx="12192000" cy="3702990"/>
+        </p:xfrm>
+        <a:graphic>
+          <a:graphicData uri="http://schemas.openxmlformats.org/drawingml/2006/table">
+            <a:tbl>
+              <a:tblPr firstRow="1" bandRow="1">
+                <a:tableStyleId>{3B4B98B0-60AC-42C2-AFA5-B58CD77FA1E5}</a:tableStyleId>
+              </a:tblPr>
+              <a:tblGrid>
+                <a:gridCol w="6096000">
+                  <a:extLst>
+                    <a:ext uri="{9D8B030D-6E8A-4147-A177-3AD203B41FA5}">
+                      <a16:colId xmlns:a16="http://schemas.microsoft.com/office/drawing/2014/main" val="20000"/>
+                    </a:ext>
+                  </a:extLst>
+                </a:gridCol>
+                <a:gridCol w="6096000">
+                  <a:extLst>
+                    <a:ext uri="{9D8B030D-6E8A-4147-A177-3AD203B41FA5}">
+                      <a16:colId xmlns:a16="http://schemas.microsoft.com/office/drawing/2014/main" val="3688292786"/>
+                    </a:ext>
+                  </a:extLst>
+                </a:gridCol>
+              </a:tblGrid>
+              <a:tr h="434175">
+                <a:tc>
+                  <a:txBody>
+                    <a:bodyPr/>
+                    <a:lstStyle/>
+                    <a:p>
+                      <a:r>
+                        <a:rPr lang="en-US" dirty="0"/>
+                        <a:t>A file system is a shared resource: concurrent access and races</a:t>
+                      </a:r>
+                      <a:endParaRPr lang="ru-RU" dirty="0"/>
+                    </a:p>
+                  </a:txBody>
+                  <a:tcPr/>
+                </a:tc>
+                <a:tc>
+                  <a:txBody>
+                    <a:bodyPr/>
+                    <a:lstStyle/>
+                    <a:p>
+                      <a:endParaRPr lang="ru-RU" dirty="0"/>
+                    </a:p>
+                  </a:txBody>
+                  <a:tcPr/>
+                </a:tc>
+                <a:extLst>
+                  <a:ext uri="{0D108BD9-81ED-4DB2-BD59-A6C34878D82A}">
+                    <a16:rowId xmlns:a16="http://schemas.microsoft.com/office/drawing/2014/main" val="10000"/>
+                  </a:ext>
+                </a:extLst>
+              </a:tr>
+              <a:tr h="434175">
+                <a:tc gridSpan="2">
+                  <a:txBody>
+                    <a:bodyPr/>
+                    <a:lstStyle/>
+                    <a:p>
+                      <a:r>
+                        <a:rPr lang="en-US" dirty="0"/>
+                        <a:t>A </a:t>
+                      </a:r>
+                      <a:r>
+                        <a:rPr lang="en-US" dirty="0" err="1"/>
+                        <a:t>userspace</a:t>
+                      </a:r>
+                      <a:r>
+                        <a:rPr lang="en-US" dirty="0"/>
+                        <a:t> process can race with the kernel as well.</a:t>
+                      </a:r>
+                      <a:endParaRPr lang="ru-RU" dirty="0"/>
+                    </a:p>
+                  </a:txBody>
+                  <a:tcPr/>
+                </a:tc>
+                <a:tc hMerge="1">
+                  <a:txBody>
+                    <a:bodyPr/>
+                    <a:lstStyle/>
+                    <a:p>
+                      <a:endParaRPr lang="ru-RU" dirty="0"/>
+                    </a:p>
+                  </a:txBody>
+                  <a:tcPr/>
+                </a:tc>
+                <a:extLst>
+                  <a:ext uri="{0D108BD9-81ED-4DB2-BD59-A6C34878D82A}">
+                    <a16:rowId xmlns:a16="http://schemas.microsoft.com/office/drawing/2014/main" val="3908480295"/>
+                  </a:ext>
+                </a:extLst>
+              </a:tr>
+              <a:tr h="434175">
+                <a:tc>
+                  <a:txBody>
+                    <a:bodyPr/>
+                    <a:lstStyle/>
+                    <a:p>
+                      <a:pPr marL="0" indent="0">
+                        <a:buFont typeface="Arial" panose="020B0604020202020204" pitchFamily="34" charset="0"/>
+                        <a:buNone/>
+                      </a:pPr>
+                      <a:r>
+                        <a:rPr lang="en-US" sz="1400" dirty="0" err="1">
+                          <a:latin typeface="Menlo" panose="020B0609030804020204" pitchFamily="49" charset="0"/>
+                          <a:ea typeface="Menlo" panose="020B0609030804020204" pitchFamily="49" charset="0"/>
+                          <a:cs typeface="Menlo" panose="020B0609030804020204" pitchFamily="49" charset="0"/>
+                        </a:rPr>
+                        <a:t>fd</a:t>
+                      </a:r>
+                      <a:r>
+                        <a:rPr lang="en-US" sz="1400" dirty="0">
+                          <a:latin typeface="Menlo" panose="020B0609030804020204" pitchFamily="49" charset="0"/>
+                          <a:ea typeface="Menlo" panose="020B0609030804020204" pitchFamily="49" charset="0"/>
+                          <a:cs typeface="Menlo" panose="020B0609030804020204" pitchFamily="49" charset="0"/>
+                        </a:rPr>
+                        <a:t> = open(“/a/file”, O_RDWR | O_DIRECT);</a:t>
+                      </a:r>
+                    </a:p>
+                    <a:p>
+                      <a:pPr marL="0" indent="0">
+                        <a:buFont typeface="Arial" panose="020B0604020202020204" pitchFamily="34" charset="0"/>
+                        <a:buNone/>
+                      </a:pPr>
+                      <a:r>
+                        <a:rPr lang="en-US" sz="1400" dirty="0">
+                          <a:latin typeface="Menlo" panose="020B0609030804020204" pitchFamily="49" charset="0"/>
+                          <a:ea typeface="Menlo" panose="020B0609030804020204" pitchFamily="49" charset="0"/>
+                          <a:cs typeface="Menlo" panose="020B0609030804020204" pitchFamily="49" charset="0"/>
+                        </a:rPr>
+                        <a:t>write(</a:t>
+                      </a:r>
+                      <a:r>
+                        <a:rPr lang="en-US" sz="1400" dirty="0" err="1">
+                          <a:latin typeface="Menlo" panose="020B0609030804020204" pitchFamily="49" charset="0"/>
+                          <a:ea typeface="Menlo" panose="020B0609030804020204" pitchFamily="49" charset="0"/>
+                          <a:cs typeface="Menlo" panose="020B0609030804020204" pitchFamily="49" charset="0"/>
+                        </a:rPr>
+                        <a:t>fd</a:t>
+                      </a:r>
+                      <a:r>
+                        <a:rPr lang="en-US" sz="1400" dirty="0">
+                          <a:latin typeface="Menlo" panose="020B0609030804020204" pitchFamily="49" charset="0"/>
+                          <a:ea typeface="Menlo" panose="020B0609030804020204" pitchFamily="49" charset="0"/>
+                          <a:cs typeface="Menlo" panose="020B0609030804020204" pitchFamily="49" charset="0"/>
+                        </a:rPr>
+                        <a:t>, </a:t>
+                      </a:r>
+                      <a:r>
+                        <a:rPr lang="en-US" sz="1400" dirty="0" err="1">
+                          <a:latin typeface="Menlo" panose="020B0609030804020204" pitchFamily="49" charset="0"/>
+                          <a:ea typeface="Menlo" panose="020B0609030804020204" pitchFamily="49" charset="0"/>
+                          <a:cs typeface="Menlo" panose="020B0609030804020204" pitchFamily="49" charset="0"/>
+                        </a:rPr>
+                        <a:t>buf</a:t>
+                      </a:r>
+                      <a:r>
+                        <a:rPr lang="en-US" sz="1400" dirty="0">
+                          <a:latin typeface="Menlo" panose="020B0609030804020204" pitchFamily="49" charset="0"/>
+                          <a:ea typeface="Menlo" panose="020B0609030804020204" pitchFamily="49" charset="0"/>
+                          <a:cs typeface="Menlo" panose="020B0609030804020204" pitchFamily="49" charset="0"/>
+                        </a:rPr>
+                        <a:t>, </a:t>
+                      </a:r>
+                      <a:r>
+                        <a:rPr lang="en-US" sz="1400" dirty="0" err="1">
+                          <a:latin typeface="Menlo" panose="020B0609030804020204" pitchFamily="49" charset="0"/>
+                          <a:ea typeface="Menlo" panose="020B0609030804020204" pitchFamily="49" charset="0"/>
+                          <a:cs typeface="Menlo" panose="020B0609030804020204" pitchFamily="49" charset="0"/>
+                        </a:rPr>
+                        <a:t>len</a:t>
+                      </a:r>
+                      <a:r>
+                        <a:rPr lang="en-US" sz="1400" dirty="0">
+                          <a:latin typeface="Menlo" panose="020B0609030804020204" pitchFamily="49" charset="0"/>
+                          <a:ea typeface="Menlo" panose="020B0609030804020204" pitchFamily="49" charset="0"/>
+                          <a:cs typeface="Menlo" panose="020B0609030804020204" pitchFamily="49" charset="0"/>
+                        </a:rPr>
+                        <a:t>);</a:t>
+                      </a:r>
+                    </a:p>
+                    <a:p>
+                      <a:pPr marL="0" indent="0">
+                        <a:buFont typeface="Arial" panose="020B0604020202020204" pitchFamily="34" charset="0"/>
+                        <a:buNone/>
+                      </a:pPr>
+                      <a:r>
+                        <a:rPr lang="en-US" sz="1400" dirty="0">
+                          <a:latin typeface="Menlo" panose="020B0609030804020204" pitchFamily="49" charset="0"/>
+                          <a:ea typeface="Menlo" panose="020B0609030804020204" pitchFamily="49" charset="0"/>
+                          <a:cs typeface="Menlo" panose="020B0609030804020204" pitchFamily="49" charset="0"/>
+                        </a:rPr>
+                        <a:t>…</a:t>
+                      </a:r>
+                      <a:endParaRPr lang="ru-RU" sz="1400" dirty="0">
+                        <a:latin typeface="Menlo" panose="020B0609030804020204" pitchFamily="49" charset="0"/>
+                        <a:ea typeface="Menlo" panose="020B0609030804020204" pitchFamily="49" charset="0"/>
+                        <a:cs typeface="Menlo" panose="020B0609030804020204" pitchFamily="49" charset="0"/>
+                      </a:endParaRPr>
+                    </a:p>
+                  </a:txBody>
+                  <a:tcPr/>
+                </a:tc>
+                <a:tc>
+                  <a:txBody>
+                    <a:bodyPr/>
+                    <a:lstStyle/>
+                    <a:p>
+                      <a:pPr marL="0" indent="0">
+                        <a:buFont typeface="Arial" panose="020B0604020202020204" pitchFamily="34" charset="0"/>
+                        <a:buNone/>
+                      </a:pPr>
+                      <a:r>
+                        <a:rPr lang="en-US" dirty="0" err="1">
+                          <a:latin typeface="Menlo" panose="020B0609030804020204" pitchFamily="49" charset="0"/>
+                          <a:ea typeface="Menlo" panose="020B0609030804020204" pitchFamily="49" charset="0"/>
+                          <a:cs typeface="Menlo" panose="020B0609030804020204" pitchFamily="49" charset="0"/>
+                        </a:rPr>
+                        <a:t>buf</a:t>
+                      </a:r>
+                      <a:r>
+                        <a:rPr lang="en-US" dirty="0"/>
+                        <a:t> must not be modified while a write is in progress. Some devices may write a mix of the old and new data. Some devices that implement </a:t>
+                      </a:r>
+                      <a:r>
+                        <a:rPr lang="en-US" dirty="0" err="1"/>
+                        <a:t>checksumming</a:t>
+                      </a:r>
+                      <a:r>
+                        <a:rPr lang="en-US" dirty="0"/>
+                        <a:t> may detect a race.</a:t>
+                      </a:r>
+                    </a:p>
+                  </a:txBody>
+                  <a:tcPr/>
+                </a:tc>
+                <a:extLst>
+                  <a:ext uri="{0D108BD9-81ED-4DB2-BD59-A6C34878D82A}">
+                    <a16:rowId xmlns:a16="http://schemas.microsoft.com/office/drawing/2014/main" val="3226834803"/>
+                  </a:ext>
+                </a:extLst>
+              </a:tr>
+              <a:tr h="434175">
+                <a:tc>
+                  <a:txBody>
+                    <a:bodyPr/>
+                    <a:lstStyle/>
+                    <a:p>
+                      <a:pPr marL="0" indent="0">
+                        <a:buFont typeface="Arial" panose="020B0604020202020204" pitchFamily="34" charset="0"/>
+                        <a:buNone/>
+                      </a:pPr>
+                      <a:r>
+                        <a:rPr lang="en-US" sz="1400" dirty="0" err="1">
+                          <a:latin typeface="Menlo" panose="020B0609030804020204" pitchFamily="49" charset="0"/>
+                          <a:ea typeface="Menlo" panose="020B0609030804020204" pitchFamily="49" charset="0"/>
+                          <a:cs typeface="Menlo" panose="020B0609030804020204" pitchFamily="49" charset="0"/>
+                        </a:rPr>
+                        <a:t>fd</a:t>
+                      </a:r>
+                      <a:r>
+                        <a:rPr lang="en-US" sz="1400" dirty="0">
+                          <a:latin typeface="Menlo" panose="020B0609030804020204" pitchFamily="49" charset="0"/>
+                          <a:ea typeface="Menlo" panose="020B0609030804020204" pitchFamily="49" charset="0"/>
+                          <a:cs typeface="Menlo" panose="020B0609030804020204" pitchFamily="49" charset="0"/>
+                        </a:rPr>
+                        <a:t> = open(“/a/file”, O_RDWR | O_DIRECT);</a:t>
+                      </a:r>
+                    </a:p>
+                    <a:p>
+                      <a:pPr marL="0" indent="0">
+                        <a:buFont typeface="Arial" panose="020B0604020202020204" pitchFamily="34" charset="0"/>
+                        <a:buNone/>
+                      </a:pPr>
+                      <a:r>
+                        <a:rPr lang="en-US" sz="1400" dirty="0">
+                          <a:latin typeface="Menlo" panose="020B0609030804020204" pitchFamily="49" charset="0"/>
+                          <a:ea typeface="Menlo" panose="020B0609030804020204" pitchFamily="49" charset="0"/>
+                          <a:cs typeface="Menlo" panose="020B0609030804020204" pitchFamily="49" charset="0"/>
+                        </a:rPr>
+                        <a:t>write(</a:t>
+                      </a:r>
+                      <a:r>
+                        <a:rPr lang="en-US" sz="1400" dirty="0" err="1">
+                          <a:latin typeface="Menlo" panose="020B0609030804020204" pitchFamily="49" charset="0"/>
+                          <a:ea typeface="Menlo" panose="020B0609030804020204" pitchFamily="49" charset="0"/>
+                          <a:cs typeface="Menlo" panose="020B0609030804020204" pitchFamily="49" charset="0"/>
+                        </a:rPr>
+                        <a:t>fd</a:t>
+                      </a:r>
+                      <a:r>
+                        <a:rPr lang="en-US" sz="1400" dirty="0">
+                          <a:latin typeface="Menlo" panose="020B0609030804020204" pitchFamily="49" charset="0"/>
+                          <a:ea typeface="Menlo" panose="020B0609030804020204" pitchFamily="49" charset="0"/>
+                          <a:cs typeface="Menlo" panose="020B0609030804020204" pitchFamily="49" charset="0"/>
+                        </a:rPr>
+                        <a:t>, </a:t>
+                      </a:r>
+                      <a:r>
+                        <a:rPr lang="en-US" sz="1400" dirty="0" err="1">
+                          <a:latin typeface="Menlo" panose="020B0609030804020204" pitchFamily="49" charset="0"/>
+                          <a:ea typeface="Menlo" panose="020B0609030804020204" pitchFamily="49" charset="0"/>
+                          <a:cs typeface="Menlo" panose="020B0609030804020204" pitchFamily="49" charset="0"/>
+                        </a:rPr>
+                        <a:t>buf</a:t>
+                      </a:r>
+                      <a:r>
+                        <a:rPr lang="en-US" sz="1400" dirty="0">
+                          <a:latin typeface="Menlo" panose="020B0609030804020204" pitchFamily="49" charset="0"/>
+                          <a:ea typeface="Menlo" panose="020B0609030804020204" pitchFamily="49" charset="0"/>
+                          <a:cs typeface="Menlo" panose="020B0609030804020204" pitchFamily="49" charset="0"/>
+                        </a:rPr>
+                        <a:t>, </a:t>
+                      </a:r>
+                      <a:r>
+                        <a:rPr lang="en-US" sz="1400" dirty="0" err="1">
+                          <a:latin typeface="Menlo" panose="020B0609030804020204" pitchFamily="49" charset="0"/>
+                          <a:ea typeface="Menlo" panose="020B0609030804020204" pitchFamily="49" charset="0"/>
+                          <a:cs typeface="Menlo" panose="020B0609030804020204" pitchFamily="49" charset="0"/>
+                        </a:rPr>
+                        <a:t>len</a:t>
+                      </a:r>
+                      <a:r>
+                        <a:rPr lang="en-US" sz="1400" dirty="0">
+                          <a:latin typeface="Menlo" panose="020B0609030804020204" pitchFamily="49" charset="0"/>
+                          <a:ea typeface="Menlo" panose="020B0609030804020204" pitchFamily="49" charset="0"/>
+                          <a:cs typeface="Menlo" panose="020B0609030804020204" pitchFamily="49" charset="0"/>
+                        </a:rPr>
+                        <a:t>);</a:t>
+                      </a:r>
+                    </a:p>
+                    <a:p>
+                      <a:pPr marL="0" indent="0">
+                        <a:buFont typeface="Arial" panose="020B0604020202020204" pitchFamily="34" charset="0"/>
+                        <a:buNone/>
+                      </a:pPr>
+                      <a:r>
+                        <a:rPr lang="en-US" sz="1400" dirty="0">
+                          <a:latin typeface="Menlo" panose="020B0609030804020204" pitchFamily="49" charset="0"/>
+                          <a:ea typeface="Menlo" panose="020B0609030804020204" pitchFamily="49" charset="0"/>
+                          <a:cs typeface="Menlo" panose="020B0609030804020204" pitchFamily="49" charset="0"/>
+                        </a:rPr>
+                        <a:t>…</a:t>
+                      </a:r>
+                      <a:endParaRPr lang="ru-RU" sz="1400" dirty="0">
+                        <a:latin typeface="Menlo" panose="020B0609030804020204" pitchFamily="49" charset="0"/>
+                        <a:ea typeface="Menlo" panose="020B0609030804020204" pitchFamily="49" charset="0"/>
+                        <a:cs typeface="Menlo" panose="020B0609030804020204" pitchFamily="49" charset="0"/>
+                      </a:endParaRPr>
+                    </a:p>
+                  </a:txBody>
+                  <a:tcPr/>
+                </a:tc>
+                <a:tc>
+                  <a:txBody>
+                    <a:bodyPr/>
+                    <a:lstStyle/>
+                    <a:p>
+                      <a:pPr marL="0" indent="0">
+                        <a:buFont typeface="Arial" panose="020B0604020202020204" pitchFamily="34" charset="0"/>
+                        <a:buNone/>
+                      </a:pPr>
+                      <a:r>
+                        <a:rPr lang="en-US" dirty="0"/>
+                        <a:t>What happens if another thread </a:t>
+                      </a:r>
+                      <a:r>
+                        <a:rPr lang="en-US" dirty="0" err="1">
+                          <a:latin typeface="Menlo" panose="020B0609030804020204" pitchFamily="49" charset="0"/>
+                          <a:ea typeface="Menlo" panose="020B0609030804020204" pitchFamily="49" charset="0"/>
+                          <a:cs typeface="Menlo" panose="020B0609030804020204" pitchFamily="49" charset="0"/>
+                        </a:rPr>
+                        <a:t>ftruncate</a:t>
+                      </a:r>
+                      <a:r>
+                        <a:rPr lang="en-US" dirty="0">
+                          <a:latin typeface="Menlo" panose="020B0609030804020204" pitchFamily="49" charset="0"/>
+                          <a:ea typeface="Menlo" panose="020B0609030804020204" pitchFamily="49" charset="0"/>
+                          <a:cs typeface="Menlo" panose="020B0609030804020204" pitchFamily="49" charset="0"/>
+                        </a:rPr>
+                        <a:t>()</a:t>
+                      </a:r>
+                      <a:r>
+                        <a:rPr lang="en-US" dirty="0"/>
+                        <a:t>s the file so that </a:t>
+                      </a:r>
+                      <a:r>
+                        <a:rPr lang="en-US" dirty="0" err="1">
+                          <a:latin typeface="Menlo" panose="020B0609030804020204" pitchFamily="49" charset="0"/>
+                          <a:ea typeface="Menlo" panose="020B0609030804020204" pitchFamily="49" charset="0"/>
+                          <a:cs typeface="Menlo" panose="020B0609030804020204" pitchFamily="49" charset="0"/>
+                        </a:rPr>
+                        <a:t>buf</a:t>
+                      </a:r>
+                      <a:r>
+                        <a:rPr lang="en-US" dirty="0"/>
+                        <a:t> is to be written past the new end of the file?</a:t>
+                      </a:r>
+                    </a:p>
+                  </a:txBody>
+                  <a:tcPr/>
+                </a:tc>
+                <a:extLst>
+                  <a:ext uri="{0D108BD9-81ED-4DB2-BD59-A6C34878D82A}">
+                    <a16:rowId xmlns:a16="http://schemas.microsoft.com/office/drawing/2014/main" val="1075154831"/>
+                  </a:ext>
+                </a:extLst>
+              </a:tr>
+              <a:tr h="434175">
+                <a:tc>
+                  <a:txBody>
+                    <a:bodyPr/>
+                    <a:lstStyle/>
+                    <a:p>
+                      <a:pPr marL="0" indent="0">
+                        <a:buFont typeface="Arial" panose="020B0604020202020204" pitchFamily="34" charset="0"/>
+                        <a:buNone/>
+                      </a:pPr>
+                      <a:r>
+                        <a:rPr lang="en-US" sz="1400" dirty="0" err="1">
+                          <a:latin typeface="Menlo" panose="020B0609030804020204" pitchFamily="49" charset="0"/>
+                          <a:ea typeface="Menlo" panose="020B0609030804020204" pitchFamily="49" charset="0"/>
+                          <a:cs typeface="Menlo" panose="020B0609030804020204" pitchFamily="49" charset="0"/>
+                        </a:rPr>
+                        <a:t>fd</a:t>
+                      </a:r>
+                      <a:r>
+                        <a:rPr lang="en-US" sz="1400" dirty="0">
+                          <a:latin typeface="Menlo" panose="020B0609030804020204" pitchFamily="49" charset="0"/>
+                          <a:ea typeface="Menlo" panose="020B0609030804020204" pitchFamily="49" charset="0"/>
+                          <a:cs typeface="Menlo" panose="020B0609030804020204" pitchFamily="49" charset="0"/>
+                        </a:rPr>
+                        <a:t> = open(“/a/file”, O_RDONLY | O_DIRECT);</a:t>
+                      </a:r>
+                    </a:p>
+                    <a:p>
+                      <a:pPr marL="0" indent="0">
+                        <a:buFont typeface="Arial" panose="020B0604020202020204" pitchFamily="34" charset="0"/>
+                        <a:buNone/>
+                      </a:pPr>
+                      <a:r>
+                        <a:rPr lang="en-US" sz="1400" dirty="0">
+                          <a:latin typeface="Menlo" panose="020B0609030804020204" pitchFamily="49" charset="0"/>
+                          <a:ea typeface="Menlo" panose="020B0609030804020204" pitchFamily="49" charset="0"/>
+                          <a:cs typeface="Menlo" panose="020B0609030804020204" pitchFamily="49" charset="0"/>
+                        </a:rPr>
+                        <a:t>read(</a:t>
+                      </a:r>
+                      <a:r>
+                        <a:rPr lang="en-US" sz="1400" dirty="0" err="1">
+                          <a:latin typeface="Menlo" panose="020B0609030804020204" pitchFamily="49" charset="0"/>
+                          <a:ea typeface="Menlo" panose="020B0609030804020204" pitchFamily="49" charset="0"/>
+                          <a:cs typeface="Menlo" panose="020B0609030804020204" pitchFamily="49" charset="0"/>
+                        </a:rPr>
+                        <a:t>fd</a:t>
+                      </a:r>
+                      <a:r>
+                        <a:rPr lang="en-US" sz="1400" dirty="0">
+                          <a:latin typeface="Menlo" panose="020B0609030804020204" pitchFamily="49" charset="0"/>
+                          <a:ea typeface="Menlo" panose="020B0609030804020204" pitchFamily="49" charset="0"/>
+                          <a:cs typeface="Menlo" panose="020B0609030804020204" pitchFamily="49" charset="0"/>
+                        </a:rPr>
+                        <a:t>, </a:t>
+                      </a:r>
+                      <a:r>
+                        <a:rPr lang="en-US" sz="1400" dirty="0" err="1">
+                          <a:latin typeface="Menlo" panose="020B0609030804020204" pitchFamily="49" charset="0"/>
+                          <a:ea typeface="Menlo" panose="020B0609030804020204" pitchFamily="49" charset="0"/>
+                          <a:cs typeface="Menlo" panose="020B0609030804020204" pitchFamily="49" charset="0"/>
+                        </a:rPr>
+                        <a:t>buf</a:t>
+                      </a:r>
+                      <a:r>
+                        <a:rPr lang="en-US" sz="1400" dirty="0">
+                          <a:latin typeface="Menlo" panose="020B0609030804020204" pitchFamily="49" charset="0"/>
+                          <a:ea typeface="Menlo" panose="020B0609030804020204" pitchFamily="49" charset="0"/>
+                          <a:cs typeface="Menlo" panose="020B0609030804020204" pitchFamily="49" charset="0"/>
+                        </a:rPr>
+                        <a:t>, </a:t>
+                      </a:r>
+                      <a:r>
+                        <a:rPr lang="en-US" sz="1400" dirty="0" err="1">
+                          <a:latin typeface="Menlo" panose="020B0609030804020204" pitchFamily="49" charset="0"/>
+                          <a:ea typeface="Menlo" panose="020B0609030804020204" pitchFamily="49" charset="0"/>
+                          <a:cs typeface="Menlo" panose="020B0609030804020204" pitchFamily="49" charset="0"/>
+                        </a:rPr>
+                        <a:t>len</a:t>
+                      </a:r>
+                      <a:r>
+                        <a:rPr lang="en-US" sz="1400" dirty="0">
+                          <a:latin typeface="Menlo" panose="020B0609030804020204" pitchFamily="49" charset="0"/>
+                          <a:ea typeface="Menlo" panose="020B0609030804020204" pitchFamily="49" charset="0"/>
+                          <a:cs typeface="Menlo" panose="020B0609030804020204" pitchFamily="49" charset="0"/>
+                        </a:rPr>
+                        <a:t>);</a:t>
+                      </a:r>
+                    </a:p>
+                    <a:p>
+                      <a:pPr marL="0" indent="0">
+                        <a:buFont typeface="Arial" panose="020B0604020202020204" pitchFamily="34" charset="0"/>
+                        <a:buNone/>
+                      </a:pPr>
+                      <a:r>
+                        <a:rPr lang="en-US" sz="1400" dirty="0">
+                          <a:latin typeface="Menlo" panose="020B0609030804020204" pitchFamily="49" charset="0"/>
+                          <a:ea typeface="Menlo" panose="020B0609030804020204" pitchFamily="49" charset="0"/>
+                          <a:cs typeface="Menlo" panose="020B0609030804020204" pitchFamily="49" charset="0"/>
+                        </a:rPr>
+                        <a:t>…</a:t>
+                      </a:r>
+                      <a:endParaRPr lang="ru-RU" sz="1400" dirty="0">
+                        <a:latin typeface="Menlo" panose="020B0609030804020204" pitchFamily="49" charset="0"/>
+                        <a:ea typeface="Menlo" panose="020B0609030804020204" pitchFamily="49" charset="0"/>
+                        <a:cs typeface="Menlo" panose="020B0609030804020204" pitchFamily="49" charset="0"/>
+                      </a:endParaRPr>
+                    </a:p>
+                  </a:txBody>
+                  <a:tcPr/>
+                </a:tc>
+                <a:tc>
+                  <a:txBody>
+                    <a:bodyPr/>
+                    <a:lstStyle/>
+                    <a:p>
+                      <a:pPr marL="0" indent="0">
+                        <a:buFont typeface="Arial" panose="020B0604020202020204" pitchFamily="34" charset="0"/>
+                        <a:buNone/>
+                      </a:pPr>
+                      <a:endParaRPr lang="en-US" dirty="0"/>
+                    </a:p>
+                    <a:p>
+                      <a:pPr marL="0" indent="0">
+                        <a:buFont typeface="Arial" panose="020B0604020202020204" pitchFamily="34" charset="0"/>
+                        <a:buNone/>
+                      </a:pPr>
+                      <a:endParaRPr lang="en-US" dirty="0"/>
+                    </a:p>
+                    <a:p>
+                      <a:pPr marL="0" indent="0">
+                        <a:buFont typeface="Arial" panose="020B0604020202020204" pitchFamily="34" charset="0"/>
+                        <a:buNone/>
+                      </a:pPr>
+                      <a:endParaRPr lang="en-US" dirty="0"/>
+                    </a:p>
+                    <a:p>
+                      <a:pPr marL="0" indent="0">
+                        <a:buFont typeface="Arial" panose="020B0604020202020204" pitchFamily="34" charset="0"/>
+                        <a:buNone/>
+                      </a:pPr>
+                      <a:endParaRPr lang="en-US" dirty="0"/>
+                    </a:p>
+                  </a:txBody>
+                  <a:tcPr/>
+                </a:tc>
+                <a:extLst>
+                  <a:ext uri="{0D108BD9-81ED-4DB2-BD59-A6C34878D82A}">
+                    <a16:rowId xmlns:a16="http://schemas.microsoft.com/office/drawing/2014/main" val="2595636294"/>
+                  </a:ext>
+                </a:extLst>
+              </a:tr>
+            </a:tbl>
+          </a:graphicData>
+        </a:graphic>
+      </p:graphicFrame>
+    </p:spTree>
+    <p:extLst>
+      <p:ext uri="{BB962C8B-B14F-4D97-AF65-F5344CB8AC3E}">
+        <p14:creationId xmlns:p14="http://schemas.microsoft.com/office/powerpoint/2010/main" val="2872001974"/>
+      </p:ext>
+    </p:extLst>
+  </p:cSld>
+  <p:clrMapOvr>
+    <a:masterClrMapping/>
+  </p:clrMapOvr>
+</p:sld>
+</file>
+
+<file path=ppt/slides/slide33.xml><?xml version="1.0" encoding="utf-8"?>
+<p:sld xmlns:a="http://schemas.openxmlformats.org/drawingml/2006/main" xmlns:r="http://schemas.openxmlformats.org/officeDocument/2006/relationships" xmlns:p="http://schemas.openxmlformats.org/presentationml/2006/main">
+  <p:cSld>
+    <p:spTree>
+      <p:nvGrpSpPr>
+        <p:cNvPr id="1" name="">
+          <a:extLst>
+            <a:ext uri="{FF2B5EF4-FFF2-40B4-BE49-F238E27FC236}">
+              <a16:creationId xmlns:a16="http://schemas.microsoft.com/office/drawing/2014/main" id="{195E9ED1-3C4E-F8EB-DFD0-A3966A45FB5D}"/>
+            </a:ext>
+          </a:extLst>
+        </p:cNvPr>
+        <p:cNvGrpSpPr/>
+        <p:nvPr/>
+      </p:nvGrpSpPr>
+      <p:grpSpPr>
+        <a:xfrm>
+          <a:off x="0" y="0"/>
+          <a:ext cx="0" cy="0"/>
+          <a:chOff x="0" y="0"/>
+          <a:chExt cx="0" cy="0"/>
+        </a:xfrm>
+      </p:grpSpPr>
+      <p:graphicFrame>
+        <p:nvGraphicFramePr>
+          <p:cNvPr id="5" name="Table 4">
+            <a:extLst>
+              <a:ext uri="{FF2B5EF4-FFF2-40B4-BE49-F238E27FC236}">
+                <a16:creationId xmlns:a16="http://schemas.microsoft.com/office/drawing/2014/main" id="{A8B10DA4-D59F-100B-8911-CB62283727EA}"/>
+              </a:ext>
+            </a:extLst>
+          </p:cNvPr>
+          <p:cNvGraphicFramePr>
+            <a:graphicFrameLocks noGrp="1"/>
+          </p:cNvGraphicFramePr>
+          <p:nvPr/>
+        </p:nvGraphicFramePr>
+        <p:xfrm>
+          <a:off x="0" y="1"/>
+          <a:ext cx="12192000" cy="365760"/>
+        </p:xfrm>
+        <a:graphic>
+          <a:graphicData uri="http://schemas.openxmlformats.org/drawingml/2006/table">
+            <a:tbl>
+              <a:tblPr firstRow="1" bandRow="1">
+                <a:tableStyleId>{5C22544A-7EE6-4342-B048-85BDC9FD1C3A}</a:tableStyleId>
+              </a:tblPr>
+              <a:tblGrid>
+                <a:gridCol w="12192000">
+                  <a:extLst>
+                    <a:ext uri="{9D8B030D-6E8A-4147-A177-3AD203B41FA5}">
+                      <a16:colId xmlns:a16="http://schemas.microsoft.com/office/drawing/2014/main" val="20000"/>
+                    </a:ext>
+                  </a:extLst>
+                </a:gridCol>
+              </a:tblGrid>
+              <a:tr h="321276">
+                <a:tc>
+                  <a:txBody>
+                    <a:bodyPr/>
+                    <a:lstStyle/>
+                    <a:p>
+                      <a:r>
+                        <a:rPr lang="en-US" sz="1800" dirty="0"/>
+                        <a:t>The POSIX file system semantics</a:t>
+                      </a:r>
+                      <a:endParaRPr lang="ru-RU" sz="1800" dirty="0"/>
+                    </a:p>
+                  </a:txBody>
+                  <a:tcPr/>
+                </a:tc>
+                <a:extLst>
+                  <a:ext uri="{0D108BD9-81ED-4DB2-BD59-A6C34878D82A}">
+                    <a16:rowId xmlns:a16="http://schemas.microsoft.com/office/drawing/2014/main" val="10000"/>
+                  </a:ext>
+                </a:extLst>
+              </a:tr>
+            </a:tbl>
+          </a:graphicData>
+        </a:graphic>
+      </p:graphicFrame>
+      <p:graphicFrame>
+        <p:nvGraphicFramePr>
+          <p:cNvPr id="6" name="Table 5">
+            <a:extLst>
+              <a:ext uri="{FF2B5EF4-FFF2-40B4-BE49-F238E27FC236}">
+                <a16:creationId xmlns:a16="http://schemas.microsoft.com/office/drawing/2014/main" id="{CCD6C651-9CEB-8996-9A85-EBE64B041F3B}"/>
+              </a:ext>
+            </a:extLst>
+          </p:cNvPr>
+          <p:cNvGraphicFramePr>
+            <a:graphicFrameLocks noGrp="1"/>
+          </p:cNvGraphicFramePr>
+          <p:nvPr/>
+        </p:nvGraphicFramePr>
+        <p:xfrm>
+          <a:off x="0" y="6532604"/>
+          <a:ext cx="12192000" cy="365760"/>
+        </p:xfrm>
+        <a:graphic>
+          <a:graphicData uri="http://schemas.openxmlformats.org/drawingml/2006/table">
+            <a:tbl>
+              <a:tblPr firstRow="1" bandRow="1">
+                <a:tableStyleId>{5C22544A-7EE6-4342-B048-85BDC9FD1C3A}</a:tableStyleId>
+              </a:tblPr>
+              <a:tblGrid>
+                <a:gridCol w="12192000">
+                  <a:extLst>
+                    <a:ext uri="{9D8B030D-6E8A-4147-A177-3AD203B41FA5}">
+                      <a16:colId xmlns:a16="http://schemas.microsoft.com/office/drawing/2014/main" val="20000"/>
+                    </a:ext>
+                  </a:extLst>
+                </a:gridCol>
+              </a:tblGrid>
+              <a:tr h="308094">
+                <a:tc>
+                  <a:txBody>
+                    <a:bodyPr/>
+                    <a:lstStyle/>
+                    <a:p>
+                      <a:endParaRPr lang="ru-RU" dirty="0"/>
+                    </a:p>
+                  </a:txBody>
+                  <a:tcPr/>
+                </a:tc>
+                <a:extLst>
+                  <a:ext uri="{0D108BD9-81ED-4DB2-BD59-A6C34878D82A}">
+                    <a16:rowId xmlns:a16="http://schemas.microsoft.com/office/drawing/2014/main" val="10000"/>
+                  </a:ext>
+                </a:extLst>
+              </a:tr>
+            </a:tbl>
+          </a:graphicData>
+        </a:graphic>
+      </p:graphicFrame>
+      <p:graphicFrame>
+        <p:nvGraphicFramePr>
+          <p:cNvPr id="2" name="Table 1">
+            <a:extLst>
+              <a:ext uri="{FF2B5EF4-FFF2-40B4-BE49-F238E27FC236}">
+                <a16:creationId xmlns:a16="http://schemas.microsoft.com/office/drawing/2014/main" id="{62285E6A-E44E-48F4-68B7-F2563D8C0CFF}"/>
+              </a:ext>
+            </a:extLst>
+          </p:cNvPr>
+          <p:cNvGraphicFramePr>
+            <a:graphicFrameLocks noGrp="1"/>
+          </p:cNvGraphicFramePr>
+          <p:nvPr>
+            <p:extLst>
+              <p:ext uri="{D42A27DB-BD31-4B8C-83A1-F6EECF244321}">
+                <p14:modId xmlns:p14="http://schemas.microsoft.com/office/powerpoint/2010/main" val="2553993525"/>
+              </p:ext>
+            </p:extLst>
+          </p:nvPr>
+        </p:nvGraphicFramePr>
+        <p:xfrm>
+          <a:off x="0" y="342613"/>
+          <a:ext cx="12192000" cy="3702990"/>
+        </p:xfrm>
+        <a:graphic>
+          <a:graphicData uri="http://schemas.openxmlformats.org/drawingml/2006/table">
+            <a:tbl>
+              <a:tblPr firstRow="1" bandRow="1">
+                <a:tableStyleId>{3B4B98B0-60AC-42C2-AFA5-B58CD77FA1E5}</a:tableStyleId>
+              </a:tblPr>
+              <a:tblGrid>
+                <a:gridCol w="6096000">
+                  <a:extLst>
+                    <a:ext uri="{9D8B030D-6E8A-4147-A177-3AD203B41FA5}">
+                      <a16:colId xmlns:a16="http://schemas.microsoft.com/office/drawing/2014/main" val="20000"/>
+                    </a:ext>
+                  </a:extLst>
+                </a:gridCol>
+                <a:gridCol w="6096000">
+                  <a:extLst>
+                    <a:ext uri="{9D8B030D-6E8A-4147-A177-3AD203B41FA5}">
+                      <a16:colId xmlns:a16="http://schemas.microsoft.com/office/drawing/2014/main" val="3688292786"/>
+                    </a:ext>
+                  </a:extLst>
+                </a:gridCol>
+              </a:tblGrid>
+              <a:tr h="434175">
+                <a:tc>
+                  <a:txBody>
+                    <a:bodyPr/>
+                    <a:lstStyle/>
+                    <a:p>
+                      <a:r>
+                        <a:rPr lang="en-US" dirty="0"/>
+                        <a:t>A file system is a shared resource: concurrent access and races</a:t>
+                      </a:r>
+                      <a:endParaRPr lang="ru-RU" dirty="0"/>
+                    </a:p>
+                  </a:txBody>
+                  <a:tcPr/>
+                </a:tc>
+                <a:tc>
+                  <a:txBody>
+                    <a:bodyPr/>
+                    <a:lstStyle/>
+                    <a:p>
+                      <a:endParaRPr lang="ru-RU" dirty="0"/>
+                    </a:p>
+                  </a:txBody>
+                  <a:tcPr/>
+                </a:tc>
+                <a:extLst>
+                  <a:ext uri="{0D108BD9-81ED-4DB2-BD59-A6C34878D82A}">
+                    <a16:rowId xmlns:a16="http://schemas.microsoft.com/office/drawing/2014/main" val="10000"/>
+                  </a:ext>
+                </a:extLst>
+              </a:tr>
+              <a:tr h="434175">
+                <a:tc gridSpan="2">
+                  <a:txBody>
+                    <a:bodyPr/>
+                    <a:lstStyle/>
+                    <a:p>
+                      <a:r>
+                        <a:rPr lang="en-US" dirty="0"/>
+                        <a:t>A </a:t>
+                      </a:r>
+                      <a:r>
+                        <a:rPr lang="en-US" dirty="0" err="1"/>
+                        <a:t>userspace</a:t>
+                      </a:r>
+                      <a:r>
+                        <a:rPr lang="en-US" dirty="0"/>
+                        <a:t> process can race with the kernel as well.</a:t>
+                      </a:r>
+                      <a:endParaRPr lang="ru-RU" dirty="0"/>
+                    </a:p>
+                  </a:txBody>
+                  <a:tcPr/>
+                </a:tc>
+                <a:tc hMerge="1">
+                  <a:txBody>
+                    <a:bodyPr/>
+                    <a:lstStyle/>
+                    <a:p>
+                      <a:endParaRPr lang="ru-RU" dirty="0"/>
+                    </a:p>
+                  </a:txBody>
+                  <a:tcPr/>
+                </a:tc>
+                <a:extLst>
+                  <a:ext uri="{0D108BD9-81ED-4DB2-BD59-A6C34878D82A}">
+                    <a16:rowId xmlns:a16="http://schemas.microsoft.com/office/drawing/2014/main" val="3908480295"/>
+                  </a:ext>
+                </a:extLst>
+              </a:tr>
+              <a:tr h="434175">
+                <a:tc>
+                  <a:txBody>
+                    <a:bodyPr/>
+                    <a:lstStyle/>
+                    <a:p>
+                      <a:pPr marL="0" indent="0">
+                        <a:buFont typeface="Arial" panose="020B0604020202020204" pitchFamily="34" charset="0"/>
+                        <a:buNone/>
+                      </a:pPr>
+                      <a:r>
+                        <a:rPr lang="en-US" sz="1400" dirty="0" err="1">
+                          <a:latin typeface="Menlo" panose="020B0609030804020204" pitchFamily="49" charset="0"/>
+                          <a:ea typeface="Menlo" panose="020B0609030804020204" pitchFamily="49" charset="0"/>
+                          <a:cs typeface="Menlo" panose="020B0609030804020204" pitchFamily="49" charset="0"/>
+                        </a:rPr>
+                        <a:t>fd</a:t>
+                      </a:r>
+                      <a:r>
+                        <a:rPr lang="en-US" sz="1400" dirty="0">
+                          <a:latin typeface="Menlo" panose="020B0609030804020204" pitchFamily="49" charset="0"/>
+                          <a:ea typeface="Menlo" panose="020B0609030804020204" pitchFamily="49" charset="0"/>
+                          <a:cs typeface="Menlo" panose="020B0609030804020204" pitchFamily="49" charset="0"/>
+                        </a:rPr>
+                        <a:t> = open(“/a/file”, O_RDWR | O_DIRECT);</a:t>
+                      </a:r>
+                    </a:p>
+                    <a:p>
+                      <a:pPr marL="0" indent="0">
+                        <a:buFont typeface="Arial" panose="020B0604020202020204" pitchFamily="34" charset="0"/>
+                        <a:buNone/>
+                      </a:pPr>
+                      <a:r>
+                        <a:rPr lang="en-US" sz="1400" dirty="0">
+                          <a:latin typeface="Menlo" panose="020B0609030804020204" pitchFamily="49" charset="0"/>
+                          <a:ea typeface="Menlo" panose="020B0609030804020204" pitchFamily="49" charset="0"/>
+                          <a:cs typeface="Menlo" panose="020B0609030804020204" pitchFamily="49" charset="0"/>
+                        </a:rPr>
+                        <a:t>write(</a:t>
+                      </a:r>
+                      <a:r>
+                        <a:rPr lang="en-US" sz="1400" dirty="0" err="1">
+                          <a:latin typeface="Menlo" panose="020B0609030804020204" pitchFamily="49" charset="0"/>
+                          <a:ea typeface="Menlo" panose="020B0609030804020204" pitchFamily="49" charset="0"/>
+                          <a:cs typeface="Menlo" panose="020B0609030804020204" pitchFamily="49" charset="0"/>
+                        </a:rPr>
+                        <a:t>fd</a:t>
+                      </a:r>
+                      <a:r>
+                        <a:rPr lang="en-US" sz="1400" dirty="0">
+                          <a:latin typeface="Menlo" panose="020B0609030804020204" pitchFamily="49" charset="0"/>
+                          <a:ea typeface="Menlo" panose="020B0609030804020204" pitchFamily="49" charset="0"/>
+                          <a:cs typeface="Menlo" panose="020B0609030804020204" pitchFamily="49" charset="0"/>
+                        </a:rPr>
+                        <a:t>, </a:t>
+                      </a:r>
+                      <a:r>
+                        <a:rPr lang="en-US" sz="1400" dirty="0" err="1">
+                          <a:latin typeface="Menlo" panose="020B0609030804020204" pitchFamily="49" charset="0"/>
+                          <a:ea typeface="Menlo" panose="020B0609030804020204" pitchFamily="49" charset="0"/>
+                          <a:cs typeface="Menlo" panose="020B0609030804020204" pitchFamily="49" charset="0"/>
+                        </a:rPr>
+                        <a:t>buf</a:t>
+                      </a:r>
+                      <a:r>
+                        <a:rPr lang="en-US" sz="1400" dirty="0">
+                          <a:latin typeface="Menlo" panose="020B0609030804020204" pitchFamily="49" charset="0"/>
+                          <a:ea typeface="Menlo" panose="020B0609030804020204" pitchFamily="49" charset="0"/>
+                          <a:cs typeface="Menlo" panose="020B0609030804020204" pitchFamily="49" charset="0"/>
+                        </a:rPr>
+                        <a:t>, </a:t>
+                      </a:r>
+                      <a:r>
+                        <a:rPr lang="en-US" sz="1400" dirty="0" err="1">
+                          <a:latin typeface="Menlo" panose="020B0609030804020204" pitchFamily="49" charset="0"/>
+                          <a:ea typeface="Menlo" panose="020B0609030804020204" pitchFamily="49" charset="0"/>
+                          <a:cs typeface="Menlo" panose="020B0609030804020204" pitchFamily="49" charset="0"/>
+                        </a:rPr>
+                        <a:t>len</a:t>
+                      </a:r>
+                      <a:r>
+                        <a:rPr lang="en-US" sz="1400" dirty="0">
+                          <a:latin typeface="Menlo" panose="020B0609030804020204" pitchFamily="49" charset="0"/>
+                          <a:ea typeface="Menlo" panose="020B0609030804020204" pitchFamily="49" charset="0"/>
+                          <a:cs typeface="Menlo" panose="020B0609030804020204" pitchFamily="49" charset="0"/>
+                        </a:rPr>
+                        <a:t>);</a:t>
+                      </a:r>
+                    </a:p>
+                    <a:p>
+                      <a:pPr marL="0" indent="0">
+                        <a:buFont typeface="Arial" panose="020B0604020202020204" pitchFamily="34" charset="0"/>
+                        <a:buNone/>
+                      </a:pPr>
+                      <a:r>
+                        <a:rPr lang="en-US" sz="1400" dirty="0">
+                          <a:latin typeface="Menlo" panose="020B0609030804020204" pitchFamily="49" charset="0"/>
+                          <a:ea typeface="Menlo" panose="020B0609030804020204" pitchFamily="49" charset="0"/>
+                          <a:cs typeface="Menlo" panose="020B0609030804020204" pitchFamily="49" charset="0"/>
+                        </a:rPr>
+                        <a:t>…</a:t>
+                      </a:r>
+                      <a:endParaRPr lang="ru-RU" sz="1400" dirty="0">
+                        <a:latin typeface="Menlo" panose="020B0609030804020204" pitchFamily="49" charset="0"/>
+                        <a:ea typeface="Menlo" panose="020B0609030804020204" pitchFamily="49" charset="0"/>
+                        <a:cs typeface="Menlo" panose="020B0609030804020204" pitchFamily="49" charset="0"/>
+                      </a:endParaRPr>
+                    </a:p>
+                  </a:txBody>
+                  <a:tcPr/>
+                </a:tc>
+                <a:tc>
+                  <a:txBody>
+                    <a:bodyPr/>
+                    <a:lstStyle/>
+                    <a:p>
+                      <a:pPr marL="0" indent="0">
+                        <a:buFont typeface="Arial" panose="020B0604020202020204" pitchFamily="34" charset="0"/>
+                        <a:buNone/>
+                      </a:pPr>
+                      <a:r>
+                        <a:rPr lang="en-US" dirty="0" err="1">
+                          <a:latin typeface="Menlo" panose="020B0609030804020204" pitchFamily="49" charset="0"/>
+                          <a:ea typeface="Menlo" panose="020B0609030804020204" pitchFamily="49" charset="0"/>
+                          <a:cs typeface="Menlo" panose="020B0609030804020204" pitchFamily="49" charset="0"/>
+                        </a:rPr>
+                        <a:t>buf</a:t>
+                      </a:r>
+                      <a:r>
+                        <a:rPr lang="en-US" dirty="0"/>
+                        <a:t> must not be modified while a write is in progress. Some devices may write a mix of the old and new data. Some devices that implement </a:t>
+                      </a:r>
+                      <a:r>
+                        <a:rPr lang="en-US" dirty="0" err="1"/>
+                        <a:t>checksumming</a:t>
+                      </a:r>
+                      <a:r>
+                        <a:rPr lang="en-US" dirty="0"/>
+                        <a:t> may detect a race.</a:t>
+                      </a:r>
+                    </a:p>
+                  </a:txBody>
+                  <a:tcPr/>
+                </a:tc>
+                <a:extLst>
+                  <a:ext uri="{0D108BD9-81ED-4DB2-BD59-A6C34878D82A}">
+                    <a16:rowId xmlns:a16="http://schemas.microsoft.com/office/drawing/2014/main" val="3226834803"/>
+                  </a:ext>
+                </a:extLst>
+              </a:tr>
+              <a:tr h="434175">
+                <a:tc>
+                  <a:txBody>
+                    <a:bodyPr/>
+                    <a:lstStyle/>
+                    <a:p>
+                      <a:pPr marL="0" indent="0">
+                        <a:buFont typeface="Arial" panose="020B0604020202020204" pitchFamily="34" charset="0"/>
+                        <a:buNone/>
+                      </a:pPr>
+                      <a:r>
+                        <a:rPr lang="en-US" sz="1400" dirty="0" err="1">
+                          <a:latin typeface="Menlo" panose="020B0609030804020204" pitchFamily="49" charset="0"/>
+                          <a:ea typeface="Menlo" panose="020B0609030804020204" pitchFamily="49" charset="0"/>
+                          <a:cs typeface="Menlo" panose="020B0609030804020204" pitchFamily="49" charset="0"/>
+                        </a:rPr>
+                        <a:t>fd</a:t>
+                      </a:r>
+                      <a:r>
+                        <a:rPr lang="en-US" sz="1400" dirty="0">
+                          <a:latin typeface="Menlo" panose="020B0609030804020204" pitchFamily="49" charset="0"/>
+                          <a:ea typeface="Menlo" panose="020B0609030804020204" pitchFamily="49" charset="0"/>
+                          <a:cs typeface="Menlo" panose="020B0609030804020204" pitchFamily="49" charset="0"/>
+                        </a:rPr>
+                        <a:t> = open(“/a/file”, O_RDWR | O_DIRECT);</a:t>
+                      </a:r>
+                    </a:p>
+                    <a:p>
+                      <a:pPr marL="0" indent="0">
+                        <a:buFont typeface="Arial" panose="020B0604020202020204" pitchFamily="34" charset="0"/>
+                        <a:buNone/>
+                      </a:pPr>
+                      <a:r>
+                        <a:rPr lang="en-US" sz="1400" dirty="0">
+                          <a:latin typeface="Menlo" panose="020B0609030804020204" pitchFamily="49" charset="0"/>
+                          <a:ea typeface="Menlo" panose="020B0609030804020204" pitchFamily="49" charset="0"/>
+                          <a:cs typeface="Menlo" panose="020B0609030804020204" pitchFamily="49" charset="0"/>
+                        </a:rPr>
+                        <a:t>write(</a:t>
+                      </a:r>
+                      <a:r>
+                        <a:rPr lang="en-US" sz="1400" dirty="0" err="1">
+                          <a:latin typeface="Menlo" panose="020B0609030804020204" pitchFamily="49" charset="0"/>
+                          <a:ea typeface="Menlo" panose="020B0609030804020204" pitchFamily="49" charset="0"/>
+                          <a:cs typeface="Menlo" panose="020B0609030804020204" pitchFamily="49" charset="0"/>
+                        </a:rPr>
+                        <a:t>fd</a:t>
+                      </a:r>
+                      <a:r>
+                        <a:rPr lang="en-US" sz="1400" dirty="0">
+                          <a:latin typeface="Menlo" panose="020B0609030804020204" pitchFamily="49" charset="0"/>
+                          <a:ea typeface="Menlo" panose="020B0609030804020204" pitchFamily="49" charset="0"/>
+                          <a:cs typeface="Menlo" panose="020B0609030804020204" pitchFamily="49" charset="0"/>
+                        </a:rPr>
+                        <a:t>, </a:t>
+                      </a:r>
+                      <a:r>
+                        <a:rPr lang="en-US" sz="1400" dirty="0" err="1">
+                          <a:latin typeface="Menlo" panose="020B0609030804020204" pitchFamily="49" charset="0"/>
+                          <a:ea typeface="Menlo" panose="020B0609030804020204" pitchFamily="49" charset="0"/>
+                          <a:cs typeface="Menlo" panose="020B0609030804020204" pitchFamily="49" charset="0"/>
+                        </a:rPr>
+                        <a:t>buf</a:t>
+                      </a:r>
+                      <a:r>
+                        <a:rPr lang="en-US" sz="1400" dirty="0">
+                          <a:latin typeface="Menlo" panose="020B0609030804020204" pitchFamily="49" charset="0"/>
+                          <a:ea typeface="Menlo" panose="020B0609030804020204" pitchFamily="49" charset="0"/>
+                          <a:cs typeface="Menlo" panose="020B0609030804020204" pitchFamily="49" charset="0"/>
+                        </a:rPr>
+                        <a:t>, </a:t>
+                      </a:r>
+                      <a:r>
+                        <a:rPr lang="en-US" sz="1400" dirty="0" err="1">
+                          <a:latin typeface="Menlo" panose="020B0609030804020204" pitchFamily="49" charset="0"/>
+                          <a:ea typeface="Menlo" panose="020B0609030804020204" pitchFamily="49" charset="0"/>
+                          <a:cs typeface="Menlo" panose="020B0609030804020204" pitchFamily="49" charset="0"/>
+                        </a:rPr>
+                        <a:t>len</a:t>
+                      </a:r>
+                      <a:r>
+                        <a:rPr lang="en-US" sz="1400" dirty="0">
+                          <a:latin typeface="Menlo" panose="020B0609030804020204" pitchFamily="49" charset="0"/>
+                          <a:ea typeface="Menlo" panose="020B0609030804020204" pitchFamily="49" charset="0"/>
+                          <a:cs typeface="Menlo" panose="020B0609030804020204" pitchFamily="49" charset="0"/>
+                        </a:rPr>
+                        <a:t>);</a:t>
+                      </a:r>
+                    </a:p>
+                    <a:p>
+                      <a:pPr marL="0" indent="0">
+                        <a:buFont typeface="Arial" panose="020B0604020202020204" pitchFamily="34" charset="0"/>
+                        <a:buNone/>
+                      </a:pPr>
+                      <a:r>
+                        <a:rPr lang="en-US" sz="1400" dirty="0">
+                          <a:latin typeface="Menlo" panose="020B0609030804020204" pitchFamily="49" charset="0"/>
+                          <a:ea typeface="Menlo" panose="020B0609030804020204" pitchFamily="49" charset="0"/>
+                          <a:cs typeface="Menlo" panose="020B0609030804020204" pitchFamily="49" charset="0"/>
+                        </a:rPr>
+                        <a:t>…</a:t>
+                      </a:r>
+                      <a:endParaRPr lang="ru-RU" sz="1400" dirty="0">
+                        <a:latin typeface="Menlo" panose="020B0609030804020204" pitchFamily="49" charset="0"/>
+                        <a:ea typeface="Menlo" panose="020B0609030804020204" pitchFamily="49" charset="0"/>
+                        <a:cs typeface="Menlo" panose="020B0609030804020204" pitchFamily="49" charset="0"/>
+                      </a:endParaRPr>
+                    </a:p>
+                  </a:txBody>
+                  <a:tcPr/>
+                </a:tc>
+                <a:tc>
+                  <a:txBody>
+                    <a:bodyPr/>
+                    <a:lstStyle/>
+                    <a:p>
+                      <a:pPr marL="0" indent="0">
+                        <a:buFont typeface="Arial" panose="020B0604020202020204" pitchFamily="34" charset="0"/>
+                        <a:buNone/>
+                      </a:pPr>
+                      <a:r>
+                        <a:rPr lang="en-US" dirty="0"/>
+                        <a:t>What happens if another thread </a:t>
+                      </a:r>
+                      <a:r>
+                        <a:rPr lang="en-US" dirty="0" err="1">
+                          <a:latin typeface="Menlo" panose="020B0609030804020204" pitchFamily="49" charset="0"/>
+                          <a:ea typeface="Menlo" panose="020B0609030804020204" pitchFamily="49" charset="0"/>
+                          <a:cs typeface="Menlo" panose="020B0609030804020204" pitchFamily="49" charset="0"/>
+                        </a:rPr>
+                        <a:t>ftruncate</a:t>
+                      </a:r>
+                      <a:r>
+                        <a:rPr lang="en-US" dirty="0">
+                          <a:latin typeface="Menlo" panose="020B0609030804020204" pitchFamily="49" charset="0"/>
+                          <a:ea typeface="Menlo" panose="020B0609030804020204" pitchFamily="49" charset="0"/>
+                          <a:cs typeface="Menlo" panose="020B0609030804020204" pitchFamily="49" charset="0"/>
+                        </a:rPr>
+                        <a:t>()</a:t>
+                      </a:r>
+                      <a:r>
+                        <a:rPr lang="en-US" dirty="0"/>
+                        <a:t>s the file so that </a:t>
+                      </a:r>
+                      <a:r>
+                        <a:rPr lang="en-US" dirty="0" err="1">
+                          <a:latin typeface="Menlo" panose="020B0609030804020204" pitchFamily="49" charset="0"/>
+                          <a:ea typeface="Menlo" panose="020B0609030804020204" pitchFamily="49" charset="0"/>
+                          <a:cs typeface="Menlo" panose="020B0609030804020204" pitchFamily="49" charset="0"/>
+                        </a:rPr>
+                        <a:t>buf</a:t>
+                      </a:r>
+                      <a:r>
+                        <a:rPr lang="en-US" dirty="0"/>
+                        <a:t> is to be written past the new end of the file?</a:t>
+                      </a:r>
+                    </a:p>
+                  </a:txBody>
+                  <a:tcPr/>
+                </a:tc>
+                <a:extLst>
+                  <a:ext uri="{0D108BD9-81ED-4DB2-BD59-A6C34878D82A}">
+                    <a16:rowId xmlns:a16="http://schemas.microsoft.com/office/drawing/2014/main" val="1075154831"/>
+                  </a:ext>
+                </a:extLst>
+              </a:tr>
+              <a:tr h="434175">
+                <a:tc>
+                  <a:txBody>
+                    <a:bodyPr/>
+                    <a:lstStyle/>
+                    <a:p>
+                      <a:pPr marL="0" indent="0">
+                        <a:buFont typeface="Arial" panose="020B0604020202020204" pitchFamily="34" charset="0"/>
+                        <a:buNone/>
+                      </a:pPr>
+                      <a:r>
+                        <a:rPr lang="en-US" sz="1400" dirty="0" err="1">
+                          <a:latin typeface="Menlo" panose="020B0609030804020204" pitchFamily="49" charset="0"/>
+                          <a:ea typeface="Menlo" panose="020B0609030804020204" pitchFamily="49" charset="0"/>
+                          <a:cs typeface="Menlo" panose="020B0609030804020204" pitchFamily="49" charset="0"/>
+                        </a:rPr>
+                        <a:t>fd</a:t>
+                      </a:r>
+                      <a:r>
+                        <a:rPr lang="en-US" sz="1400" dirty="0">
+                          <a:latin typeface="Menlo" panose="020B0609030804020204" pitchFamily="49" charset="0"/>
+                          <a:ea typeface="Menlo" panose="020B0609030804020204" pitchFamily="49" charset="0"/>
+                          <a:cs typeface="Menlo" panose="020B0609030804020204" pitchFamily="49" charset="0"/>
+                        </a:rPr>
+                        <a:t> = open(“/a/file”, O_RDONLY | O_DIRECT);</a:t>
+                      </a:r>
+                    </a:p>
+                    <a:p>
+                      <a:pPr marL="0" indent="0">
+                        <a:buFont typeface="Arial" panose="020B0604020202020204" pitchFamily="34" charset="0"/>
+                        <a:buNone/>
+                      </a:pPr>
+                      <a:r>
+                        <a:rPr lang="en-US" sz="1400" dirty="0">
+                          <a:latin typeface="Menlo" panose="020B0609030804020204" pitchFamily="49" charset="0"/>
+                          <a:ea typeface="Menlo" panose="020B0609030804020204" pitchFamily="49" charset="0"/>
+                          <a:cs typeface="Menlo" panose="020B0609030804020204" pitchFamily="49" charset="0"/>
+                        </a:rPr>
+                        <a:t>read(</a:t>
+                      </a:r>
+                      <a:r>
+                        <a:rPr lang="en-US" sz="1400" dirty="0" err="1">
+                          <a:latin typeface="Menlo" panose="020B0609030804020204" pitchFamily="49" charset="0"/>
+                          <a:ea typeface="Menlo" panose="020B0609030804020204" pitchFamily="49" charset="0"/>
+                          <a:cs typeface="Menlo" panose="020B0609030804020204" pitchFamily="49" charset="0"/>
+                        </a:rPr>
+                        <a:t>fd</a:t>
+                      </a:r>
+                      <a:r>
+                        <a:rPr lang="en-US" sz="1400" dirty="0">
+                          <a:latin typeface="Menlo" panose="020B0609030804020204" pitchFamily="49" charset="0"/>
+                          <a:ea typeface="Menlo" panose="020B0609030804020204" pitchFamily="49" charset="0"/>
+                          <a:cs typeface="Menlo" panose="020B0609030804020204" pitchFamily="49" charset="0"/>
+                        </a:rPr>
+                        <a:t>, </a:t>
+                      </a:r>
+                      <a:r>
+                        <a:rPr lang="en-US" sz="1400" dirty="0" err="1">
+                          <a:latin typeface="Menlo" panose="020B0609030804020204" pitchFamily="49" charset="0"/>
+                          <a:ea typeface="Menlo" panose="020B0609030804020204" pitchFamily="49" charset="0"/>
+                          <a:cs typeface="Menlo" panose="020B0609030804020204" pitchFamily="49" charset="0"/>
+                        </a:rPr>
+                        <a:t>buf</a:t>
+                      </a:r>
+                      <a:r>
+                        <a:rPr lang="en-US" sz="1400" dirty="0">
+                          <a:latin typeface="Menlo" panose="020B0609030804020204" pitchFamily="49" charset="0"/>
+                          <a:ea typeface="Menlo" panose="020B0609030804020204" pitchFamily="49" charset="0"/>
+                          <a:cs typeface="Menlo" panose="020B0609030804020204" pitchFamily="49" charset="0"/>
+                        </a:rPr>
+                        <a:t>, </a:t>
+                      </a:r>
+                      <a:r>
+                        <a:rPr lang="en-US" sz="1400" dirty="0" err="1">
+                          <a:latin typeface="Menlo" panose="020B0609030804020204" pitchFamily="49" charset="0"/>
+                          <a:ea typeface="Menlo" panose="020B0609030804020204" pitchFamily="49" charset="0"/>
+                          <a:cs typeface="Menlo" panose="020B0609030804020204" pitchFamily="49" charset="0"/>
+                        </a:rPr>
+                        <a:t>len</a:t>
+                      </a:r>
+                      <a:r>
+                        <a:rPr lang="en-US" sz="1400" dirty="0">
+                          <a:latin typeface="Menlo" panose="020B0609030804020204" pitchFamily="49" charset="0"/>
+                          <a:ea typeface="Menlo" panose="020B0609030804020204" pitchFamily="49" charset="0"/>
+                          <a:cs typeface="Menlo" panose="020B0609030804020204" pitchFamily="49" charset="0"/>
+                        </a:rPr>
+                        <a:t>);</a:t>
+                      </a:r>
+                    </a:p>
+                    <a:p>
+                      <a:pPr marL="0" indent="0">
+                        <a:buFont typeface="Arial" panose="020B0604020202020204" pitchFamily="34" charset="0"/>
+                        <a:buNone/>
+                      </a:pPr>
+                      <a:r>
+                        <a:rPr lang="en-US" sz="1400" dirty="0">
+                          <a:latin typeface="Menlo" panose="020B0609030804020204" pitchFamily="49" charset="0"/>
+                          <a:ea typeface="Menlo" panose="020B0609030804020204" pitchFamily="49" charset="0"/>
+                          <a:cs typeface="Menlo" panose="020B0609030804020204" pitchFamily="49" charset="0"/>
+                        </a:rPr>
+                        <a:t>…</a:t>
+                      </a:r>
+                      <a:endParaRPr lang="ru-RU" sz="1400" dirty="0">
+                        <a:latin typeface="Menlo" panose="020B0609030804020204" pitchFamily="49" charset="0"/>
+                        <a:ea typeface="Menlo" panose="020B0609030804020204" pitchFamily="49" charset="0"/>
+                        <a:cs typeface="Menlo" panose="020B0609030804020204" pitchFamily="49" charset="0"/>
+                      </a:endParaRPr>
+                    </a:p>
+                  </a:txBody>
+                  <a:tcPr/>
+                </a:tc>
+                <a:tc>
+                  <a:txBody>
+                    <a:bodyPr/>
+                    <a:lstStyle/>
+                    <a:p>
+                      <a:pPr marL="0" indent="0">
+                        <a:buFont typeface="Arial" panose="020B0604020202020204" pitchFamily="34" charset="0"/>
+                        <a:buNone/>
+                      </a:pPr>
+                      <a:r>
+                        <a:rPr lang="en-US" dirty="0"/>
+                        <a:t>A DMA operation is configured with the physical address of pages to write to. If another thread </a:t>
+                      </a:r>
+                      <a:r>
+                        <a:rPr lang="en-US" dirty="0">
+                          <a:latin typeface="Menlo" panose="020B0609030804020204" pitchFamily="49" charset="0"/>
+                          <a:ea typeface="Menlo" panose="020B0609030804020204" pitchFamily="49" charset="0"/>
+                          <a:cs typeface="Menlo" panose="020B0609030804020204" pitchFamily="49" charset="0"/>
+                        </a:rPr>
+                        <a:t>fork()</a:t>
+                      </a:r>
+                      <a:r>
+                        <a:rPr lang="en-US" dirty="0"/>
+                        <a:t>s while a read is in progress, then COW (copy-on-write) can move the buffer to other physical pages.</a:t>
+                      </a:r>
+                    </a:p>
+                  </a:txBody>
+                  <a:tcPr/>
+                </a:tc>
+                <a:extLst>
+                  <a:ext uri="{0D108BD9-81ED-4DB2-BD59-A6C34878D82A}">
+                    <a16:rowId xmlns:a16="http://schemas.microsoft.com/office/drawing/2014/main" val="2595636294"/>
+                  </a:ext>
+                </a:extLst>
+              </a:tr>
+            </a:tbl>
+          </a:graphicData>
+        </a:graphic>
+      </p:graphicFrame>
+    </p:spTree>
+    <p:extLst>
+      <p:ext uri="{BB962C8B-B14F-4D97-AF65-F5344CB8AC3E}">
+        <p14:creationId xmlns:p14="http://schemas.microsoft.com/office/powerpoint/2010/main" val="500163180"/>
       </p:ext>
     </p:extLst>
   </p:cSld>
